--- a/exports/pptx/lessons/middle-module-12-movement-of-sun/day-01-suns-path.pptx
+++ b/exports/pptx/lessons/middle-module-12-movement-of-sun/day-01-suns-path.pptx
@@ -15,9 +15,17 @@
     <p:sldId id="263" r:id="rId9"/>
     <p:sldId id="264" r:id="rId10"/>
     <p:sldId id="265" r:id="rId11"/>
+    <p:sldId id="266" r:id="rId12"/>
+    <p:sldId id="267" r:id="rId13"/>
+    <p:sldId id="268" r:id="rId14"/>
+    <p:sldId id="269" r:id="rId15"/>
+    <p:sldId id="270" r:id="rId16"/>
+    <p:sldId id="271" r:id="rId17"/>
+    <p:sldId id="272" r:id="rId18"/>
+    <p:sldId id="273" r:id="rId19"/>
   </p:sldIdLst>
   <p:notesMasterIdLst>
-    <p:notesMasterId r:id="rId12"/>
+    <p:notesMasterId r:id="rId20"/>
   </p:notesMasterIdLst>
   <p:sldSz cx="9144000" cy="5143500"/>
   <p:notesSz cx="5143500" cy="9144000"/>
@@ -623,6 +631,710 @@
             <a:fld id="{F7021451-1387-4CA6-816F-3879F97B5CBC}" type="slidenum">
               <a:rPr lang="en-US"/>
               <a:t>10</a:t>
+            </a:fld>
+            <a:endParaRPr lang="en-US"/>
+          </a:p>
+        </p:txBody>
+      </p:sp>
+    </p:spTree>
+    <p:extLst>
+      <p:ext uri="{BB962C8B-B14F-4D97-AF65-F5344CB8AC3E}">
+        <p14:creationId xmlns:p14="http://schemas.microsoft.com/office/powerpoint/2010/main" val="1024086991"/>
+      </p:ext>
+    </p:extLst>
+  </p:cSld>
+  <p:clrMapOvr>
+    <a:masterClrMapping/>
+  </p:clrMapOvr>
+</p:notes>
+</file>
+
+<file path=ppt/notesSlides/notesSlide11.xml><?xml version="1.0" encoding="utf-8"?>
+<p:notes xmlns:a="http://schemas.openxmlformats.org/drawingml/2006/main" xmlns:r="http://schemas.openxmlformats.org/officeDocument/2006/relationships" xmlns:p="http://schemas.openxmlformats.org/presentationml/2006/main">
+  <p:cSld>
+    <p:spTree>
+      <p:nvGrpSpPr>
+        <p:cNvPr id="1" name=""/>
+        <p:cNvGrpSpPr/>
+        <p:nvPr/>
+      </p:nvGrpSpPr>
+      <p:grpSpPr>
+        <a:xfrm>
+          <a:off x="0" y="0"/>
+          <a:ext cx="0" cy="0"/>
+          <a:chOff x="0" y="0"/>
+          <a:chExt cx="0" cy="0"/>
+        </a:xfrm>
+      </p:grpSpPr>
+      <p:sp>
+        <p:nvSpPr>
+          <p:cNvPr id="2" name="Slide Image Placeholder 1"/>
+          <p:cNvSpPr>
+            <a:spLocks noGrp="1" noRot="1" noChangeAspect="1"/>
+          </p:cNvSpPr>
+          <p:nvPr>
+            <p:ph type="sldImg"/>
+          </p:nvPr>
+        </p:nvSpPr>
+        <p:spPr/>
+      </p:sp>
+      <p:sp>
+        <p:nvSpPr>
+          <p:cNvPr id="3" name="Notes Placeholder 2"/>
+          <p:cNvSpPr>
+            <a:spLocks noGrp="1"/>
+          </p:cNvSpPr>
+          <p:nvPr>
+            <p:ph type="body" idx="1"/>
+          </p:nvPr>
+        </p:nvSpPr>
+        <p:spPr/>
+        <p:txBody>
+          <a:bodyPr/>
+          <a:lstStyle/>
+          <a:p>
+            <a:r>
+              <a:rPr lang="en-US" dirty="0"/>
+              <a:t/>
+            </a:r>
+            <a:endParaRPr lang="en-US" dirty="0"/>
+          </a:p>
+        </p:txBody>
+      </p:sp>
+      <p:sp>
+        <p:nvSpPr>
+          <p:cNvPr id="4" name="Slide Number Placeholder 3"/>
+          <p:cNvSpPr>
+            <a:spLocks noGrp="1"/>
+          </p:cNvSpPr>
+          <p:nvPr>
+            <p:ph type="sldNum" sz="quarter" idx="10"/>
+          </p:nvPr>
+        </p:nvSpPr>
+        <p:spPr/>
+        <p:txBody>
+          <a:bodyPr/>
+          <a:lstStyle/>
+          <a:p>
+            <a:fld id="{F7021451-1387-4CA6-816F-3879F97B5CBC}" type="slidenum">
+              <a:rPr lang="en-US"/>
+              <a:t>11</a:t>
+            </a:fld>
+            <a:endParaRPr lang="en-US"/>
+          </a:p>
+        </p:txBody>
+      </p:sp>
+    </p:spTree>
+    <p:extLst>
+      <p:ext uri="{BB962C8B-B14F-4D97-AF65-F5344CB8AC3E}">
+        <p14:creationId xmlns:p14="http://schemas.microsoft.com/office/powerpoint/2010/main" val="1024086991"/>
+      </p:ext>
+    </p:extLst>
+  </p:cSld>
+  <p:clrMapOvr>
+    <a:masterClrMapping/>
+  </p:clrMapOvr>
+</p:notes>
+</file>
+
+<file path=ppt/notesSlides/notesSlide12.xml><?xml version="1.0" encoding="utf-8"?>
+<p:notes xmlns:a="http://schemas.openxmlformats.org/drawingml/2006/main" xmlns:r="http://schemas.openxmlformats.org/officeDocument/2006/relationships" xmlns:p="http://schemas.openxmlformats.org/presentationml/2006/main">
+  <p:cSld>
+    <p:spTree>
+      <p:nvGrpSpPr>
+        <p:cNvPr id="1" name=""/>
+        <p:cNvGrpSpPr/>
+        <p:nvPr/>
+      </p:nvGrpSpPr>
+      <p:grpSpPr>
+        <a:xfrm>
+          <a:off x="0" y="0"/>
+          <a:ext cx="0" cy="0"/>
+          <a:chOff x="0" y="0"/>
+          <a:chExt cx="0" cy="0"/>
+        </a:xfrm>
+      </p:grpSpPr>
+      <p:sp>
+        <p:nvSpPr>
+          <p:cNvPr id="2" name="Slide Image Placeholder 1"/>
+          <p:cNvSpPr>
+            <a:spLocks noGrp="1" noRot="1" noChangeAspect="1"/>
+          </p:cNvSpPr>
+          <p:nvPr>
+            <p:ph type="sldImg"/>
+          </p:nvPr>
+        </p:nvSpPr>
+        <p:spPr/>
+      </p:sp>
+      <p:sp>
+        <p:nvSpPr>
+          <p:cNvPr id="3" name="Notes Placeholder 2"/>
+          <p:cNvSpPr>
+            <a:spLocks noGrp="1"/>
+          </p:cNvSpPr>
+          <p:nvPr>
+            <p:ph type="body" idx="1"/>
+          </p:nvPr>
+        </p:nvSpPr>
+        <p:spPr/>
+        <p:txBody>
+          <a:bodyPr/>
+          <a:lstStyle/>
+          <a:p>
+            <a:r>
+              <a:rPr lang="en-US" dirty="0"/>
+              <a:t/>
+            </a:r>
+            <a:endParaRPr lang="en-US" dirty="0"/>
+          </a:p>
+        </p:txBody>
+      </p:sp>
+      <p:sp>
+        <p:nvSpPr>
+          <p:cNvPr id="4" name="Slide Number Placeholder 3"/>
+          <p:cNvSpPr>
+            <a:spLocks noGrp="1"/>
+          </p:cNvSpPr>
+          <p:nvPr>
+            <p:ph type="sldNum" sz="quarter" idx="10"/>
+          </p:nvPr>
+        </p:nvSpPr>
+        <p:spPr/>
+        <p:txBody>
+          <a:bodyPr/>
+          <a:lstStyle/>
+          <a:p>
+            <a:fld id="{F7021451-1387-4CA6-816F-3879F97B5CBC}" type="slidenum">
+              <a:rPr lang="en-US"/>
+              <a:t>12</a:t>
+            </a:fld>
+            <a:endParaRPr lang="en-US"/>
+          </a:p>
+        </p:txBody>
+      </p:sp>
+    </p:spTree>
+    <p:extLst>
+      <p:ext uri="{BB962C8B-B14F-4D97-AF65-F5344CB8AC3E}">
+        <p14:creationId xmlns:p14="http://schemas.microsoft.com/office/powerpoint/2010/main" val="1024086991"/>
+      </p:ext>
+    </p:extLst>
+  </p:cSld>
+  <p:clrMapOvr>
+    <a:masterClrMapping/>
+  </p:clrMapOvr>
+</p:notes>
+</file>
+
+<file path=ppt/notesSlides/notesSlide13.xml><?xml version="1.0" encoding="utf-8"?>
+<p:notes xmlns:a="http://schemas.openxmlformats.org/drawingml/2006/main" xmlns:r="http://schemas.openxmlformats.org/officeDocument/2006/relationships" xmlns:p="http://schemas.openxmlformats.org/presentationml/2006/main">
+  <p:cSld>
+    <p:spTree>
+      <p:nvGrpSpPr>
+        <p:cNvPr id="1" name=""/>
+        <p:cNvGrpSpPr/>
+        <p:nvPr/>
+      </p:nvGrpSpPr>
+      <p:grpSpPr>
+        <a:xfrm>
+          <a:off x="0" y="0"/>
+          <a:ext cx="0" cy="0"/>
+          <a:chOff x="0" y="0"/>
+          <a:chExt cx="0" cy="0"/>
+        </a:xfrm>
+      </p:grpSpPr>
+      <p:sp>
+        <p:nvSpPr>
+          <p:cNvPr id="2" name="Slide Image Placeholder 1"/>
+          <p:cNvSpPr>
+            <a:spLocks noGrp="1" noRot="1" noChangeAspect="1"/>
+          </p:cNvSpPr>
+          <p:nvPr>
+            <p:ph type="sldImg"/>
+          </p:nvPr>
+        </p:nvSpPr>
+        <p:spPr/>
+      </p:sp>
+      <p:sp>
+        <p:nvSpPr>
+          <p:cNvPr id="3" name="Notes Placeholder 2"/>
+          <p:cNvSpPr>
+            <a:spLocks noGrp="1"/>
+          </p:cNvSpPr>
+          <p:nvPr>
+            <p:ph type="body" idx="1"/>
+          </p:nvPr>
+        </p:nvSpPr>
+        <p:spPr/>
+        <p:txBody>
+          <a:bodyPr/>
+          <a:lstStyle/>
+          <a:p>
+            <a:r>
+              <a:rPr lang="en-US" dirty="0"/>
+              <a:t/>
+            </a:r>
+            <a:endParaRPr lang="en-US" dirty="0"/>
+          </a:p>
+        </p:txBody>
+      </p:sp>
+      <p:sp>
+        <p:nvSpPr>
+          <p:cNvPr id="4" name="Slide Number Placeholder 3"/>
+          <p:cNvSpPr>
+            <a:spLocks noGrp="1"/>
+          </p:cNvSpPr>
+          <p:nvPr>
+            <p:ph type="sldNum" sz="quarter" idx="10"/>
+          </p:nvPr>
+        </p:nvSpPr>
+        <p:spPr/>
+        <p:txBody>
+          <a:bodyPr/>
+          <a:lstStyle/>
+          <a:p>
+            <a:fld id="{F7021451-1387-4CA6-816F-3879F97B5CBC}" type="slidenum">
+              <a:rPr lang="en-US"/>
+              <a:t>13</a:t>
+            </a:fld>
+            <a:endParaRPr lang="en-US"/>
+          </a:p>
+        </p:txBody>
+      </p:sp>
+    </p:spTree>
+    <p:extLst>
+      <p:ext uri="{BB962C8B-B14F-4D97-AF65-F5344CB8AC3E}">
+        <p14:creationId xmlns:p14="http://schemas.microsoft.com/office/powerpoint/2010/main" val="1024086991"/>
+      </p:ext>
+    </p:extLst>
+  </p:cSld>
+  <p:clrMapOvr>
+    <a:masterClrMapping/>
+  </p:clrMapOvr>
+</p:notes>
+</file>
+
+<file path=ppt/notesSlides/notesSlide14.xml><?xml version="1.0" encoding="utf-8"?>
+<p:notes xmlns:a="http://schemas.openxmlformats.org/drawingml/2006/main" xmlns:r="http://schemas.openxmlformats.org/officeDocument/2006/relationships" xmlns:p="http://schemas.openxmlformats.org/presentationml/2006/main">
+  <p:cSld>
+    <p:spTree>
+      <p:nvGrpSpPr>
+        <p:cNvPr id="1" name=""/>
+        <p:cNvGrpSpPr/>
+        <p:nvPr/>
+      </p:nvGrpSpPr>
+      <p:grpSpPr>
+        <a:xfrm>
+          <a:off x="0" y="0"/>
+          <a:ext cx="0" cy="0"/>
+          <a:chOff x="0" y="0"/>
+          <a:chExt cx="0" cy="0"/>
+        </a:xfrm>
+      </p:grpSpPr>
+      <p:sp>
+        <p:nvSpPr>
+          <p:cNvPr id="2" name="Slide Image Placeholder 1"/>
+          <p:cNvSpPr>
+            <a:spLocks noGrp="1" noRot="1" noChangeAspect="1"/>
+          </p:cNvSpPr>
+          <p:nvPr>
+            <p:ph type="sldImg"/>
+          </p:nvPr>
+        </p:nvSpPr>
+        <p:spPr/>
+      </p:sp>
+      <p:sp>
+        <p:nvSpPr>
+          <p:cNvPr id="3" name="Notes Placeholder 2"/>
+          <p:cNvSpPr>
+            <a:spLocks noGrp="1"/>
+          </p:cNvSpPr>
+          <p:nvPr>
+            <p:ph type="body" idx="1"/>
+          </p:nvPr>
+        </p:nvSpPr>
+        <p:spPr/>
+        <p:txBody>
+          <a:bodyPr/>
+          <a:lstStyle/>
+          <a:p>
+            <a:r>
+              <a:rPr lang="en-US" dirty="0"/>
+              <a:t/>
+            </a:r>
+            <a:endParaRPr lang="en-US" dirty="0"/>
+          </a:p>
+        </p:txBody>
+      </p:sp>
+      <p:sp>
+        <p:nvSpPr>
+          <p:cNvPr id="4" name="Slide Number Placeholder 3"/>
+          <p:cNvSpPr>
+            <a:spLocks noGrp="1"/>
+          </p:cNvSpPr>
+          <p:nvPr>
+            <p:ph type="sldNum" sz="quarter" idx="10"/>
+          </p:nvPr>
+        </p:nvSpPr>
+        <p:spPr/>
+        <p:txBody>
+          <a:bodyPr/>
+          <a:lstStyle/>
+          <a:p>
+            <a:fld id="{F7021451-1387-4CA6-816F-3879F97B5CBC}" type="slidenum">
+              <a:rPr lang="en-US"/>
+              <a:t>14</a:t>
+            </a:fld>
+            <a:endParaRPr lang="en-US"/>
+          </a:p>
+        </p:txBody>
+      </p:sp>
+    </p:spTree>
+    <p:extLst>
+      <p:ext uri="{BB962C8B-B14F-4D97-AF65-F5344CB8AC3E}">
+        <p14:creationId xmlns:p14="http://schemas.microsoft.com/office/powerpoint/2010/main" val="1024086991"/>
+      </p:ext>
+    </p:extLst>
+  </p:cSld>
+  <p:clrMapOvr>
+    <a:masterClrMapping/>
+  </p:clrMapOvr>
+</p:notes>
+</file>
+
+<file path=ppt/notesSlides/notesSlide15.xml><?xml version="1.0" encoding="utf-8"?>
+<p:notes xmlns:a="http://schemas.openxmlformats.org/drawingml/2006/main" xmlns:r="http://schemas.openxmlformats.org/officeDocument/2006/relationships" xmlns:p="http://schemas.openxmlformats.org/presentationml/2006/main">
+  <p:cSld>
+    <p:spTree>
+      <p:nvGrpSpPr>
+        <p:cNvPr id="1" name=""/>
+        <p:cNvGrpSpPr/>
+        <p:nvPr/>
+      </p:nvGrpSpPr>
+      <p:grpSpPr>
+        <a:xfrm>
+          <a:off x="0" y="0"/>
+          <a:ext cx="0" cy="0"/>
+          <a:chOff x="0" y="0"/>
+          <a:chExt cx="0" cy="0"/>
+        </a:xfrm>
+      </p:grpSpPr>
+      <p:sp>
+        <p:nvSpPr>
+          <p:cNvPr id="2" name="Slide Image Placeholder 1"/>
+          <p:cNvSpPr>
+            <a:spLocks noGrp="1" noRot="1" noChangeAspect="1"/>
+          </p:cNvSpPr>
+          <p:nvPr>
+            <p:ph type="sldImg"/>
+          </p:nvPr>
+        </p:nvSpPr>
+        <p:spPr/>
+      </p:sp>
+      <p:sp>
+        <p:nvSpPr>
+          <p:cNvPr id="3" name="Notes Placeholder 2"/>
+          <p:cNvSpPr>
+            <a:spLocks noGrp="1"/>
+          </p:cNvSpPr>
+          <p:nvPr>
+            <p:ph type="body" idx="1"/>
+          </p:nvPr>
+        </p:nvSpPr>
+        <p:spPr/>
+        <p:txBody>
+          <a:bodyPr/>
+          <a:lstStyle/>
+          <a:p>
+            <a:r>
+              <a:rPr lang="en-US" dirty="0"/>
+              <a:t/>
+            </a:r>
+            <a:endParaRPr lang="en-US" dirty="0"/>
+          </a:p>
+        </p:txBody>
+      </p:sp>
+      <p:sp>
+        <p:nvSpPr>
+          <p:cNvPr id="4" name="Slide Number Placeholder 3"/>
+          <p:cNvSpPr>
+            <a:spLocks noGrp="1"/>
+          </p:cNvSpPr>
+          <p:nvPr>
+            <p:ph type="sldNum" sz="quarter" idx="10"/>
+          </p:nvPr>
+        </p:nvSpPr>
+        <p:spPr/>
+        <p:txBody>
+          <a:bodyPr/>
+          <a:lstStyle/>
+          <a:p>
+            <a:fld id="{F7021451-1387-4CA6-816F-3879F97B5CBC}" type="slidenum">
+              <a:rPr lang="en-US"/>
+              <a:t>15</a:t>
+            </a:fld>
+            <a:endParaRPr lang="en-US"/>
+          </a:p>
+        </p:txBody>
+      </p:sp>
+    </p:spTree>
+    <p:extLst>
+      <p:ext uri="{BB962C8B-B14F-4D97-AF65-F5344CB8AC3E}">
+        <p14:creationId xmlns:p14="http://schemas.microsoft.com/office/powerpoint/2010/main" val="1024086991"/>
+      </p:ext>
+    </p:extLst>
+  </p:cSld>
+  <p:clrMapOvr>
+    <a:masterClrMapping/>
+  </p:clrMapOvr>
+</p:notes>
+</file>
+
+<file path=ppt/notesSlides/notesSlide16.xml><?xml version="1.0" encoding="utf-8"?>
+<p:notes xmlns:a="http://schemas.openxmlformats.org/drawingml/2006/main" xmlns:r="http://schemas.openxmlformats.org/officeDocument/2006/relationships" xmlns:p="http://schemas.openxmlformats.org/presentationml/2006/main">
+  <p:cSld>
+    <p:spTree>
+      <p:nvGrpSpPr>
+        <p:cNvPr id="1" name=""/>
+        <p:cNvGrpSpPr/>
+        <p:nvPr/>
+      </p:nvGrpSpPr>
+      <p:grpSpPr>
+        <a:xfrm>
+          <a:off x="0" y="0"/>
+          <a:ext cx="0" cy="0"/>
+          <a:chOff x="0" y="0"/>
+          <a:chExt cx="0" cy="0"/>
+        </a:xfrm>
+      </p:grpSpPr>
+      <p:sp>
+        <p:nvSpPr>
+          <p:cNvPr id="2" name="Slide Image Placeholder 1"/>
+          <p:cNvSpPr>
+            <a:spLocks noGrp="1" noRot="1" noChangeAspect="1"/>
+          </p:cNvSpPr>
+          <p:nvPr>
+            <p:ph type="sldImg"/>
+          </p:nvPr>
+        </p:nvSpPr>
+        <p:spPr/>
+      </p:sp>
+      <p:sp>
+        <p:nvSpPr>
+          <p:cNvPr id="3" name="Notes Placeholder 2"/>
+          <p:cNvSpPr>
+            <a:spLocks noGrp="1"/>
+          </p:cNvSpPr>
+          <p:nvPr>
+            <p:ph type="body" idx="1"/>
+          </p:nvPr>
+        </p:nvSpPr>
+        <p:spPr/>
+        <p:txBody>
+          <a:bodyPr/>
+          <a:lstStyle/>
+          <a:p>
+            <a:r>
+              <a:rPr lang="en-US" dirty="0"/>
+              <a:t/>
+            </a:r>
+            <a:endParaRPr lang="en-US" dirty="0"/>
+          </a:p>
+        </p:txBody>
+      </p:sp>
+      <p:sp>
+        <p:nvSpPr>
+          <p:cNvPr id="4" name="Slide Number Placeholder 3"/>
+          <p:cNvSpPr>
+            <a:spLocks noGrp="1"/>
+          </p:cNvSpPr>
+          <p:nvPr>
+            <p:ph type="sldNum" sz="quarter" idx="10"/>
+          </p:nvPr>
+        </p:nvSpPr>
+        <p:spPr/>
+        <p:txBody>
+          <a:bodyPr/>
+          <a:lstStyle/>
+          <a:p>
+            <a:fld id="{F7021451-1387-4CA6-816F-3879F97B5CBC}" type="slidenum">
+              <a:rPr lang="en-US"/>
+              <a:t>16</a:t>
+            </a:fld>
+            <a:endParaRPr lang="en-US"/>
+          </a:p>
+        </p:txBody>
+      </p:sp>
+    </p:spTree>
+    <p:extLst>
+      <p:ext uri="{BB962C8B-B14F-4D97-AF65-F5344CB8AC3E}">
+        <p14:creationId xmlns:p14="http://schemas.microsoft.com/office/powerpoint/2010/main" val="1024086991"/>
+      </p:ext>
+    </p:extLst>
+  </p:cSld>
+  <p:clrMapOvr>
+    <a:masterClrMapping/>
+  </p:clrMapOvr>
+</p:notes>
+</file>
+
+<file path=ppt/notesSlides/notesSlide17.xml><?xml version="1.0" encoding="utf-8"?>
+<p:notes xmlns:a="http://schemas.openxmlformats.org/drawingml/2006/main" xmlns:r="http://schemas.openxmlformats.org/officeDocument/2006/relationships" xmlns:p="http://schemas.openxmlformats.org/presentationml/2006/main">
+  <p:cSld>
+    <p:spTree>
+      <p:nvGrpSpPr>
+        <p:cNvPr id="1" name=""/>
+        <p:cNvGrpSpPr/>
+        <p:nvPr/>
+      </p:nvGrpSpPr>
+      <p:grpSpPr>
+        <a:xfrm>
+          <a:off x="0" y="0"/>
+          <a:ext cx="0" cy="0"/>
+          <a:chOff x="0" y="0"/>
+          <a:chExt cx="0" cy="0"/>
+        </a:xfrm>
+      </p:grpSpPr>
+      <p:sp>
+        <p:nvSpPr>
+          <p:cNvPr id="2" name="Slide Image Placeholder 1"/>
+          <p:cNvSpPr>
+            <a:spLocks noGrp="1" noRot="1" noChangeAspect="1"/>
+          </p:cNvSpPr>
+          <p:nvPr>
+            <p:ph type="sldImg"/>
+          </p:nvPr>
+        </p:nvSpPr>
+        <p:spPr/>
+      </p:sp>
+      <p:sp>
+        <p:nvSpPr>
+          <p:cNvPr id="3" name="Notes Placeholder 2"/>
+          <p:cNvSpPr>
+            <a:spLocks noGrp="1"/>
+          </p:cNvSpPr>
+          <p:nvPr>
+            <p:ph type="body" idx="1"/>
+          </p:nvPr>
+        </p:nvSpPr>
+        <p:spPr/>
+        <p:txBody>
+          <a:bodyPr/>
+          <a:lstStyle/>
+          <a:p>
+            <a:r>
+              <a:rPr lang="en-US" dirty="0"/>
+              <a:t/>
+            </a:r>
+            <a:endParaRPr lang="en-US" dirty="0"/>
+          </a:p>
+        </p:txBody>
+      </p:sp>
+      <p:sp>
+        <p:nvSpPr>
+          <p:cNvPr id="4" name="Slide Number Placeholder 3"/>
+          <p:cNvSpPr>
+            <a:spLocks noGrp="1"/>
+          </p:cNvSpPr>
+          <p:nvPr>
+            <p:ph type="sldNum" sz="quarter" idx="10"/>
+          </p:nvPr>
+        </p:nvSpPr>
+        <p:spPr/>
+        <p:txBody>
+          <a:bodyPr/>
+          <a:lstStyle/>
+          <a:p>
+            <a:fld id="{F7021451-1387-4CA6-816F-3879F97B5CBC}" type="slidenum">
+              <a:rPr lang="en-US"/>
+              <a:t>17</a:t>
+            </a:fld>
+            <a:endParaRPr lang="en-US"/>
+          </a:p>
+        </p:txBody>
+      </p:sp>
+    </p:spTree>
+    <p:extLst>
+      <p:ext uri="{BB962C8B-B14F-4D97-AF65-F5344CB8AC3E}">
+        <p14:creationId xmlns:p14="http://schemas.microsoft.com/office/powerpoint/2010/main" val="1024086991"/>
+      </p:ext>
+    </p:extLst>
+  </p:cSld>
+  <p:clrMapOvr>
+    <a:masterClrMapping/>
+  </p:clrMapOvr>
+</p:notes>
+</file>
+
+<file path=ppt/notesSlides/notesSlide18.xml><?xml version="1.0" encoding="utf-8"?>
+<p:notes xmlns:a="http://schemas.openxmlformats.org/drawingml/2006/main" xmlns:r="http://schemas.openxmlformats.org/officeDocument/2006/relationships" xmlns:p="http://schemas.openxmlformats.org/presentationml/2006/main">
+  <p:cSld>
+    <p:spTree>
+      <p:nvGrpSpPr>
+        <p:cNvPr id="1" name=""/>
+        <p:cNvGrpSpPr/>
+        <p:nvPr/>
+      </p:nvGrpSpPr>
+      <p:grpSpPr>
+        <a:xfrm>
+          <a:off x="0" y="0"/>
+          <a:ext cx="0" cy="0"/>
+          <a:chOff x="0" y="0"/>
+          <a:chExt cx="0" cy="0"/>
+        </a:xfrm>
+      </p:grpSpPr>
+      <p:sp>
+        <p:nvSpPr>
+          <p:cNvPr id="2" name="Slide Image Placeholder 1"/>
+          <p:cNvSpPr>
+            <a:spLocks noGrp="1" noRot="1" noChangeAspect="1"/>
+          </p:cNvSpPr>
+          <p:nvPr>
+            <p:ph type="sldImg"/>
+          </p:nvPr>
+        </p:nvSpPr>
+        <p:spPr/>
+      </p:sp>
+      <p:sp>
+        <p:nvSpPr>
+          <p:cNvPr id="3" name="Notes Placeholder 2"/>
+          <p:cNvSpPr>
+            <a:spLocks noGrp="1"/>
+          </p:cNvSpPr>
+          <p:nvPr>
+            <p:ph type="body" idx="1"/>
+          </p:nvPr>
+        </p:nvSpPr>
+        <p:spPr/>
+        <p:txBody>
+          <a:bodyPr/>
+          <a:lstStyle/>
+          <a:p>
+            <a:r>
+              <a:rPr lang="en-US" dirty="0"/>
+              <a:t/>
+            </a:r>
+            <a:endParaRPr lang="en-US" dirty="0"/>
+          </a:p>
+        </p:txBody>
+      </p:sp>
+      <p:sp>
+        <p:nvSpPr>
+          <p:cNvPr id="4" name="Slide Number Placeholder 3"/>
+          <p:cNvSpPr>
+            <a:spLocks noGrp="1"/>
+          </p:cNvSpPr>
+          <p:nvPr>
+            <p:ph type="sldNum" sz="quarter" idx="10"/>
+          </p:nvPr>
+        </p:nvSpPr>
+        <p:spPr/>
+        <p:txBody>
+          <a:bodyPr/>
+          <a:lstStyle/>
+          <a:p>
+            <a:fld id="{F7021451-1387-4CA6-816F-3879F97B5CBC}" type="slidenum">
+              <a:rPr lang="en-US"/>
+              <a:t>18</a:t>
             </a:fld>
             <a:endParaRPr lang="en-US"/>
           </a:p>
@@ -1922,125 +2634,6 @@
         </p:nvSpPr>
         <p:spPr>
           <a:xfrm>
-            <a:off x="406301" y="1223963"/>
-            <a:ext cx="8498026" cy="274290"/>
-          </a:xfrm>
-          <a:prstGeom prst="rect">
-            <a:avLst/>
-          </a:prstGeom>
-          <a:noFill/>
-          <a:ln/>
-        </p:spPr>
-        <p:txBody>
-          <a:bodyPr wrap="square" lIns="0" tIns="0" rIns="0" bIns="0" rtlCol="0" anchor="t"/>
-          <a:lstStyle/>
-          <a:p>
-            <a:pPr algn="l" indent="0" marL="0">
-              <a:lnSpc>
-                <a:spcPts val="2160"/>
-              </a:lnSpc>
-              <a:spcBef>
-                <a:spcPts val="600"/>
-              </a:spcBef>
-              <a:spcAft>
-                <a:spcPts val="800"/>
-              </a:spcAft>
-              <a:buNone/>
-            </a:pPr>
-            <a:r>
-              <a:rPr lang="en-US" sz="1800" b="1" dirty="0">
-                <a:solidFill>
-                  <a:srgbClr val="FE4447"/>
-                </a:solidFill>
-                <a:latin typeface="Georgia" pitchFamily="34" charset="0"/>
-                <a:ea typeface="Georgia" pitchFamily="34" charset="-122"/>
-                <a:cs typeface="Georgia" pitchFamily="34" charset="-120"/>
-              </a:rPr>
-              <a:t>Learning objective</a:t>
-            </a:r>
-            <a:endParaRPr lang="en-US" sz="1800" dirty="0"/>
-          </a:p>
-        </p:txBody>
-      </p:sp>
-      <p:sp>
-        <p:nvSpPr>
-          <p:cNvPr id="6" name="Text 4"/>
-          <p:cNvSpPr/>
-          <p:nvPr/>
-        </p:nvSpPr>
-        <p:spPr>
-          <a:xfrm>
-            <a:off x="406301" y="1637854"/>
-            <a:ext cx="8498026" cy="426541"/>
-          </a:xfrm>
-          <a:prstGeom prst="rect">
-            <a:avLst/>
-          </a:prstGeom>
-          <a:noFill/>
-          <a:ln/>
-        </p:spPr>
-        <p:txBody>
-          <a:bodyPr wrap="square" lIns="0" tIns="0" rIns="0" bIns="0" rtlCol="0" anchor="t"/>
-          <a:lstStyle/>
-          <a:p>
-            <a:pPr algn="l" indent="0" marL="0">
-              <a:lnSpc>
-                <a:spcPts val="1680"/>
-              </a:lnSpc>
-              <a:spcBef>
-                <a:spcPts val="300"/>
-              </a:spcBef>
-              <a:spcAft>
-                <a:spcPts val="300"/>
-              </a:spcAft>
-              <a:buNone/>
-            </a:pPr>
-            <a:r>
-              <a:rPr lang="en-US" sz="1200" dirty="0">
-                <a:solidFill>
-                  <a:srgbClr val="1C2833"/>
-                </a:solidFill>
-                <a:latin typeface="Arial" pitchFamily="34" charset="0"/>
-                <a:ea typeface="Arial" pitchFamily="34" charset="-122"/>
-                <a:cs typeface="Arial" pitchFamily="34" charset="-120"/>
-              </a:rPr>
-              <a:t>By the end of this lesson, students will describe the Sun's daily and annual apparent motion and articulate the question: </a:t>
-            </a:r>
-            <a:pPr algn="l" indent="0" marL="0">
-              <a:lnSpc>
-                <a:spcPts val="1680"/>
-              </a:lnSpc>
-              <a:spcBef>
-                <a:spcPts val="300"/>
-              </a:spcBef>
-              <a:spcAft>
-                <a:spcPts val="300"/>
-              </a:spcAft>
-              <a:buNone/>
-            </a:pPr>
-            <a:r>
-              <a:rPr lang="en-US" sz="1200" i="1" dirty="0">
-                <a:solidFill>
-                  <a:srgbClr val="1C2833"/>
-                </a:solidFill>
-                <a:latin typeface="Arial" pitchFamily="34" charset="0"/>
-                <a:ea typeface="Arial" pitchFamily="34" charset="-122"/>
-                <a:cs typeface="Arial" pitchFamily="34" charset="-120"/>
-              </a:rPr>
-              <a:t>does the Sun rise from exactly the same spot every day?</a:t>
-            </a:r>
-            <a:endParaRPr lang="en-US" sz="1200" dirty="0"/>
-          </a:p>
-        </p:txBody>
-      </p:sp>
-      <p:sp>
-        <p:nvSpPr>
-          <p:cNvPr id="7" name="Text 5"/>
-          <p:cNvSpPr/>
-          <p:nvPr/>
-        </p:nvSpPr>
-        <p:spPr>
-          <a:xfrm>
             <a:off x="406301" y="4434929"/>
             <a:ext cx="8498026" cy="213271"/>
           </a:xfrm>
@@ -2185,6 +2778,2734 @@
                 <a:ea typeface="Georgia" pitchFamily="34" charset="-122"/>
                 <a:cs typeface="Georgia" pitchFamily="34" charset="-120"/>
               </a:rPr>
+              <a:t>Core (20 min) (cont.)</a:t>
+            </a:r>
+            <a:endParaRPr lang="en-US" sz="1800" dirty="0"/>
+          </a:p>
+        </p:txBody>
+      </p:sp>
+      <p:sp>
+        <p:nvSpPr>
+          <p:cNvPr id="4" name="Text 2"/>
+          <p:cNvSpPr/>
+          <p:nvPr/>
+        </p:nvSpPr>
+        <p:spPr>
+          <a:xfrm>
+            <a:off x="634901" y="883593"/>
+            <a:ext cx="8102798" cy="281880"/>
+          </a:xfrm>
+          <a:prstGeom prst="rect">
+            <a:avLst/>
+          </a:prstGeom>
+          <a:noFill/>
+          <a:ln/>
+        </p:spPr>
+        <p:txBody>
+          <a:bodyPr wrap="square" lIns="0" tIns="0" rIns="0" bIns="0" rtlCol="0" anchor="t"/>
+          <a:lstStyle/>
+          <a:p>
+            <a:pPr algn="l" marL="342900" indent="-342900">
+              <a:lnSpc>
+                <a:spcPts val="1620"/>
+              </a:lnSpc>
+              <a:spcAft>
+                <a:spcPts val="300"/>
+              </a:spcAft>
+              <a:buSzPct val="100000"/>
+              <a:buChar char="•"/>
+            </a:pPr>
+            <a:r>
+              <a:rPr lang="en-US" sz="1200" b="1" dirty="0">
+                <a:solidFill>
+                  <a:srgbClr val="1C2833"/>
+                </a:solidFill>
+                <a:latin typeface="Arial" pitchFamily="34" charset="0"/>
+                <a:ea typeface="Arial" pitchFamily="34" charset="-122"/>
+                <a:cs typeface="Arial" pitchFamily="34" charset="-120"/>
+              </a:rPr>
+              <a:t>Two questions for the module.</a:t>
+            </a:r>
+            <a:pPr algn="l" indent="0" marL="0">
+              <a:lnSpc>
+                <a:spcPts val="1620"/>
+              </a:lnSpc>
+              <a:spcAft>
+                <a:spcPts val="300"/>
+              </a:spcAft>
+              <a:buNone/>
+            </a:pPr>
+            <a:r>
+              <a:rPr lang="en-US" sz="1200" dirty="0">
+                <a:solidFill>
+                  <a:srgbClr val="1C2833"/>
+                </a:solidFill>
+                <a:latin typeface="Arial" pitchFamily="34" charset="0"/>
+                <a:ea typeface="Arial" pitchFamily="34" charset="-122"/>
+                <a:cs typeface="Arial" pitchFamily="34" charset="-120"/>
+              </a:rPr>
+              <a:t> Write on the board:</a:t>
+            </a:r>
+            <a:endParaRPr lang="en-US" sz="1200" dirty="0"/>
+          </a:p>
+        </p:txBody>
+      </p:sp>
+      <p:sp>
+        <p:nvSpPr>
+          <p:cNvPr id="5" name="Text 3"/>
+          <p:cNvSpPr/>
+          <p:nvPr/>
+        </p:nvSpPr>
+        <p:spPr>
+          <a:xfrm>
+            <a:off x="634901" y="1266974"/>
+            <a:ext cx="8102798" cy="731341"/>
+          </a:xfrm>
+          <a:prstGeom prst="rect">
+            <a:avLst/>
+          </a:prstGeom>
+          <a:noFill/>
+          <a:ln/>
+        </p:spPr>
+        <p:txBody>
+          <a:bodyPr wrap="square" lIns="0" tIns="0" rIns="0" bIns="0" rtlCol="0" anchor="t"/>
+          <a:lstStyle/>
+          <a:p>
+            <a:pPr algn="l" marL="342900" indent="-342900">
+              <a:lnSpc>
+                <a:spcPts val="1620"/>
+              </a:lnSpc>
+              <a:spcAft>
+                <a:spcPts val="300"/>
+              </a:spcAft>
+              <a:buSzPct val="100000"/>
+              <a:buChar char="•"/>
+            </a:pPr>
+            <a:r>
+              <a:rPr lang="en-US" sz="1200" b="1" dirty="0">
+                <a:solidFill>
+                  <a:srgbClr val="1C2833"/>
+                </a:solidFill>
+                <a:latin typeface="Arial" pitchFamily="34" charset="0"/>
+                <a:ea typeface="Arial" pitchFamily="34" charset="-122"/>
+                <a:cs typeface="Arial" pitchFamily="34" charset="-120"/>
+              </a:rPr>
+              <a:t>Q1:</a:t>
+            </a:r>
+            <a:pPr algn="l" indent="0" marL="0">
+              <a:lnSpc>
+                <a:spcPts val="1620"/>
+              </a:lnSpc>
+              <a:spcAft>
+                <a:spcPts val="300"/>
+              </a:spcAft>
+              <a:buNone/>
+            </a:pPr>
+            <a:r>
+              <a:rPr lang="en-US" sz="1200" dirty="0">
+                <a:solidFill>
+                  <a:srgbClr val="1C2833"/>
+                </a:solidFill>
+                <a:latin typeface="Arial" pitchFamily="34" charset="0"/>
+                <a:ea typeface="Arial" pitchFamily="34" charset="-122"/>
+                <a:cs typeface="Arial" pitchFamily="34" charset="-120"/>
+              </a:rPr>
+              <a:t> Why does the rising spot shift? </a:t>
+            </a:r>
+            <a:pPr algn="l" indent="0" marL="0">
+              <a:lnSpc>
+                <a:spcPts val="1620"/>
+              </a:lnSpc>
+              <a:spcAft>
+                <a:spcPts val="300"/>
+              </a:spcAft>
+              <a:buNone/>
+            </a:pPr>
+            <a:r>
+              <a:rPr lang="en-US" sz="1200" i="1" dirty="0">
+                <a:solidFill>
+                  <a:srgbClr val="1C2833"/>
+                </a:solidFill>
+                <a:latin typeface="Arial" pitchFamily="34" charset="0"/>
+                <a:ea typeface="Arial" pitchFamily="34" charset="-122"/>
+                <a:cs typeface="Arial" pitchFamily="34" charset="-120"/>
+              </a:rPr>
+              <a:t>(Answer = axial tilt — Day 2.)</a:t>
+            </a:r>
+            <a:endParaRPr lang="en-US" sz="1200" dirty="0"/>
+          </a:p>
+          <a:p>
+            <a:pPr algn="l" marL="342900" indent="-342900">
+              <a:lnSpc>
+                <a:spcPts val="1620"/>
+              </a:lnSpc>
+              <a:spcAft>
+                <a:spcPts val="300"/>
+              </a:spcAft>
+              <a:buSzPct val="100000"/>
+              <a:buChar char="•"/>
+            </a:pPr>
+            <a:r>
+              <a:rPr lang="en-US" sz="1200" b="1" dirty="0">
+                <a:solidFill>
+                  <a:srgbClr val="1C2833"/>
+                </a:solidFill>
+                <a:latin typeface="Arial" pitchFamily="34" charset="0"/>
+                <a:ea typeface="Arial" pitchFamily="34" charset="-122"/>
+                <a:cs typeface="Arial" pitchFamily="34" charset="-120"/>
+              </a:rPr>
+              <a:t>Q2:</a:t>
+            </a:r>
+            <a:pPr algn="l" indent="0" marL="0">
+              <a:lnSpc>
+                <a:spcPts val="1620"/>
+              </a:lnSpc>
+              <a:spcAft>
+                <a:spcPts val="300"/>
+              </a:spcAft>
+              <a:buNone/>
+            </a:pPr>
+            <a:r>
+              <a:rPr lang="en-US" sz="1200" dirty="0">
+                <a:solidFill>
+                  <a:srgbClr val="1C2833"/>
+                </a:solidFill>
+                <a:latin typeface="Arial" pitchFamily="34" charset="0"/>
+                <a:ea typeface="Arial" pitchFamily="34" charset="-122"/>
+                <a:cs typeface="Arial" pitchFamily="34" charset="-120"/>
+              </a:rPr>
+              <a:t> What did Indian astronomers call the Sun's slow north-south swing? </a:t>
+            </a:r>
+            <a:pPr algn="l" indent="0" marL="0">
+              <a:lnSpc>
+                <a:spcPts val="1620"/>
+              </a:lnSpc>
+              <a:spcAft>
+                <a:spcPts val="300"/>
+              </a:spcAft>
+              <a:buNone/>
+            </a:pPr>
+            <a:r>
+              <a:rPr lang="en-US" sz="1200" i="1" dirty="0">
+                <a:solidFill>
+                  <a:srgbClr val="1C2833"/>
+                </a:solidFill>
+                <a:latin typeface="Arial" pitchFamily="34" charset="0"/>
+                <a:ea typeface="Arial" pitchFamily="34" charset="-122"/>
+                <a:cs typeface="Arial" pitchFamily="34" charset="-120"/>
+              </a:rPr>
+              <a:t>(Answer = uttarāyaṇa and dakṣiṇāyana — Day 3.)</a:t>
+            </a:r>
+            <a:endParaRPr lang="en-US" sz="1200" dirty="0"/>
+          </a:p>
+        </p:txBody>
+      </p:sp>
+      <p:sp>
+        <p:nvSpPr>
+          <p:cNvPr id="6" name="Text 4"/>
+          <p:cNvSpPr/>
+          <p:nvPr/>
+        </p:nvSpPr>
+        <p:spPr>
+          <a:xfrm>
+            <a:off x="406301" y="4434929"/>
+            <a:ext cx="8498026" cy="213271"/>
+          </a:xfrm>
+          <a:prstGeom prst="rect">
+            <a:avLst/>
+          </a:prstGeom>
+          <a:noFill/>
+          <a:ln/>
+        </p:spPr>
+        <p:txBody>
+          <a:bodyPr wrap="square" lIns="0" tIns="0" rIns="0" bIns="0" rtlCol="0" anchor="t"/>
+          <a:lstStyle/>
+          <a:p>
+            <a:pPr algn="l" indent="0" marL="0">
+              <a:lnSpc>
+                <a:spcPts val="1680"/>
+              </a:lnSpc>
+              <a:spcBef>
+                <a:spcPts val="300"/>
+              </a:spcBef>
+              <a:spcAft>
+                <a:spcPts val="300"/>
+              </a:spcAft>
+              <a:buNone/>
+            </a:pPr>
+            <a:r>
+              <a:rPr lang="en-US" sz="1200" dirty="0">
+                <a:solidFill>
+                  <a:srgbClr val="1C2833"/>
+                </a:solidFill>
+                <a:latin typeface="Arial" pitchFamily="34" charset="0"/>
+                <a:ea typeface="Arial" pitchFamily="34" charset="-122"/>
+                <a:cs typeface="Arial" pitchFamily="34" charset="-120"/>
+              </a:rPr>
+              <a:t>Middle ·  · IKS Curriculum</a:t>
+            </a:r>
+            <a:endParaRPr lang="en-US" sz="1200" dirty="0"/>
+          </a:p>
+        </p:txBody>
+      </p:sp>
+    </p:spTree>
+  </p:cSld>
+  <p:clrMapOvr>
+    <a:masterClrMapping/>
+  </p:clrMapOvr>
+</p:sld>
+</file>
+
+<file path=ppt/slides/slide11.xml><?xml version="1.0" encoding="utf-8"?>
+<p:sld xmlns:a="http://schemas.openxmlformats.org/drawingml/2006/main" xmlns:r="http://schemas.openxmlformats.org/officeDocument/2006/relationships" xmlns:p="http://schemas.openxmlformats.org/presentationml/2006/main">
+  <p:cSld name="Slide 11">
+    <p:bg>
+      <p:bgPr>
+        <a:solidFill>
+          <a:srgbClr val="FFFFFF"/>
+        </a:solidFill>
+      </p:bgPr>
+    </p:bg>
+    <p:spTree>
+      <p:nvGrpSpPr>
+        <p:cNvPr id="1" name=""/>
+        <p:cNvGrpSpPr/>
+        <p:nvPr/>
+      </p:nvGrpSpPr>
+      <p:grpSpPr>
+        <a:xfrm>
+          <a:off x="0" y="0"/>
+          <a:ext cx="0" cy="0"/>
+          <a:chOff x="0" y="0"/>
+          <a:chExt cx="0" cy="0"/>
+        </a:xfrm>
+      </p:grpSpPr>
+      <p:sp>
+        <p:nvSpPr>
+          <p:cNvPr id="2" name="Text 0"/>
+          <p:cNvSpPr/>
+          <p:nvPr/>
+        </p:nvSpPr>
+        <p:spPr>
+          <a:xfrm>
+            <a:off x="0" y="0"/>
+            <a:ext cx="9144000" cy="101501"/>
+          </a:xfrm>
+          <a:prstGeom prst="rect">
+            <a:avLst/>
+          </a:prstGeom>
+          <a:solidFill>
+            <a:srgbClr val="277884"/>
+          </a:solidFill>
+          <a:ln/>
+        </p:spPr>
+        <p:txBody>
+          <a:bodyPr wrap="square" rtlCol="0" anchor="ctr"/>
+          <a:lstStyle/>
+          <a:p>
+            <a:pPr indent="0" marL="0">
+              <a:buNone/>
+            </a:pPr>
+            <a:endParaRPr lang="en-US" dirty="0"/>
+          </a:p>
+        </p:txBody>
+      </p:sp>
+      <p:sp>
+        <p:nvSpPr>
+          <p:cNvPr id="3" name="Text 1"/>
+          <p:cNvSpPr/>
+          <p:nvPr/>
+        </p:nvSpPr>
+        <p:spPr>
+          <a:xfrm>
+            <a:off x="406301" y="457051"/>
+            <a:ext cx="8498026" cy="274290"/>
+          </a:xfrm>
+          <a:prstGeom prst="rect">
+            <a:avLst/>
+          </a:prstGeom>
+          <a:noFill/>
+          <a:ln/>
+        </p:spPr>
+        <p:txBody>
+          <a:bodyPr wrap="square" lIns="0" tIns="0" rIns="0" bIns="0" rtlCol="0" anchor="t"/>
+          <a:lstStyle/>
+          <a:p>
+            <a:pPr algn="l" indent="0" marL="0">
+              <a:lnSpc>
+                <a:spcPts val="2160"/>
+              </a:lnSpc>
+              <a:spcBef>
+                <a:spcPts val="600"/>
+              </a:spcBef>
+              <a:spcAft>
+                <a:spcPts val="800"/>
+              </a:spcAft>
+              <a:buNone/>
+            </a:pPr>
+            <a:r>
+              <a:rPr lang="en-US" sz="1800" b="1" dirty="0">
+                <a:solidFill>
+                  <a:srgbClr val="FE4447"/>
+                </a:solidFill>
+                <a:latin typeface="Georgia" pitchFamily="34" charset="0"/>
+                <a:ea typeface="Georgia" pitchFamily="34" charset="-122"/>
+                <a:cs typeface="Georgia" pitchFamily="34" charset="-120"/>
+              </a:rPr>
+              <a:t>Activity (15 min) — Shadow-stick observation</a:t>
+            </a:r>
+            <a:endParaRPr lang="en-US" sz="1800" dirty="0"/>
+          </a:p>
+        </p:txBody>
+      </p:sp>
+      <p:sp>
+        <p:nvSpPr>
+          <p:cNvPr id="4" name="Text 2"/>
+          <p:cNvSpPr/>
+          <p:nvPr/>
+        </p:nvSpPr>
+        <p:spPr>
+          <a:xfrm>
+            <a:off x="406301" y="870942"/>
+            <a:ext cx="8498026" cy="213271"/>
+          </a:xfrm>
+          <a:prstGeom prst="rect">
+            <a:avLst/>
+          </a:prstGeom>
+          <a:noFill/>
+          <a:ln/>
+        </p:spPr>
+        <p:txBody>
+          <a:bodyPr wrap="square" lIns="0" tIns="0" rIns="0" bIns="0" rtlCol="0" anchor="t"/>
+          <a:lstStyle/>
+          <a:p>
+            <a:pPr algn="l" indent="0" marL="0">
+              <a:lnSpc>
+                <a:spcPts val="1680"/>
+              </a:lnSpc>
+              <a:spcBef>
+                <a:spcPts val="300"/>
+              </a:spcBef>
+              <a:spcAft>
+                <a:spcPts val="300"/>
+              </a:spcAft>
+              <a:buNone/>
+            </a:pPr>
+            <a:r>
+              <a:rPr lang="en-US" sz="1200" dirty="0">
+                <a:solidFill>
+                  <a:srgbClr val="1C2833"/>
+                </a:solidFill>
+                <a:latin typeface="Arial" pitchFamily="34" charset="0"/>
+                <a:ea typeface="Arial" pitchFamily="34" charset="-122"/>
+                <a:cs typeface="Arial" pitchFamily="34" charset="-120"/>
+              </a:rPr>
+              <a:t>If the weather permits and the schoolyard has a sunny spot:</a:t>
+            </a:r>
+            <a:endParaRPr lang="en-US" sz="1200" dirty="0"/>
+          </a:p>
+        </p:txBody>
+      </p:sp>
+      <p:sp>
+        <p:nvSpPr>
+          <p:cNvPr id="5" name="Text 3"/>
+          <p:cNvSpPr/>
+          <p:nvPr/>
+        </p:nvSpPr>
+        <p:spPr>
+          <a:xfrm>
+            <a:off x="406301" y="4434929"/>
+            <a:ext cx="8498026" cy="213271"/>
+          </a:xfrm>
+          <a:prstGeom prst="rect">
+            <a:avLst/>
+          </a:prstGeom>
+          <a:noFill/>
+          <a:ln/>
+        </p:spPr>
+        <p:txBody>
+          <a:bodyPr wrap="square" lIns="0" tIns="0" rIns="0" bIns="0" rtlCol="0" anchor="t"/>
+          <a:lstStyle/>
+          <a:p>
+            <a:pPr algn="l" indent="0" marL="0">
+              <a:lnSpc>
+                <a:spcPts val="1680"/>
+              </a:lnSpc>
+              <a:spcBef>
+                <a:spcPts val="300"/>
+              </a:spcBef>
+              <a:spcAft>
+                <a:spcPts val="300"/>
+              </a:spcAft>
+              <a:buNone/>
+            </a:pPr>
+            <a:r>
+              <a:rPr lang="en-US" sz="1200" dirty="0">
+                <a:solidFill>
+                  <a:srgbClr val="1C2833"/>
+                </a:solidFill>
+                <a:latin typeface="Arial" pitchFamily="34" charset="0"/>
+                <a:ea typeface="Arial" pitchFamily="34" charset="-122"/>
+                <a:cs typeface="Arial" pitchFamily="34" charset="-120"/>
+              </a:rPr>
+              <a:t>Middle ·  · IKS Curriculum</a:t>
+            </a:r>
+            <a:endParaRPr lang="en-US" sz="1200" dirty="0"/>
+          </a:p>
+        </p:txBody>
+      </p:sp>
+    </p:spTree>
+  </p:cSld>
+  <p:clrMapOvr>
+    <a:masterClrMapping/>
+  </p:clrMapOvr>
+</p:sld>
+</file>
+
+<file path=ppt/slides/slide12.xml><?xml version="1.0" encoding="utf-8"?>
+<p:sld xmlns:a="http://schemas.openxmlformats.org/drawingml/2006/main" xmlns:r="http://schemas.openxmlformats.org/officeDocument/2006/relationships" xmlns:p="http://schemas.openxmlformats.org/presentationml/2006/main">
+  <p:cSld name="Slide 12">
+    <p:bg>
+      <p:bgPr>
+        <a:solidFill>
+          <a:srgbClr val="FFFFFF"/>
+        </a:solidFill>
+      </p:bgPr>
+    </p:bg>
+    <p:spTree>
+      <p:nvGrpSpPr>
+        <p:cNvPr id="1" name=""/>
+        <p:cNvGrpSpPr/>
+        <p:nvPr/>
+      </p:nvGrpSpPr>
+      <p:grpSpPr>
+        <a:xfrm>
+          <a:off x="0" y="0"/>
+          <a:ext cx="0" cy="0"/>
+          <a:chOff x="0" y="0"/>
+          <a:chExt cx="0" cy="0"/>
+        </a:xfrm>
+      </p:grpSpPr>
+      <p:sp>
+        <p:nvSpPr>
+          <p:cNvPr id="2" name="Text 0"/>
+          <p:cNvSpPr/>
+          <p:nvPr/>
+        </p:nvSpPr>
+        <p:spPr>
+          <a:xfrm>
+            <a:off x="0" y="0"/>
+            <a:ext cx="9144000" cy="101501"/>
+          </a:xfrm>
+          <a:prstGeom prst="rect">
+            <a:avLst/>
+          </a:prstGeom>
+          <a:solidFill>
+            <a:srgbClr val="277884"/>
+          </a:solidFill>
+          <a:ln/>
+        </p:spPr>
+        <p:txBody>
+          <a:bodyPr wrap="square" rtlCol="0" anchor="ctr"/>
+          <a:lstStyle/>
+          <a:p>
+            <a:pPr indent="0" marL="0">
+              <a:buNone/>
+            </a:pPr>
+            <a:endParaRPr lang="en-US" dirty="0"/>
+          </a:p>
+        </p:txBody>
+      </p:sp>
+      <p:sp>
+        <p:nvSpPr>
+          <p:cNvPr id="3" name="Text 1"/>
+          <p:cNvSpPr/>
+          <p:nvPr/>
+        </p:nvSpPr>
+        <p:spPr>
+          <a:xfrm>
+            <a:off x="406301" y="457051"/>
+            <a:ext cx="8498026" cy="274290"/>
+          </a:xfrm>
+          <a:prstGeom prst="rect">
+            <a:avLst/>
+          </a:prstGeom>
+          <a:noFill/>
+          <a:ln/>
+        </p:spPr>
+        <p:txBody>
+          <a:bodyPr wrap="square" lIns="0" tIns="0" rIns="0" bIns="0" rtlCol="0" anchor="t"/>
+          <a:lstStyle/>
+          <a:p>
+            <a:pPr algn="l" indent="0" marL="0">
+              <a:lnSpc>
+                <a:spcPts val="2160"/>
+              </a:lnSpc>
+              <a:spcBef>
+                <a:spcPts val="600"/>
+              </a:spcBef>
+              <a:spcAft>
+                <a:spcPts val="800"/>
+              </a:spcAft>
+              <a:buNone/>
+            </a:pPr>
+            <a:r>
+              <a:rPr lang="en-US" sz="1800" b="1" dirty="0">
+                <a:solidFill>
+                  <a:srgbClr val="FE4447"/>
+                </a:solidFill>
+                <a:latin typeface="Georgia" pitchFamily="34" charset="0"/>
+                <a:ea typeface="Georgia" pitchFamily="34" charset="-122"/>
+                <a:cs typeface="Georgia" pitchFamily="34" charset="-120"/>
+              </a:rPr>
+              <a:t>Activity (15 min) — Shadow-stick observation (cont.)</a:t>
+            </a:r>
+            <a:endParaRPr lang="en-US" sz="1800" dirty="0"/>
+          </a:p>
+        </p:txBody>
+      </p:sp>
+      <p:sp>
+        <p:nvSpPr>
+          <p:cNvPr id="4" name="Text 2"/>
+          <p:cNvSpPr/>
+          <p:nvPr/>
+        </p:nvSpPr>
+        <p:spPr>
+          <a:xfrm>
+            <a:off x="634901" y="883593"/>
+            <a:ext cx="8102798" cy="1424583"/>
+          </a:xfrm>
+          <a:prstGeom prst="rect">
+            <a:avLst/>
+          </a:prstGeom>
+          <a:noFill/>
+          <a:ln/>
+        </p:spPr>
+        <p:txBody>
+          <a:bodyPr wrap="square" lIns="0" tIns="0" rIns="0" bIns="0" rtlCol="0" anchor="t"/>
+          <a:lstStyle/>
+          <a:p>
+            <a:pPr algn="l" marL="342900" indent="-342900">
+              <a:lnSpc>
+                <a:spcPts val="1620"/>
+              </a:lnSpc>
+              <a:spcAft>
+                <a:spcPts val="300"/>
+              </a:spcAft>
+              <a:buSzPct val="100000"/>
+              <a:buChar char="•"/>
+            </a:pPr>
+            <a:r>
+              <a:rPr lang="en-US" sz="1200" dirty="0">
+                <a:solidFill>
+                  <a:srgbClr val="1C2833"/>
+                </a:solidFill>
+                <a:latin typeface="Arial" pitchFamily="34" charset="0"/>
+                <a:ea typeface="Arial" pitchFamily="34" charset="-122"/>
+                <a:cs typeface="Arial" pitchFamily="34" charset="-120"/>
+              </a:rPr>
+              <a:t>Plant the gnomon (the dowel) upright in a piece of cardboard. Mark north on the cardboard using the compass.</a:t>
+            </a:r>
+            <a:endParaRPr lang="en-US" sz="1200" dirty="0"/>
+          </a:p>
+          <a:p>
+            <a:pPr algn="l" marL="342900" indent="-342900">
+              <a:lnSpc>
+                <a:spcPts val="1620"/>
+              </a:lnSpc>
+              <a:spcAft>
+                <a:spcPts val="300"/>
+              </a:spcAft>
+              <a:buSzPct val="100000"/>
+              <a:buChar char="•"/>
+            </a:pPr>
+            <a:r>
+              <a:rPr lang="en-US" sz="1200" dirty="0">
+                <a:solidFill>
+                  <a:srgbClr val="1C2833"/>
+                </a:solidFill>
+                <a:latin typeface="Arial" pitchFamily="34" charset="0"/>
+                <a:ea typeface="Arial" pitchFamily="34" charset="-122"/>
+                <a:cs typeface="Arial" pitchFamily="34" charset="-120"/>
+              </a:rPr>
+              <a:t>At a known time (say, the start of the lesson), trace the shadow of the gnomon onto the cardboard. Write the time and the date next to the line.</a:t>
+            </a:r>
+            <a:endParaRPr lang="en-US" sz="1200" dirty="0"/>
+          </a:p>
+          <a:p>
+            <a:pPr algn="l" marL="342900" indent="-342900">
+              <a:lnSpc>
+                <a:spcPts val="1620"/>
+              </a:lnSpc>
+              <a:spcAft>
+                <a:spcPts val="300"/>
+              </a:spcAft>
+              <a:buSzPct val="100000"/>
+              <a:buChar char="•"/>
+            </a:pPr>
+            <a:r>
+              <a:rPr lang="en-US" sz="1200" dirty="0">
+                <a:solidFill>
+                  <a:srgbClr val="1C2833"/>
+                </a:solidFill>
+                <a:latin typeface="Arial" pitchFamily="34" charset="0"/>
+                <a:ea typeface="Arial" pitchFamily="34" charset="-122"/>
+                <a:cs typeface="Arial" pitchFamily="34" charset="-120"/>
+              </a:rPr>
+              <a:t>Return to the same gnomon in 10 minutes. The shadow has moved. Trace the new line.</a:t>
+            </a:r>
+            <a:endParaRPr lang="en-US" sz="1200" dirty="0"/>
+          </a:p>
+          <a:p>
+            <a:pPr algn="l" marL="342900" indent="-342900">
+              <a:lnSpc>
+                <a:spcPts val="1620"/>
+              </a:lnSpc>
+              <a:spcAft>
+                <a:spcPts val="300"/>
+              </a:spcAft>
+              <a:buSzPct val="100000"/>
+              <a:buChar char="•"/>
+            </a:pPr>
+            <a:r>
+              <a:rPr lang="en-US" sz="1200" dirty="0">
+                <a:solidFill>
+                  <a:srgbClr val="1C2833"/>
+                </a:solidFill>
+                <a:latin typeface="Arial" pitchFamily="34" charset="0"/>
+                <a:ea typeface="Arial" pitchFamily="34" charset="-122"/>
+                <a:cs typeface="Arial" pitchFamily="34" charset="-120"/>
+              </a:rPr>
+              <a:t>Discuss: </a:t>
+            </a:r>
+            <a:pPr algn="l" indent="0" marL="0">
+              <a:lnSpc>
+                <a:spcPts val="1620"/>
+              </a:lnSpc>
+              <a:spcAft>
+                <a:spcPts val="300"/>
+              </a:spcAft>
+              <a:buNone/>
+            </a:pPr>
+            <a:r>
+              <a:rPr lang="en-US" sz="1200" i="1" dirty="0">
+                <a:solidFill>
+                  <a:srgbClr val="1C2833"/>
+                </a:solidFill>
+                <a:latin typeface="Arial" pitchFamily="34" charset="0"/>
+                <a:ea typeface="Arial" pitchFamily="34" charset="-122"/>
+                <a:cs typeface="Arial" pitchFamily="34" charset="-120"/>
+              </a:rPr>
+              <a:t>"The Sun seemed to stand still while you were in class — but the shadow moved. What does that tell you about how the Sun moved?"</a:t>
+            </a:r>
+            <a:endParaRPr lang="en-US" sz="1200" dirty="0"/>
+          </a:p>
+        </p:txBody>
+      </p:sp>
+      <p:sp>
+        <p:nvSpPr>
+          <p:cNvPr id="5" name="Text 3"/>
+          <p:cNvSpPr/>
+          <p:nvPr/>
+        </p:nvSpPr>
+        <p:spPr>
+          <a:xfrm>
+            <a:off x="406301" y="4434929"/>
+            <a:ext cx="8498026" cy="213271"/>
+          </a:xfrm>
+          <a:prstGeom prst="rect">
+            <a:avLst/>
+          </a:prstGeom>
+          <a:noFill/>
+          <a:ln/>
+        </p:spPr>
+        <p:txBody>
+          <a:bodyPr wrap="square" lIns="0" tIns="0" rIns="0" bIns="0" rtlCol="0" anchor="t"/>
+          <a:lstStyle/>
+          <a:p>
+            <a:pPr algn="l" indent="0" marL="0">
+              <a:lnSpc>
+                <a:spcPts val="1680"/>
+              </a:lnSpc>
+              <a:spcBef>
+                <a:spcPts val="300"/>
+              </a:spcBef>
+              <a:spcAft>
+                <a:spcPts val="300"/>
+              </a:spcAft>
+              <a:buNone/>
+            </a:pPr>
+            <a:r>
+              <a:rPr lang="en-US" sz="1200" dirty="0">
+                <a:solidFill>
+                  <a:srgbClr val="1C2833"/>
+                </a:solidFill>
+                <a:latin typeface="Arial" pitchFamily="34" charset="0"/>
+                <a:ea typeface="Arial" pitchFamily="34" charset="-122"/>
+                <a:cs typeface="Arial" pitchFamily="34" charset="-120"/>
+              </a:rPr>
+              <a:t>Middle ·  · IKS Curriculum</a:t>
+            </a:r>
+            <a:endParaRPr lang="en-US" sz="1200" dirty="0"/>
+          </a:p>
+        </p:txBody>
+      </p:sp>
+    </p:spTree>
+  </p:cSld>
+  <p:clrMapOvr>
+    <a:masterClrMapping/>
+  </p:clrMapOvr>
+</p:sld>
+</file>
+
+<file path=ppt/slides/slide13.xml><?xml version="1.0" encoding="utf-8"?>
+<p:sld xmlns:a="http://schemas.openxmlformats.org/drawingml/2006/main" xmlns:r="http://schemas.openxmlformats.org/officeDocument/2006/relationships" xmlns:p="http://schemas.openxmlformats.org/presentationml/2006/main">
+  <p:cSld name="Slide 13">
+    <p:bg>
+      <p:bgPr>
+        <a:solidFill>
+          <a:srgbClr val="FFFFFF"/>
+        </a:solidFill>
+      </p:bgPr>
+    </p:bg>
+    <p:spTree>
+      <p:nvGrpSpPr>
+        <p:cNvPr id="1" name=""/>
+        <p:cNvGrpSpPr/>
+        <p:nvPr/>
+      </p:nvGrpSpPr>
+      <p:grpSpPr>
+        <a:xfrm>
+          <a:off x="0" y="0"/>
+          <a:ext cx="0" cy="0"/>
+          <a:chOff x="0" y="0"/>
+          <a:chExt cx="0" cy="0"/>
+        </a:xfrm>
+      </p:grpSpPr>
+      <p:sp>
+        <p:nvSpPr>
+          <p:cNvPr id="2" name="Text 0"/>
+          <p:cNvSpPr/>
+          <p:nvPr/>
+        </p:nvSpPr>
+        <p:spPr>
+          <a:xfrm>
+            <a:off x="0" y="0"/>
+            <a:ext cx="9144000" cy="101501"/>
+          </a:xfrm>
+          <a:prstGeom prst="rect">
+            <a:avLst/>
+          </a:prstGeom>
+          <a:solidFill>
+            <a:srgbClr val="277884"/>
+          </a:solidFill>
+          <a:ln/>
+        </p:spPr>
+        <p:txBody>
+          <a:bodyPr wrap="square" rtlCol="0" anchor="ctr"/>
+          <a:lstStyle/>
+          <a:p>
+            <a:pPr indent="0" marL="0">
+              <a:buNone/>
+            </a:pPr>
+            <a:endParaRPr lang="en-US" dirty="0"/>
+          </a:p>
+        </p:txBody>
+      </p:sp>
+      <p:sp>
+        <p:nvSpPr>
+          <p:cNvPr id="3" name="Text 1"/>
+          <p:cNvSpPr/>
+          <p:nvPr/>
+        </p:nvSpPr>
+        <p:spPr>
+          <a:xfrm>
+            <a:off x="406301" y="457051"/>
+            <a:ext cx="8498026" cy="274290"/>
+          </a:xfrm>
+          <a:prstGeom prst="rect">
+            <a:avLst/>
+          </a:prstGeom>
+          <a:noFill/>
+          <a:ln/>
+        </p:spPr>
+        <p:txBody>
+          <a:bodyPr wrap="square" lIns="0" tIns="0" rIns="0" bIns="0" rtlCol="0" anchor="t"/>
+          <a:lstStyle/>
+          <a:p>
+            <a:pPr algn="l" indent="0" marL="0">
+              <a:lnSpc>
+                <a:spcPts val="2160"/>
+              </a:lnSpc>
+              <a:spcBef>
+                <a:spcPts val="600"/>
+              </a:spcBef>
+              <a:spcAft>
+                <a:spcPts val="800"/>
+              </a:spcAft>
+              <a:buNone/>
+            </a:pPr>
+            <a:r>
+              <a:rPr lang="en-US" sz="1800" b="1" dirty="0">
+                <a:solidFill>
+                  <a:srgbClr val="FE4447"/>
+                </a:solidFill>
+                <a:latin typeface="Georgia" pitchFamily="34" charset="0"/>
+                <a:ea typeface="Georgia" pitchFamily="34" charset="-122"/>
+                <a:cs typeface="Georgia" pitchFamily="34" charset="-120"/>
+              </a:rPr>
+              <a:t>Activity (15 min) — Shadow-stick observation (cont.)</a:t>
+            </a:r>
+            <a:endParaRPr lang="en-US" sz="1800" dirty="0"/>
+          </a:p>
+        </p:txBody>
+      </p:sp>
+      <p:sp>
+        <p:nvSpPr>
+          <p:cNvPr id="4" name="Text 2"/>
+          <p:cNvSpPr/>
+          <p:nvPr/>
+        </p:nvSpPr>
+        <p:spPr>
+          <a:xfrm>
+            <a:off x="406301" y="870942"/>
+            <a:ext cx="8498026" cy="426541"/>
+          </a:xfrm>
+          <a:prstGeom prst="rect">
+            <a:avLst/>
+          </a:prstGeom>
+          <a:noFill/>
+          <a:ln/>
+        </p:spPr>
+        <p:txBody>
+          <a:bodyPr wrap="square" lIns="0" tIns="0" rIns="0" bIns="0" rtlCol="0" anchor="t"/>
+          <a:lstStyle/>
+          <a:p>
+            <a:pPr algn="l" indent="0" marL="0">
+              <a:lnSpc>
+                <a:spcPts val="1680"/>
+              </a:lnSpc>
+              <a:spcBef>
+                <a:spcPts val="300"/>
+              </a:spcBef>
+              <a:spcAft>
+                <a:spcPts val="300"/>
+              </a:spcAft>
+              <a:buNone/>
+            </a:pPr>
+            <a:r>
+              <a:rPr lang="en-US" sz="1200" dirty="0">
+                <a:solidFill>
+                  <a:srgbClr val="1C2833"/>
+                </a:solidFill>
+                <a:latin typeface="Arial" pitchFamily="34" charset="0"/>
+                <a:ea typeface="Arial" pitchFamily="34" charset="-122"/>
+                <a:cs typeface="Arial" pitchFamily="34" charset="-120"/>
+              </a:rPr>
+              <a:t>If weather doesn't permit: do the activity indoors with a strong torch (acting as the Sun) and a pencil-on-paper gnomon. Move the torch slowly along an arc to mimic the daily motion. Each "minute" of torch travel = ~4 minutes of real Sun travel.</a:t>
+            </a:r>
+            <a:endParaRPr lang="en-US" sz="1200" dirty="0"/>
+          </a:p>
+        </p:txBody>
+      </p:sp>
+      <p:sp>
+        <p:nvSpPr>
+          <p:cNvPr id="5" name="Text 3"/>
+          <p:cNvSpPr/>
+          <p:nvPr/>
+        </p:nvSpPr>
+        <p:spPr>
+          <a:xfrm>
+            <a:off x="406301" y="1373684"/>
+            <a:ext cx="8498026" cy="426541"/>
+          </a:xfrm>
+          <a:prstGeom prst="rect">
+            <a:avLst/>
+          </a:prstGeom>
+          <a:noFill/>
+          <a:ln/>
+        </p:spPr>
+        <p:txBody>
+          <a:bodyPr wrap="square" lIns="0" tIns="0" rIns="0" bIns="0" rtlCol="0" anchor="t"/>
+          <a:lstStyle/>
+          <a:p>
+            <a:pPr algn="l" indent="0" marL="0">
+              <a:lnSpc>
+                <a:spcPts val="1680"/>
+              </a:lnSpc>
+              <a:spcBef>
+                <a:spcPts val="300"/>
+              </a:spcBef>
+              <a:spcAft>
+                <a:spcPts val="300"/>
+              </a:spcAft>
+              <a:buNone/>
+            </a:pPr>
+            <a:r>
+              <a:rPr lang="en-US" sz="1200" b="1" dirty="0">
+                <a:solidFill>
+                  <a:srgbClr val="1C2833"/>
+                </a:solidFill>
+                <a:latin typeface="Arial" pitchFamily="34" charset="0"/>
+                <a:ea typeface="Arial" pitchFamily="34" charset="-122"/>
+                <a:cs typeface="Arial" pitchFamily="34" charset="-120"/>
+              </a:rPr>
+              <a:t>Safety reminder:</a:t>
+            </a:r>
+            <a:pPr algn="l" indent="0" marL="0">
+              <a:lnSpc>
+                <a:spcPts val="1680"/>
+              </a:lnSpc>
+              <a:spcBef>
+                <a:spcPts val="300"/>
+              </a:spcBef>
+              <a:spcAft>
+                <a:spcPts val="300"/>
+              </a:spcAft>
+              <a:buNone/>
+            </a:pPr>
+            <a:r>
+              <a:rPr lang="en-US" sz="1200" dirty="0">
+                <a:solidFill>
+                  <a:srgbClr val="1C2833"/>
+                </a:solidFill>
+                <a:latin typeface="Arial" pitchFamily="34" charset="0"/>
+                <a:ea typeface="Arial" pitchFamily="34" charset="-122"/>
+                <a:cs typeface="Arial" pitchFamily="34" charset="-120"/>
+              </a:rPr>
+              <a:t> the students look at the </a:t>
+            </a:r>
+            <a:pPr algn="l" indent="0" marL="0">
+              <a:lnSpc>
+                <a:spcPts val="1680"/>
+              </a:lnSpc>
+              <a:spcBef>
+                <a:spcPts val="300"/>
+              </a:spcBef>
+              <a:spcAft>
+                <a:spcPts val="300"/>
+              </a:spcAft>
+              <a:buNone/>
+            </a:pPr>
+            <a:r>
+              <a:rPr lang="en-US" sz="1200" b="1" dirty="0">
+                <a:solidFill>
+                  <a:srgbClr val="1C2833"/>
+                </a:solidFill>
+                <a:latin typeface="Arial" pitchFamily="34" charset="0"/>
+                <a:ea typeface="Arial" pitchFamily="34" charset="-122"/>
+                <a:cs typeface="Arial" pitchFamily="34" charset="-120"/>
+              </a:rPr>
+              <a:t>shadow</a:t>
+            </a:r>
+            <a:pPr algn="l" indent="0" marL="0">
+              <a:lnSpc>
+                <a:spcPts val="1680"/>
+              </a:lnSpc>
+              <a:spcBef>
+                <a:spcPts val="300"/>
+              </a:spcBef>
+              <a:spcAft>
+                <a:spcPts val="300"/>
+              </a:spcAft>
+              <a:buNone/>
+            </a:pPr>
+            <a:r>
+              <a:rPr lang="en-US" sz="1200" dirty="0">
+                <a:solidFill>
+                  <a:srgbClr val="1C2833"/>
+                </a:solidFill>
+                <a:latin typeface="Arial" pitchFamily="34" charset="0"/>
+                <a:ea typeface="Arial" pitchFamily="34" charset="-122"/>
+                <a:cs typeface="Arial" pitchFamily="34" charset="-120"/>
+              </a:rPr>
+              <a:t>, not the Sun. Anyone caught glancing up at the Sun pays a forfeit (a fun one — like doing the daily prompt next class).</a:t>
+            </a:r>
+            <a:endParaRPr lang="en-US" sz="1200" dirty="0"/>
+          </a:p>
+        </p:txBody>
+      </p:sp>
+      <p:sp>
+        <p:nvSpPr>
+          <p:cNvPr id="6" name="Text 4"/>
+          <p:cNvSpPr/>
+          <p:nvPr/>
+        </p:nvSpPr>
+        <p:spPr>
+          <a:xfrm>
+            <a:off x="406301" y="4434929"/>
+            <a:ext cx="8498026" cy="213271"/>
+          </a:xfrm>
+          <a:prstGeom prst="rect">
+            <a:avLst/>
+          </a:prstGeom>
+          <a:noFill/>
+          <a:ln/>
+        </p:spPr>
+        <p:txBody>
+          <a:bodyPr wrap="square" lIns="0" tIns="0" rIns="0" bIns="0" rtlCol="0" anchor="t"/>
+          <a:lstStyle/>
+          <a:p>
+            <a:pPr algn="l" indent="0" marL="0">
+              <a:lnSpc>
+                <a:spcPts val="1680"/>
+              </a:lnSpc>
+              <a:spcBef>
+                <a:spcPts val="300"/>
+              </a:spcBef>
+              <a:spcAft>
+                <a:spcPts val="300"/>
+              </a:spcAft>
+              <a:buNone/>
+            </a:pPr>
+            <a:r>
+              <a:rPr lang="en-US" sz="1200" dirty="0">
+                <a:solidFill>
+                  <a:srgbClr val="1C2833"/>
+                </a:solidFill>
+                <a:latin typeface="Arial" pitchFamily="34" charset="0"/>
+                <a:ea typeface="Arial" pitchFamily="34" charset="-122"/>
+                <a:cs typeface="Arial" pitchFamily="34" charset="-120"/>
+              </a:rPr>
+              <a:t>Middle ·  · IKS Curriculum</a:t>
+            </a:r>
+            <a:endParaRPr lang="en-US" sz="1200" dirty="0"/>
+          </a:p>
+        </p:txBody>
+      </p:sp>
+    </p:spTree>
+  </p:cSld>
+  <p:clrMapOvr>
+    <a:masterClrMapping/>
+  </p:clrMapOvr>
+</p:sld>
+</file>
+
+<file path=ppt/slides/slide14.xml><?xml version="1.0" encoding="utf-8"?>
+<p:sld xmlns:a="http://schemas.openxmlformats.org/drawingml/2006/main" xmlns:r="http://schemas.openxmlformats.org/officeDocument/2006/relationships" xmlns:p="http://schemas.openxmlformats.org/presentationml/2006/main">
+  <p:cSld name="Slide 14">
+    <p:bg>
+      <p:bgPr>
+        <a:solidFill>
+          <a:srgbClr val="FFFFFF"/>
+        </a:solidFill>
+      </p:bgPr>
+    </p:bg>
+    <p:spTree>
+      <p:nvGrpSpPr>
+        <p:cNvPr id="1" name=""/>
+        <p:cNvGrpSpPr/>
+        <p:nvPr/>
+      </p:nvGrpSpPr>
+      <p:grpSpPr>
+        <a:xfrm>
+          <a:off x="0" y="0"/>
+          <a:ext cx="0" cy="0"/>
+          <a:chOff x="0" y="0"/>
+          <a:chExt cx="0" cy="0"/>
+        </a:xfrm>
+      </p:grpSpPr>
+      <p:sp>
+        <p:nvSpPr>
+          <p:cNvPr id="2" name="Text 0"/>
+          <p:cNvSpPr/>
+          <p:nvPr/>
+        </p:nvSpPr>
+        <p:spPr>
+          <a:xfrm>
+            <a:off x="0" y="0"/>
+            <a:ext cx="9144000" cy="101501"/>
+          </a:xfrm>
+          <a:prstGeom prst="rect">
+            <a:avLst/>
+          </a:prstGeom>
+          <a:solidFill>
+            <a:srgbClr val="277884"/>
+          </a:solidFill>
+          <a:ln/>
+        </p:spPr>
+        <p:txBody>
+          <a:bodyPr wrap="square" rtlCol="0" anchor="ctr"/>
+          <a:lstStyle/>
+          <a:p>
+            <a:pPr indent="0" marL="0">
+              <a:buNone/>
+            </a:pPr>
+            <a:endParaRPr lang="en-US" dirty="0"/>
+          </a:p>
+        </p:txBody>
+      </p:sp>
+      <p:sp>
+        <p:nvSpPr>
+          <p:cNvPr id="3" name="Text 1"/>
+          <p:cNvSpPr/>
+          <p:nvPr/>
+        </p:nvSpPr>
+        <p:spPr>
+          <a:xfrm>
+            <a:off x="406301" y="457051"/>
+            <a:ext cx="8498026" cy="274290"/>
+          </a:xfrm>
+          <a:prstGeom prst="rect">
+            <a:avLst/>
+          </a:prstGeom>
+          <a:noFill/>
+          <a:ln/>
+        </p:spPr>
+        <p:txBody>
+          <a:bodyPr wrap="square" lIns="0" tIns="0" rIns="0" bIns="0" rtlCol="0" anchor="t"/>
+          <a:lstStyle/>
+          <a:p>
+            <a:pPr algn="l" indent="0" marL="0">
+              <a:lnSpc>
+                <a:spcPts val="2160"/>
+              </a:lnSpc>
+              <a:spcBef>
+                <a:spcPts val="600"/>
+              </a:spcBef>
+              <a:spcAft>
+                <a:spcPts val="800"/>
+              </a:spcAft>
+              <a:buNone/>
+            </a:pPr>
+            <a:r>
+              <a:rPr lang="en-US" sz="1800" b="1" dirty="0">
+                <a:solidFill>
+                  <a:srgbClr val="FE4447"/>
+                </a:solidFill>
+                <a:latin typeface="Georgia" pitchFamily="34" charset="0"/>
+                <a:ea typeface="Georgia" pitchFamily="34" charset="-122"/>
+                <a:cs typeface="Georgia" pitchFamily="34" charset="-120"/>
+              </a:rPr>
+              <a:t>Wrap-up (5 min)</a:t>
+            </a:r>
+            <a:endParaRPr lang="en-US" sz="1800" dirty="0"/>
+          </a:p>
+        </p:txBody>
+      </p:sp>
+      <p:sp>
+        <p:nvSpPr>
+          <p:cNvPr id="4" name="Text 2"/>
+          <p:cNvSpPr/>
+          <p:nvPr/>
+        </p:nvSpPr>
+        <p:spPr>
+          <a:xfrm>
+            <a:off x="634901" y="883593"/>
+            <a:ext cx="8102798" cy="1180802"/>
+          </a:xfrm>
+          <a:prstGeom prst="rect">
+            <a:avLst/>
+          </a:prstGeom>
+          <a:noFill/>
+          <a:ln/>
+        </p:spPr>
+        <p:txBody>
+          <a:bodyPr wrap="square" lIns="0" tIns="0" rIns="0" bIns="0" rtlCol="0" anchor="t"/>
+          <a:lstStyle/>
+          <a:p>
+            <a:pPr algn="l" marL="342900" indent="-342900">
+              <a:lnSpc>
+                <a:spcPts val="1620"/>
+              </a:lnSpc>
+              <a:spcAft>
+                <a:spcPts val="300"/>
+              </a:spcAft>
+              <a:buSzPct val="100000"/>
+              <a:buChar char="•"/>
+            </a:pPr>
+            <a:r>
+              <a:rPr lang="en-US" sz="1200" dirty="0">
+                <a:solidFill>
+                  <a:srgbClr val="1C2833"/>
+                </a:solidFill>
+                <a:latin typeface="Arial" pitchFamily="34" charset="0"/>
+                <a:ea typeface="Arial" pitchFamily="34" charset="-122"/>
+                <a:cs typeface="Arial" pitchFamily="34" charset="-120"/>
+              </a:rPr>
+              <a:t>Exit prompt: </a:t>
+            </a:r>
+            <a:pPr algn="l" indent="0" marL="0">
+              <a:lnSpc>
+                <a:spcPts val="1620"/>
+              </a:lnSpc>
+              <a:spcAft>
+                <a:spcPts val="300"/>
+              </a:spcAft>
+              <a:buNone/>
+            </a:pPr>
+            <a:r>
+              <a:rPr lang="en-US" sz="1200" i="1" dirty="0">
+                <a:solidFill>
+                  <a:srgbClr val="1C2833"/>
+                </a:solidFill>
+                <a:latin typeface="Arial" pitchFamily="34" charset="0"/>
+                <a:ea typeface="Arial" pitchFamily="34" charset="-122"/>
+                <a:cs typeface="Arial" pitchFamily="34" charset="-120"/>
+              </a:rPr>
+              <a:t>"In one sentence — how can you tell tomorrow morning whether the Sun has 'moved north' or 'moved south' since today?"</a:t>
+            </a:r>
+            <a:endParaRPr lang="en-US" sz="1200" dirty="0"/>
+          </a:p>
+          <a:p>
+            <a:pPr algn="l" marL="342900" indent="-342900">
+              <a:lnSpc>
+                <a:spcPts val="1620"/>
+              </a:lnSpc>
+              <a:spcAft>
+                <a:spcPts val="300"/>
+              </a:spcAft>
+              <a:buSzPct val="100000"/>
+              <a:buChar char="•"/>
+            </a:pPr>
+            <a:r>
+              <a:rPr lang="en-US" sz="1200" dirty="0">
+                <a:solidFill>
+                  <a:srgbClr val="1C2833"/>
+                </a:solidFill>
+                <a:latin typeface="Arial" pitchFamily="34" charset="0"/>
+                <a:ea typeface="Arial" pitchFamily="34" charset="-122"/>
+                <a:cs typeface="Arial" pitchFamily="34" charset="-120"/>
+              </a:rPr>
+              <a:t>Take 2 responses. Acceptable answer: </a:t>
+            </a:r>
+            <a:pPr algn="l" indent="0" marL="0">
+              <a:lnSpc>
+                <a:spcPts val="1620"/>
+              </a:lnSpc>
+              <a:spcAft>
+                <a:spcPts val="300"/>
+              </a:spcAft>
+              <a:buNone/>
+            </a:pPr>
+            <a:r>
+              <a:rPr lang="en-US" sz="1200" i="1" dirty="0">
+                <a:solidFill>
+                  <a:srgbClr val="1C2833"/>
+                </a:solidFill>
+                <a:latin typeface="Arial" pitchFamily="34" charset="0"/>
+                <a:ea typeface="Arial" pitchFamily="34" charset="-122"/>
+                <a:cs typeface="Arial" pitchFamily="34" charset="-120"/>
+              </a:rPr>
+              <a:t>"Compare the sunrise spot to a known landmark on the horizon — has the rising point moved closer to north or to south?"</a:t>
+            </a:r>
+            <a:endParaRPr lang="en-US" sz="1200" dirty="0"/>
+          </a:p>
+          <a:p>
+            <a:pPr algn="l" marL="342900" indent="-342900">
+              <a:lnSpc>
+                <a:spcPts val="1620"/>
+              </a:lnSpc>
+              <a:spcAft>
+                <a:spcPts val="300"/>
+              </a:spcAft>
+              <a:buSzPct val="100000"/>
+              <a:buChar char="•"/>
+            </a:pPr>
+            <a:r>
+              <a:rPr lang="en-US" sz="1200" dirty="0">
+                <a:solidFill>
+                  <a:srgbClr val="1C2833"/>
+                </a:solidFill>
+                <a:latin typeface="Arial" pitchFamily="34" charset="0"/>
+                <a:ea typeface="Arial" pitchFamily="34" charset="-122"/>
+                <a:cs typeface="Arial" pitchFamily="34" charset="-120"/>
+              </a:rPr>
+              <a:t>Preview Day 2: </a:t>
+            </a:r>
+            <a:pPr algn="l" indent="0" marL="0">
+              <a:lnSpc>
+                <a:spcPts val="1620"/>
+              </a:lnSpc>
+              <a:spcAft>
+                <a:spcPts val="300"/>
+              </a:spcAft>
+              <a:buNone/>
+            </a:pPr>
+            <a:r>
+              <a:rPr lang="en-US" sz="1200" i="1" dirty="0">
+                <a:solidFill>
+                  <a:srgbClr val="1C2833"/>
+                </a:solidFill>
+                <a:latin typeface="Arial" pitchFamily="34" charset="0"/>
+                <a:ea typeface="Arial" pitchFamily="34" charset="-122"/>
+                <a:cs typeface="Arial" pitchFamily="34" charset="-120"/>
+              </a:rPr>
+              <a:t>"Tomorrow — WHY does the Sun's spot shift? Bring a globe if you have a small one at home."</a:t>
+            </a:r>
+            <a:endParaRPr lang="en-US" sz="1200" dirty="0"/>
+          </a:p>
+        </p:txBody>
+      </p:sp>
+      <p:sp>
+        <p:nvSpPr>
+          <p:cNvPr id="5" name="Text 3"/>
+          <p:cNvSpPr/>
+          <p:nvPr/>
+        </p:nvSpPr>
+        <p:spPr>
+          <a:xfrm>
+            <a:off x="406301" y="4434929"/>
+            <a:ext cx="8498026" cy="213271"/>
+          </a:xfrm>
+          <a:prstGeom prst="rect">
+            <a:avLst/>
+          </a:prstGeom>
+          <a:noFill/>
+          <a:ln/>
+        </p:spPr>
+        <p:txBody>
+          <a:bodyPr wrap="square" lIns="0" tIns="0" rIns="0" bIns="0" rtlCol="0" anchor="t"/>
+          <a:lstStyle/>
+          <a:p>
+            <a:pPr algn="l" indent="0" marL="0">
+              <a:lnSpc>
+                <a:spcPts val="1680"/>
+              </a:lnSpc>
+              <a:spcBef>
+                <a:spcPts val="300"/>
+              </a:spcBef>
+              <a:spcAft>
+                <a:spcPts val="300"/>
+              </a:spcAft>
+              <a:buNone/>
+            </a:pPr>
+            <a:r>
+              <a:rPr lang="en-US" sz="1200" dirty="0">
+                <a:solidFill>
+                  <a:srgbClr val="1C2833"/>
+                </a:solidFill>
+                <a:latin typeface="Arial" pitchFamily="34" charset="0"/>
+                <a:ea typeface="Arial" pitchFamily="34" charset="-122"/>
+                <a:cs typeface="Arial" pitchFamily="34" charset="-120"/>
+              </a:rPr>
+              <a:t>Middle ·  · IKS Curriculum</a:t>
+            </a:r>
+            <a:endParaRPr lang="en-US" sz="1200" dirty="0"/>
+          </a:p>
+        </p:txBody>
+      </p:sp>
+    </p:spTree>
+  </p:cSld>
+  <p:clrMapOvr>
+    <a:masterClrMapping/>
+  </p:clrMapOvr>
+</p:sld>
+</file>
+
+<file path=ppt/slides/slide15.xml><?xml version="1.0" encoding="utf-8"?>
+<p:sld xmlns:a="http://schemas.openxmlformats.org/drawingml/2006/main" xmlns:r="http://schemas.openxmlformats.org/officeDocument/2006/relationships" xmlns:p="http://schemas.openxmlformats.org/presentationml/2006/main">
+  <p:cSld name="Slide 15">
+    <p:bg>
+      <p:bgPr>
+        <a:solidFill>
+          <a:srgbClr val="FFFFFF"/>
+        </a:solidFill>
+      </p:bgPr>
+    </p:bg>
+    <p:spTree>
+      <p:nvGrpSpPr>
+        <p:cNvPr id="1" name=""/>
+        <p:cNvGrpSpPr/>
+        <p:nvPr/>
+      </p:nvGrpSpPr>
+      <p:grpSpPr>
+        <a:xfrm>
+          <a:off x="0" y="0"/>
+          <a:ext cx="0" cy="0"/>
+          <a:chOff x="0" y="0"/>
+          <a:chExt cx="0" cy="0"/>
+        </a:xfrm>
+      </p:grpSpPr>
+      <p:sp>
+        <p:nvSpPr>
+          <p:cNvPr id="2" name="Text 0"/>
+          <p:cNvSpPr/>
+          <p:nvPr/>
+        </p:nvSpPr>
+        <p:spPr>
+          <a:xfrm>
+            <a:off x="0" y="0"/>
+            <a:ext cx="9144000" cy="101501"/>
+          </a:xfrm>
+          <a:prstGeom prst="rect">
+            <a:avLst/>
+          </a:prstGeom>
+          <a:solidFill>
+            <a:srgbClr val="277884"/>
+          </a:solidFill>
+          <a:ln/>
+        </p:spPr>
+        <p:txBody>
+          <a:bodyPr wrap="square" rtlCol="0" anchor="ctr"/>
+          <a:lstStyle/>
+          <a:p>
+            <a:pPr indent="0" marL="0">
+              <a:buNone/>
+            </a:pPr>
+            <a:endParaRPr lang="en-US" dirty="0"/>
+          </a:p>
+        </p:txBody>
+      </p:sp>
+      <p:sp>
+        <p:nvSpPr>
+          <p:cNvPr id="3" name="Text 1"/>
+          <p:cNvSpPr/>
+          <p:nvPr/>
+        </p:nvSpPr>
+        <p:spPr>
+          <a:xfrm>
+            <a:off x="406301" y="457051"/>
+            <a:ext cx="8498026" cy="274290"/>
+          </a:xfrm>
+          <a:prstGeom prst="rect">
+            <a:avLst/>
+          </a:prstGeom>
+          <a:noFill/>
+          <a:ln/>
+        </p:spPr>
+        <p:txBody>
+          <a:bodyPr wrap="square" lIns="0" tIns="0" rIns="0" bIns="0" rtlCol="0" anchor="t"/>
+          <a:lstStyle/>
+          <a:p>
+            <a:pPr algn="l" indent="0" marL="0">
+              <a:lnSpc>
+                <a:spcPts val="2160"/>
+              </a:lnSpc>
+              <a:spcBef>
+                <a:spcPts val="600"/>
+              </a:spcBef>
+              <a:spcAft>
+                <a:spcPts val="800"/>
+              </a:spcAft>
+              <a:buNone/>
+            </a:pPr>
+            <a:r>
+              <a:rPr lang="en-US" sz="1800" b="1" dirty="0">
+                <a:solidFill>
+                  <a:srgbClr val="FE4447"/>
+                </a:solidFill>
+                <a:latin typeface="Georgia" pitchFamily="34" charset="0"/>
+                <a:ea typeface="Georgia" pitchFamily="34" charset="-122"/>
+                <a:cs typeface="Georgia" pitchFamily="34" charset="-120"/>
+              </a:rPr>
+              <a:t>Student-facing content</a:t>
+            </a:r>
+            <a:endParaRPr lang="en-US" sz="1800" dirty="0"/>
+          </a:p>
+        </p:txBody>
+      </p:sp>
+      <p:sp>
+        <p:nvSpPr>
+          <p:cNvPr id="4" name="Text 2"/>
+          <p:cNvSpPr/>
+          <p:nvPr/>
+        </p:nvSpPr>
+        <p:spPr>
+          <a:xfrm>
+            <a:off x="406301" y="883593"/>
+            <a:ext cx="8331398" cy="2150269"/>
+          </a:xfrm>
+          <a:prstGeom prst="rect">
+            <a:avLst/>
+          </a:prstGeom>
+          <a:solidFill>
+            <a:srgbClr val="F4F8F9"/>
+          </a:solidFill>
+          <a:ln/>
+        </p:spPr>
+        <p:txBody>
+          <a:bodyPr wrap="square" rtlCol="0" anchor="ctr"/>
+          <a:lstStyle/>
+          <a:p>
+            <a:pPr indent="0" marL="0">
+              <a:buNone/>
+            </a:pPr>
+            <a:endParaRPr lang="en-US" dirty="0"/>
+          </a:p>
+        </p:txBody>
+      </p:sp>
+      <p:sp>
+        <p:nvSpPr>
+          <p:cNvPr id="5" name="Shape 3"/>
+          <p:cNvSpPr/>
+          <p:nvPr/>
+        </p:nvSpPr>
+        <p:spPr>
+          <a:xfrm>
+            <a:off x="434876" y="883593"/>
+            <a:ext cx="0" cy="2150269"/>
+          </a:xfrm>
+          <a:prstGeom prst="line">
+            <a:avLst/>
+          </a:prstGeom>
+          <a:noFill/>
+          <a:ln w="57150">
+            <a:solidFill>
+              <a:srgbClr val="FE4447"/>
+            </a:solidFill>
+            <a:prstDash val="solid"/>
+          </a:ln>
+        </p:spPr>
+      </p:sp>
+      <p:sp>
+        <p:nvSpPr>
+          <p:cNvPr id="6" name="Text 4"/>
+          <p:cNvSpPr/>
+          <p:nvPr/>
+        </p:nvSpPr>
+        <p:spPr>
+          <a:xfrm>
+            <a:off x="692051" y="1074093"/>
+            <a:ext cx="7973389" cy="230981"/>
+          </a:xfrm>
+          <a:prstGeom prst="rect">
+            <a:avLst/>
+          </a:prstGeom>
+          <a:noFill/>
+          <a:ln/>
+        </p:spPr>
+        <p:txBody>
+          <a:bodyPr wrap="square" lIns="0" tIns="0" rIns="0" bIns="0" rtlCol="0" anchor="t"/>
+          <a:lstStyle/>
+          <a:p>
+            <a:pPr algn="l" indent="0" marL="0">
+              <a:lnSpc>
+                <a:spcPts val="1820"/>
+              </a:lnSpc>
+              <a:spcBef>
+                <a:spcPts val="300"/>
+              </a:spcBef>
+              <a:spcAft>
+                <a:spcPts val="300"/>
+              </a:spcAft>
+              <a:buNone/>
+            </a:pPr>
+            <a:r>
+              <a:rPr lang="en-US" sz="1300" b="1" i="1" dirty="0">
+                <a:solidFill>
+                  <a:srgbClr val="1C2833"/>
+                </a:solidFill>
+                <a:latin typeface="Georgia" pitchFamily="34" charset="0"/>
+                <a:ea typeface="Georgia" pitchFamily="34" charset="-122"/>
+                <a:cs typeface="Georgia" pitchFamily="34" charset="-120"/>
+              </a:rPr>
+              <a:t>The Sun has two motions you can see:</a:t>
+            </a:r>
+            <a:endParaRPr lang="en-US" sz="1300" dirty="0"/>
+          </a:p>
+        </p:txBody>
+      </p:sp>
+      <p:sp>
+        <p:nvSpPr>
+          <p:cNvPr id="7" name="Text 5"/>
+          <p:cNvSpPr/>
+          <p:nvPr/>
+        </p:nvSpPr>
+        <p:spPr>
+          <a:xfrm>
+            <a:off x="692051" y="1343174"/>
+            <a:ext cx="7973389" cy="230981"/>
+          </a:xfrm>
+          <a:prstGeom prst="rect">
+            <a:avLst/>
+          </a:prstGeom>
+          <a:noFill/>
+          <a:ln/>
+        </p:spPr>
+        <p:txBody>
+          <a:bodyPr wrap="square" lIns="0" tIns="0" rIns="0" bIns="0" rtlCol="0" anchor="t"/>
+          <a:lstStyle/>
+          <a:p>
+            <a:pPr algn="l" indent="0" marL="0">
+              <a:lnSpc>
+                <a:spcPts val="1820"/>
+              </a:lnSpc>
+              <a:spcBef>
+                <a:spcPts val="300"/>
+              </a:spcBef>
+              <a:spcAft>
+                <a:spcPts val="300"/>
+              </a:spcAft>
+              <a:buNone/>
+            </a:pPr>
+            <a:r>
+              <a:rPr lang="en-US" sz="1300" b="1" i="1" dirty="0">
+                <a:solidFill>
+                  <a:srgbClr val="1C2833"/>
+                </a:solidFill>
+                <a:latin typeface="Georgia" pitchFamily="34" charset="0"/>
+                <a:ea typeface="Georgia" pitchFamily="34" charset="-122"/>
+                <a:cs typeface="Georgia" pitchFamily="34" charset="-120"/>
+              </a:rPr>
+              <a:t>Daily</a:t>
+            </a:r>
+            <a:pPr algn="l" indent="0" marL="0">
+              <a:lnSpc>
+                <a:spcPts val="1820"/>
+              </a:lnSpc>
+              <a:spcBef>
+                <a:spcPts val="300"/>
+              </a:spcBef>
+              <a:spcAft>
+                <a:spcPts val="300"/>
+              </a:spcAft>
+              <a:buNone/>
+            </a:pPr>
+            <a:r>
+              <a:rPr lang="en-US" sz="1300" dirty="0">
+                <a:solidFill>
+                  <a:srgbClr val="1C2833"/>
+                </a:solidFill>
+                <a:latin typeface="Georgia" pitchFamily="34" charset="0"/>
+                <a:ea typeface="Georgia" pitchFamily="34" charset="-122"/>
+                <a:cs typeface="Georgia" pitchFamily="34" charset="-120"/>
+              </a:rPr>
+              <a:t> — rises east-ish, sets west-ish. Takes 24 hours.</a:t>
+            </a:r>
+            <a:endParaRPr lang="en-US" sz="1300" dirty="0"/>
+          </a:p>
+        </p:txBody>
+      </p:sp>
+      <p:sp>
+        <p:nvSpPr>
+          <p:cNvPr id="8" name="Text 6"/>
+          <p:cNvSpPr/>
+          <p:nvPr/>
+        </p:nvSpPr>
+        <p:spPr>
+          <a:xfrm>
+            <a:off x="692051" y="1612255"/>
+            <a:ext cx="7973389" cy="230981"/>
+          </a:xfrm>
+          <a:prstGeom prst="rect">
+            <a:avLst/>
+          </a:prstGeom>
+          <a:noFill/>
+          <a:ln/>
+        </p:spPr>
+        <p:txBody>
+          <a:bodyPr wrap="square" lIns="0" tIns="0" rIns="0" bIns="0" rtlCol="0" anchor="t"/>
+          <a:lstStyle/>
+          <a:p>
+            <a:pPr algn="l" indent="0" marL="0">
+              <a:lnSpc>
+                <a:spcPts val="1820"/>
+              </a:lnSpc>
+              <a:spcBef>
+                <a:spcPts val="300"/>
+              </a:spcBef>
+              <a:spcAft>
+                <a:spcPts val="300"/>
+              </a:spcAft>
+              <a:buNone/>
+            </a:pPr>
+            <a:r>
+              <a:rPr lang="en-US" sz="1300" b="1" i="1" dirty="0">
+                <a:solidFill>
+                  <a:srgbClr val="1C2833"/>
+                </a:solidFill>
+                <a:latin typeface="Georgia" pitchFamily="34" charset="0"/>
+                <a:ea typeface="Georgia" pitchFamily="34" charset="-122"/>
+                <a:cs typeface="Georgia" pitchFamily="34" charset="-120"/>
+              </a:rPr>
+              <a:t>Annual</a:t>
+            </a:r>
+            <a:pPr algn="l" indent="0" marL="0">
+              <a:lnSpc>
+                <a:spcPts val="1820"/>
+              </a:lnSpc>
+              <a:spcBef>
+                <a:spcPts val="300"/>
+              </a:spcBef>
+              <a:spcAft>
+                <a:spcPts val="300"/>
+              </a:spcAft>
+              <a:buNone/>
+            </a:pPr>
+            <a:r>
+              <a:rPr lang="en-US" sz="1300" dirty="0">
+                <a:solidFill>
+                  <a:srgbClr val="1C2833"/>
+                </a:solidFill>
+                <a:latin typeface="Georgia" pitchFamily="34" charset="0"/>
+                <a:ea typeface="Georgia" pitchFamily="34" charset="-122"/>
+                <a:cs typeface="Georgia" pitchFamily="34" charset="-120"/>
+              </a:rPr>
+              <a:t> — the rising spot drifts north and south along the horizon over a year.</a:t>
+            </a:r>
+            <a:endParaRPr lang="en-US" sz="1300" dirty="0"/>
+          </a:p>
+        </p:txBody>
+      </p:sp>
+      <p:sp>
+        <p:nvSpPr>
+          <p:cNvPr id="9" name="Text 7"/>
+          <p:cNvSpPr/>
+          <p:nvPr/>
+        </p:nvSpPr>
+        <p:spPr>
+          <a:xfrm>
+            <a:off x="692051" y="1881336"/>
+            <a:ext cx="7973389" cy="461963"/>
+          </a:xfrm>
+          <a:prstGeom prst="rect">
+            <a:avLst/>
+          </a:prstGeom>
+          <a:noFill/>
+          <a:ln/>
+        </p:spPr>
+        <p:txBody>
+          <a:bodyPr wrap="square" lIns="0" tIns="0" rIns="0" bIns="0" rtlCol="0" anchor="t"/>
+          <a:lstStyle/>
+          <a:p>
+            <a:pPr algn="l" indent="0" marL="0">
+              <a:lnSpc>
+                <a:spcPts val="1820"/>
+              </a:lnSpc>
+              <a:spcBef>
+                <a:spcPts val="300"/>
+              </a:spcBef>
+              <a:spcAft>
+                <a:spcPts val="300"/>
+              </a:spcAft>
+              <a:buNone/>
+            </a:pPr>
+            <a:r>
+              <a:rPr lang="en-US" sz="1300" dirty="0">
+                <a:solidFill>
+                  <a:srgbClr val="1C2833"/>
+                </a:solidFill>
+                <a:latin typeface="Georgia" pitchFamily="34" charset="0"/>
+                <a:ea typeface="Georgia" pitchFamily="34" charset="-122"/>
+                <a:cs typeface="Georgia" pitchFamily="34" charset="-120"/>
+              </a:rPr>
+              <a:t>The Sun's yearly path across the stars is called the </a:t>
+            </a:r>
+            <a:pPr algn="l" indent="0" marL="0">
+              <a:lnSpc>
+                <a:spcPts val="1820"/>
+              </a:lnSpc>
+              <a:spcBef>
+                <a:spcPts val="300"/>
+              </a:spcBef>
+              <a:spcAft>
+                <a:spcPts val="300"/>
+              </a:spcAft>
+              <a:buNone/>
+            </a:pPr>
+            <a:r>
+              <a:rPr lang="en-US" sz="1300" b="1" i="1" dirty="0">
+                <a:solidFill>
+                  <a:srgbClr val="1C2833"/>
+                </a:solidFill>
+                <a:latin typeface="Georgia" pitchFamily="34" charset="0"/>
+                <a:ea typeface="Georgia" pitchFamily="34" charset="-122"/>
+                <a:cs typeface="Georgia" pitchFamily="34" charset="-120"/>
+              </a:rPr>
+              <a:t>ecliptic</a:t>
+            </a:r>
+            <a:pPr algn="l" indent="0" marL="0">
+              <a:lnSpc>
+                <a:spcPts val="1820"/>
+              </a:lnSpc>
+              <a:spcBef>
+                <a:spcPts val="300"/>
+              </a:spcBef>
+              <a:spcAft>
+                <a:spcPts val="300"/>
+              </a:spcAft>
+              <a:buNone/>
+            </a:pPr>
+            <a:r>
+              <a:rPr lang="en-US" sz="1300" dirty="0">
+                <a:solidFill>
+                  <a:srgbClr val="1C2833"/>
+                </a:solidFill>
+                <a:latin typeface="Georgia" pitchFamily="34" charset="0"/>
+                <a:ea typeface="Georgia" pitchFamily="34" charset="-122"/>
+                <a:cs typeface="Georgia" pitchFamily="34" charset="-120"/>
+              </a:rPr>
+              <a:t> (</a:t>
+            </a:r>
+            <a:pPr algn="l" indent="0" marL="0">
+              <a:lnSpc>
+                <a:spcPts val="1820"/>
+              </a:lnSpc>
+              <a:spcBef>
+                <a:spcPts val="300"/>
+              </a:spcBef>
+              <a:spcAft>
+                <a:spcPts val="300"/>
+              </a:spcAft>
+              <a:buNone/>
+            </a:pPr>
+            <a:r>
+              <a:rPr lang="en-US" sz="1300" i="1" dirty="0">
+                <a:solidFill>
+                  <a:srgbClr val="1C2833"/>
+                </a:solidFill>
+                <a:latin typeface="Georgia" pitchFamily="34" charset="0"/>
+                <a:ea typeface="Georgia" pitchFamily="34" charset="-122"/>
+                <a:cs typeface="Georgia" pitchFamily="34" charset="-120"/>
+              </a:rPr>
+              <a:t>krānti-vṛtta</a:t>
+            </a:r>
+            <a:pPr algn="l" indent="0" marL="0">
+              <a:lnSpc>
+                <a:spcPts val="1820"/>
+              </a:lnSpc>
+              <a:spcBef>
+                <a:spcPts val="300"/>
+              </a:spcBef>
+              <a:spcAft>
+                <a:spcPts val="300"/>
+              </a:spcAft>
+              <a:buNone/>
+            </a:pPr>
+            <a:r>
+              <a:rPr lang="en-US" sz="1300" dirty="0">
+                <a:solidFill>
+                  <a:srgbClr val="1C2833"/>
+                </a:solidFill>
+                <a:latin typeface="Georgia" pitchFamily="34" charset="0"/>
+                <a:ea typeface="Georgia" pitchFamily="34" charset="-122"/>
+                <a:cs typeface="Georgia" pitchFamily="34" charset="-120"/>
+              </a:rPr>
+              <a:t>). Indian astronomers, like astronomers everywhere, traced this path by watching which stars were just visible at dawn and dusk.</a:t>
+            </a:r>
+            <a:endParaRPr lang="en-US" sz="1300" dirty="0"/>
+          </a:p>
+        </p:txBody>
+      </p:sp>
+      <p:sp>
+        <p:nvSpPr>
+          <p:cNvPr id="10" name="Text 8"/>
+          <p:cNvSpPr/>
+          <p:nvPr/>
+        </p:nvSpPr>
+        <p:spPr>
+          <a:xfrm>
+            <a:off x="692051" y="2381399"/>
+            <a:ext cx="7973389" cy="461963"/>
+          </a:xfrm>
+          <a:prstGeom prst="rect">
+            <a:avLst/>
+          </a:prstGeom>
+          <a:noFill/>
+          <a:ln/>
+        </p:spPr>
+        <p:txBody>
+          <a:bodyPr wrap="square" lIns="0" tIns="0" rIns="0" bIns="0" rtlCol="0" anchor="t"/>
+          <a:lstStyle/>
+          <a:p>
+            <a:pPr algn="l" indent="0" marL="0">
+              <a:lnSpc>
+                <a:spcPts val="1820"/>
+              </a:lnSpc>
+              <a:spcBef>
+                <a:spcPts val="300"/>
+              </a:spcBef>
+              <a:spcAft>
+                <a:spcPts val="300"/>
+              </a:spcAft>
+              <a:buNone/>
+            </a:pPr>
+            <a:r>
+              <a:rPr lang="en-US" sz="1300" dirty="0">
+                <a:solidFill>
+                  <a:srgbClr val="1C2833"/>
+                </a:solidFill>
+                <a:latin typeface="Georgia" pitchFamily="34" charset="0"/>
+                <a:ea typeface="Georgia" pitchFamily="34" charset="-122"/>
+                <a:cs typeface="Georgia" pitchFamily="34" charset="-120"/>
+              </a:rPr>
+              <a:t>Today, you have noticed the daily motion (via the gnomon). Over the next two weeks, you'll learn the names for the annual motion: </a:t>
+            </a:r>
+            <a:pPr algn="l" indent="0" marL="0">
+              <a:lnSpc>
+                <a:spcPts val="1820"/>
+              </a:lnSpc>
+              <a:spcBef>
+                <a:spcPts val="300"/>
+              </a:spcBef>
+              <a:spcAft>
+                <a:spcPts val="300"/>
+              </a:spcAft>
+              <a:buNone/>
+            </a:pPr>
+            <a:r>
+              <a:rPr lang="en-US" sz="1300" i="1" dirty="0">
+                <a:solidFill>
+                  <a:srgbClr val="1C2833"/>
+                </a:solidFill>
+                <a:latin typeface="Georgia" pitchFamily="34" charset="0"/>
+                <a:ea typeface="Georgia" pitchFamily="34" charset="-122"/>
+                <a:cs typeface="Georgia" pitchFamily="34" charset="-120"/>
+              </a:rPr>
+              <a:t>uttarāyaṇa</a:t>
+            </a:r>
+            <a:pPr algn="l" indent="0" marL="0">
+              <a:lnSpc>
+                <a:spcPts val="1820"/>
+              </a:lnSpc>
+              <a:spcBef>
+                <a:spcPts val="300"/>
+              </a:spcBef>
+              <a:spcAft>
+                <a:spcPts val="300"/>
+              </a:spcAft>
+              <a:buNone/>
+            </a:pPr>
+            <a:r>
+              <a:rPr lang="en-US" sz="1300" dirty="0">
+                <a:solidFill>
+                  <a:srgbClr val="1C2833"/>
+                </a:solidFill>
+                <a:latin typeface="Georgia" pitchFamily="34" charset="0"/>
+                <a:ea typeface="Georgia" pitchFamily="34" charset="-122"/>
+                <a:cs typeface="Georgia" pitchFamily="34" charset="-120"/>
+              </a:rPr>
+              <a:t> (northward course) and </a:t>
+            </a:r>
+            <a:pPr algn="l" indent="0" marL="0">
+              <a:lnSpc>
+                <a:spcPts val="1820"/>
+              </a:lnSpc>
+              <a:spcBef>
+                <a:spcPts val="300"/>
+              </a:spcBef>
+              <a:spcAft>
+                <a:spcPts val="300"/>
+              </a:spcAft>
+              <a:buNone/>
+            </a:pPr>
+            <a:r>
+              <a:rPr lang="en-US" sz="1300" i="1" dirty="0">
+                <a:solidFill>
+                  <a:srgbClr val="1C2833"/>
+                </a:solidFill>
+                <a:latin typeface="Georgia" pitchFamily="34" charset="0"/>
+                <a:ea typeface="Georgia" pitchFamily="34" charset="-122"/>
+                <a:cs typeface="Georgia" pitchFamily="34" charset="-120"/>
+              </a:rPr>
+              <a:t>dakṣiṇāyana</a:t>
+            </a:r>
+            <a:pPr algn="l" indent="0" marL="0">
+              <a:lnSpc>
+                <a:spcPts val="1820"/>
+              </a:lnSpc>
+              <a:spcBef>
+                <a:spcPts val="300"/>
+              </a:spcBef>
+              <a:spcAft>
+                <a:spcPts val="300"/>
+              </a:spcAft>
+              <a:buNone/>
+            </a:pPr>
+            <a:r>
+              <a:rPr lang="en-US" sz="1300" dirty="0">
+                <a:solidFill>
+                  <a:srgbClr val="1C2833"/>
+                </a:solidFill>
+                <a:latin typeface="Georgia" pitchFamily="34" charset="0"/>
+                <a:ea typeface="Georgia" pitchFamily="34" charset="-122"/>
+                <a:cs typeface="Georgia" pitchFamily="34" charset="-120"/>
+              </a:rPr>
+              <a:t> (southward course).</a:t>
+            </a:r>
+            <a:endParaRPr lang="en-US" sz="1300" dirty="0"/>
+          </a:p>
+        </p:txBody>
+      </p:sp>
+      <p:sp>
+        <p:nvSpPr>
+          <p:cNvPr id="11" name="Text 9"/>
+          <p:cNvSpPr/>
+          <p:nvPr/>
+        </p:nvSpPr>
+        <p:spPr>
+          <a:xfrm>
+            <a:off x="406301" y="4434929"/>
+            <a:ext cx="8498026" cy="213271"/>
+          </a:xfrm>
+          <a:prstGeom prst="rect">
+            <a:avLst/>
+          </a:prstGeom>
+          <a:noFill/>
+          <a:ln/>
+        </p:spPr>
+        <p:txBody>
+          <a:bodyPr wrap="square" lIns="0" tIns="0" rIns="0" bIns="0" rtlCol="0" anchor="t"/>
+          <a:lstStyle/>
+          <a:p>
+            <a:pPr algn="l" indent="0" marL="0">
+              <a:lnSpc>
+                <a:spcPts val="1680"/>
+              </a:lnSpc>
+              <a:spcBef>
+                <a:spcPts val="300"/>
+              </a:spcBef>
+              <a:spcAft>
+                <a:spcPts val="300"/>
+              </a:spcAft>
+              <a:buNone/>
+            </a:pPr>
+            <a:r>
+              <a:rPr lang="en-US" sz="1200" dirty="0">
+                <a:solidFill>
+                  <a:srgbClr val="1C2833"/>
+                </a:solidFill>
+                <a:latin typeface="Arial" pitchFamily="34" charset="0"/>
+                <a:ea typeface="Arial" pitchFamily="34" charset="-122"/>
+                <a:cs typeface="Arial" pitchFamily="34" charset="-120"/>
+              </a:rPr>
+              <a:t>Middle ·  · IKS Curriculum</a:t>
+            </a:r>
+            <a:endParaRPr lang="en-US" sz="1200" dirty="0"/>
+          </a:p>
+        </p:txBody>
+      </p:sp>
+    </p:spTree>
+  </p:cSld>
+  <p:clrMapOvr>
+    <a:masterClrMapping/>
+  </p:clrMapOvr>
+</p:sld>
+</file>
+
+<file path=ppt/slides/slide16.xml><?xml version="1.0" encoding="utf-8"?>
+<p:sld xmlns:a="http://schemas.openxmlformats.org/drawingml/2006/main" xmlns:r="http://schemas.openxmlformats.org/officeDocument/2006/relationships" xmlns:p="http://schemas.openxmlformats.org/presentationml/2006/main">
+  <p:cSld name="Slide 16">
+    <p:bg>
+      <p:bgPr>
+        <a:solidFill>
+          <a:srgbClr val="FFFFFF"/>
+        </a:solidFill>
+      </p:bgPr>
+    </p:bg>
+    <p:spTree>
+      <p:nvGrpSpPr>
+        <p:cNvPr id="1" name=""/>
+        <p:cNvGrpSpPr/>
+        <p:nvPr/>
+      </p:nvGrpSpPr>
+      <p:grpSpPr>
+        <a:xfrm>
+          <a:off x="0" y="0"/>
+          <a:ext cx="0" cy="0"/>
+          <a:chOff x="0" y="0"/>
+          <a:chExt cx="0" cy="0"/>
+        </a:xfrm>
+      </p:grpSpPr>
+      <p:sp>
+        <p:nvSpPr>
+          <p:cNvPr id="2" name="Text 0"/>
+          <p:cNvSpPr/>
+          <p:nvPr/>
+        </p:nvSpPr>
+        <p:spPr>
+          <a:xfrm>
+            <a:off x="0" y="0"/>
+            <a:ext cx="9144000" cy="101501"/>
+          </a:xfrm>
+          <a:prstGeom prst="rect">
+            <a:avLst/>
+          </a:prstGeom>
+          <a:solidFill>
+            <a:srgbClr val="277884"/>
+          </a:solidFill>
+          <a:ln/>
+        </p:spPr>
+        <p:txBody>
+          <a:bodyPr wrap="square" rtlCol="0" anchor="ctr"/>
+          <a:lstStyle/>
+          <a:p>
+            <a:pPr indent="0" marL="0">
+              <a:buNone/>
+            </a:pPr>
+            <a:endParaRPr lang="en-US" dirty="0"/>
+          </a:p>
+        </p:txBody>
+      </p:sp>
+      <p:sp>
+        <p:nvSpPr>
+          <p:cNvPr id="3" name="Text 1"/>
+          <p:cNvSpPr/>
+          <p:nvPr/>
+        </p:nvSpPr>
+        <p:spPr>
+          <a:xfrm>
+            <a:off x="406301" y="457051"/>
+            <a:ext cx="8498026" cy="274290"/>
+          </a:xfrm>
+          <a:prstGeom prst="rect">
+            <a:avLst/>
+          </a:prstGeom>
+          <a:noFill/>
+          <a:ln/>
+        </p:spPr>
+        <p:txBody>
+          <a:bodyPr wrap="square" lIns="0" tIns="0" rIns="0" bIns="0" rtlCol="0" anchor="t"/>
+          <a:lstStyle/>
+          <a:p>
+            <a:pPr algn="l" indent="0" marL="0">
+              <a:lnSpc>
+                <a:spcPts val="2160"/>
+              </a:lnSpc>
+              <a:spcBef>
+                <a:spcPts val="600"/>
+              </a:spcBef>
+              <a:spcAft>
+                <a:spcPts val="800"/>
+              </a:spcAft>
+              <a:buNone/>
+            </a:pPr>
+            <a:r>
+              <a:rPr lang="en-US" sz="1800" b="1" dirty="0">
+                <a:solidFill>
+                  <a:srgbClr val="FE4447"/>
+                </a:solidFill>
+                <a:latin typeface="Georgia" pitchFamily="34" charset="0"/>
+                <a:ea typeface="Georgia" pitchFamily="34" charset="-122"/>
+                <a:cs typeface="Georgia" pitchFamily="34" charset="-120"/>
+              </a:rPr>
+              <a:t>Homework</a:t>
+            </a:r>
+            <a:endParaRPr lang="en-US" sz="1800" dirty="0"/>
+          </a:p>
+        </p:txBody>
+      </p:sp>
+      <p:sp>
+        <p:nvSpPr>
+          <p:cNvPr id="4" name="Text 2"/>
+          <p:cNvSpPr/>
+          <p:nvPr/>
+        </p:nvSpPr>
+        <p:spPr>
+          <a:xfrm>
+            <a:off x="634901" y="883593"/>
+            <a:ext cx="8102798" cy="731341"/>
+          </a:xfrm>
+          <a:prstGeom prst="rect">
+            <a:avLst/>
+          </a:prstGeom>
+          <a:noFill/>
+          <a:ln/>
+        </p:spPr>
+        <p:txBody>
+          <a:bodyPr wrap="square" lIns="0" tIns="0" rIns="0" bIns="0" rtlCol="0" anchor="t"/>
+          <a:lstStyle/>
+          <a:p>
+            <a:pPr algn="l" marL="342900" indent="-342900">
+              <a:lnSpc>
+                <a:spcPts val="1620"/>
+              </a:lnSpc>
+              <a:spcAft>
+                <a:spcPts val="300"/>
+              </a:spcAft>
+              <a:buSzPct val="100000"/>
+              <a:buChar char="•"/>
+            </a:pPr>
+            <a:r>
+              <a:rPr lang="en-US" sz="1200" dirty="0">
+                <a:solidFill>
+                  <a:srgbClr val="1C2833"/>
+                </a:solidFill>
+                <a:latin typeface="Arial" pitchFamily="34" charset="0"/>
+                <a:ea typeface="Arial" pitchFamily="34" charset="-122"/>
+                <a:cs typeface="Arial" pitchFamily="34" charset="-120"/>
+              </a:rPr>
+              <a:t>For three mornings this week, when you leave home, glance at the eastern horizon. Note where exactly the Sun rises relative to a landmark (a tree, a building, a flagpole). Sketch the spot on a small map — three sketches.</a:t>
+            </a:r>
+            <a:endParaRPr lang="en-US" sz="1200" dirty="0"/>
+          </a:p>
+          <a:p>
+            <a:pPr algn="l" marL="342900" indent="-342900">
+              <a:lnSpc>
+                <a:spcPts val="1620"/>
+              </a:lnSpc>
+              <a:spcAft>
+                <a:spcPts val="300"/>
+              </a:spcAft>
+              <a:buSzPct val="100000"/>
+              <a:buChar char="•"/>
+            </a:pPr>
+            <a:r>
+              <a:rPr lang="en-US" sz="1200" dirty="0">
+                <a:solidFill>
+                  <a:srgbClr val="1C2833"/>
+                </a:solidFill>
+                <a:latin typeface="Arial" pitchFamily="34" charset="0"/>
+                <a:ea typeface="Arial" pitchFamily="34" charset="-122"/>
+                <a:cs typeface="Arial" pitchFamily="34" charset="-120"/>
+              </a:rPr>
+              <a:t>Bring the calendar printout to Day 2.</a:t>
+            </a:r>
+            <a:endParaRPr lang="en-US" sz="1200" dirty="0"/>
+          </a:p>
+        </p:txBody>
+      </p:sp>
+      <p:sp>
+        <p:nvSpPr>
+          <p:cNvPr id="5" name="Text 3"/>
+          <p:cNvSpPr/>
+          <p:nvPr/>
+        </p:nvSpPr>
+        <p:spPr>
+          <a:xfrm>
+            <a:off x="406301" y="4434929"/>
+            <a:ext cx="8498026" cy="213271"/>
+          </a:xfrm>
+          <a:prstGeom prst="rect">
+            <a:avLst/>
+          </a:prstGeom>
+          <a:noFill/>
+          <a:ln/>
+        </p:spPr>
+        <p:txBody>
+          <a:bodyPr wrap="square" lIns="0" tIns="0" rIns="0" bIns="0" rtlCol="0" anchor="t"/>
+          <a:lstStyle/>
+          <a:p>
+            <a:pPr algn="l" indent="0" marL="0">
+              <a:lnSpc>
+                <a:spcPts val="1680"/>
+              </a:lnSpc>
+              <a:spcBef>
+                <a:spcPts val="300"/>
+              </a:spcBef>
+              <a:spcAft>
+                <a:spcPts val="300"/>
+              </a:spcAft>
+              <a:buNone/>
+            </a:pPr>
+            <a:r>
+              <a:rPr lang="en-US" sz="1200" dirty="0">
+                <a:solidFill>
+                  <a:srgbClr val="1C2833"/>
+                </a:solidFill>
+                <a:latin typeface="Arial" pitchFamily="34" charset="0"/>
+                <a:ea typeface="Arial" pitchFamily="34" charset="-122"/>
+                <a:cs typeface="Arial" pitchFamily="34" charset="-120"/>
+              </a:rPr>
+              <a:t>Middle ·  · IKS Curriculum</a:t>
+            </a:r>
+            <a:endParaRPr lang="en-US" sz="1200" dirty="0"/>
+          </a:p>
+        </p:txBody>
+      </p:sp>
+    </p:spTree>
+  </p:cSld>
+  <p:clrMapOvr>
+    <a:masterClrMapping/>
+  </p:clrMapOvr>
+</p:sld>
+</file>
+
+<file path=ppt/slides/slide17.xml><?xml version="1.0" encoding="utf-8"?>
+<p:sld xmlns:a="http://schemas.openxmlformats.org/drawingml/2006/main" xmlns:r="http://schemas.openxmlformats.org/officeDocument/2006/relationships" xmlns:p="http://schemas.openxmlformats.org/presentationml/2006/main">
+  <p:cSld name="Slide 17">
+    <p:bg>
+      <p:bgPr>
+        <a:solidFill>
+          <a:srgbClr val="FFFFFF"/>
+        </a:solidFill>
+      </p:bgPr>
+    </p:bg>
+    <p:spTree>
+      <p:nvGrpSpPr>
+        <p:cNvPr id="1" name=""/>
+        <p:cNvGrpSpPr/>
+        <p:nvPr/>
+      </p:nvGrpSpPr>
+      <p:grpSpPr>
+        <a:xfrm>
+          <a:off x="0" y="0"/>
+          <a:ext cx="0" cy="0"/>
+          <a:chOff x="0" y="0"/>
+          <a:chExt cx="0" cy="0"/>
+        </a:xfrm>
+      </p:grpSpPr>
+      <p:sp>
+        <p:nvSpPr>
+          <p:cNvPr id="2" name="Text 0"/>
+          <p:cNvSpPr/>
+          <p:nvPr/>
+        </p:nvSpPr>
+        <p:spPr>
+          <a:xfrm>
+            <a:off x="0" y="0"/>
+            <a:ext cx="9144000" cy="101501"/>
+          </a:xfrm>
+          <a:prstGeom prst="rect">
+            <a:avLst/>
+          </a:prstGeom>
+          <a:solidFill>
+            <a:srgbClr val="277884"/>
+          </a:solidFill>
+          <a:ln/>
+        </p:spPr>
+        <p:txBody>
+          <a:bodyPr wrap="square" rtlCol="0" anchor="ctr"/>
+          <a:lstStyle/>
+          <a:p>
+            <a:pPr indent="0" marL="0">
+              <a:buNone/>
+            </a:pPr>
+            <a:endParaRPr lang="en-US" dirty="0"/>
+          </a:p>
+        </p:txBody>
+      </p:sp>
+      <p:sp>
+        <p:nvSpPr>
+          <p:cNvPr id="3" name="Text 1"/>
+          <p:cNvSpPr/>
+          <p:nvPr/>
+        </p:nvSpPr>
+        <p:spPr>
+          <a:xfrm>
+            <a:off x="406301" y="457051"/>
+            <a:ext cx="8498026" cy="274290"/>
+          </a:xfrm>
+          <a:prstGeom prst="rect">
+            <a:avLst/>
+          </a:prstGeom>
+          <a:noFill/>
+          <a:ln/>
+        </p:spPr>
+        <p:txBody>
+          <a:bodyPr wrap="square" lIns="0" tIns="0" rIns="0" bIns="0" rtlCol="0" anchor="t"/>
+          <a:lstStyle/>
+          <a:p>
+            <a:pPr algn="l" indent="0" marL="0">
+              <a:lnSpc>
+                <a:spcPts val="2160"/>
+              </a:lnSpc>
+              <a:spcBef>
+                <a:spcPts val="600"/>
+              </a:spcBef>
+              <a:spcAft>
+                <a:spcPts val="800"/>
+              </a:spcAft>
+              <a:buNone/>
+            </a:pPr>
+            <a:r>
+              <a:rPr lang="en-US" sz="1800" b="1" dirty="0">
+                <a:solidFill>
+                  <a:srgbClr val="FE4447"/>
+                </a:solidFill>
+                <a:latin typeface="Georgia" pitchFamily="34" charset="0"/>
+                <a:ea typeface="Georgia" pitchFamily="34" charset="-122"/>
+                <a:cs typeface="Georgia" pitchFamily="34" charset="-120"/>
+              </a:rPr>
+              <a:t>Differentiation</a:t>
+            </a:r>
+            <a:endParaRPr lang="en-US" sz="1800" dirty="0"/>
+          </a:p>
+        </p:txBody>
+      </p:sp>
+      <p:sp>
+        <p:nvSpPr>
+          <p:cNvPr id="4" name="Text 2"/>
+          <p:cNvSpPr/>
+          <p:nvPr/>
+        </p:nvSpPr>
+        <p:spPr>
+          <a:xfrm>
+            <a:off x="634901" y="883593"/>
+            <a:ext cx="8102798" cy="731341"/>
+          </a:xfrm>
+          <a:prstGeom prst="rect">
+            <a:avLst/>
+          </a:prstGeom>
+          <a:noFill/>
+          <a:ln/>
+        </p:spPr>
+        <p:txBody>
+          <a:bodyPr wrap="square" lIns="0" tIns="0" rIns="0" bIns="0" rtlCol="0" anchor="t"/>
+          <a:lstStyle/>
+          <a:p>
+            <a:pPr algn="l" marL="342900" indent="-342900">
+              <a:lnSpc>
+                <a:spcPts val="1620"/>
+              </a:lnSpc>
+              <a:spcAft>
+                <a:spcPts val="300"/>
+              </a:spcAft>
+              <a:buSzPct val="100000"/>
+              <a:buChar char="•"/>
+            </a:pPr>
+            <a:r>
+              <a:rPr lang="en-US" sz="1200" b="1" dirty="0">
+                <a:solidFill>
+                  <a:srgbClr val="1C2833"/>
+                </a:solidFill>
+                <a:latin typeface="Arial" pitchFamily="34" charset="0"/>
+                <a:ea typeface="Arial" pitchFamily="34" charset="-122"/>
+                <a:cs typeface="Arial" pitchFamily="34" charset="-120"/>
+              </a:rPr>
+              <a:t>One tier up:</a:t>
+            </a:r>
+            <a:pPr algn="l" indent="0" marL="0">
+              <a:lnSpc>
+                <a:spcPts val="1620"/>
+              </a:lnSpc>
+              <a:spcAft>
+                <a:spcPts val="300"/>
+              </a:spcAft>
+              <a:buNone/>
+            </a:pPr>
+            <a:r>
+              <a:rPr lang="en-US" sz="1200" dirty="0">
+                <a:solidFill>
+                  <a:srgbClr val="1C2833"/>
+                </a:solidFill>
+                <a:latin typeface="Arial" pitchFamily="34" charset="0"/>
+                <a:ea typeface="Arial" pitchFamily="34" charset="-122"/>
+                <a:cs typeface="Arial" pitchFamily="34" charset="-120"/>
+              </a:rPr>
+              <a:t> Find out (online or in the school library) the </a:t>
+            </a:r>
+            <a:pPr algn="l" indent="0" marL="0">
+              <a:lnSpc>
+                <a:spcPts val="1620"/>
+              </a:lnSpc>
+              <a:spcAft>
+                <a:spcPts val="300"/>
+              </a:spcAft>
+              <a:buNone/>
+            </a:pPr>
+            <a:r>
+              <a:rPr lang="en-US" sz="1200" b="1" dirty="0">
+                <a:solidFill>
+                  <a:srgbClr val="1C2833"/>
+                </a:solidFill>
+                <a:latin typeface="Arial" pitchFamily="34" charset="0"/>
+                <a:ea typeface="Arial" pitchFamily="34" charset="-122"/>
+                <a:cs typeface="Arial" pitchFamily="34" charset="-120"/>
+              </a:rPr>
+              <a:t>time</a:t>
+            </a:r>
+            <a:pPr algn="l" indent="0" marL="0">
+              <a:lnSpc>
+                <a:spcPts val="1620"/>
+              </a:lnSpc>
+              <a:spcAft>
+                <a:spcPts val="300"/>
+              </a:spcAft>
+              <a:buNone/>
+            </a:pPr>
+            <a:r>
+              <a:rPr lang="en-US" sz="1200" dirty="0">
+                <a:solidFill>
+                  <a:srgbClr val="1C2833"/>
+                </a:solidFill>
+                <a:latin typeface="Arial" pitchFamily="34" charset="0"/>
+                <a:ea typeface="Arial" pitchFamily="34" charset="-122"/>
+                <a:cs typeface="Arial" pitchFamily="34" charset="-120"/>
+              </a:rPr>
+              <a:t> of sunrise and sunset for today AND for one day exactly six months from now. By how many minutes does the day length differ?</a:t>
+            </a:r>
+            <a:endParaRPr lang="en-US" sz="1200" dirty="0"/>
+          </a:p>
+          <a:p>
+            <a:pPr algn="l" marL="342900" indent="-342900">
+              <a:lnSpc>
+                <a:spcPts val="1620"/>
+              </a:lnSpc>
+              <a:spcAft>
+                <a:spcPts val="300"/>
+              </a:spcAft>
+              <a:buSzPct val="100000"/>
+              <a:buChar char="•"/>
+            </a:pPr>
+            <a:r>
+              <a:rPr lang="en-US" sz="1200" b="1" dirty="0">
+                <a:solidFill>
+                  <a:srgbClr val="1C2833"/>
+                </a:solidFill>
+                <a:latin typeface="Arial" pitchFamily="34" charset="0"/>
+                <a:ea typeface="Arial" pitchFamily="34" charset="-122"/>
+                <a:cs typeface="Arial" pitchFamily="34" charset="-120"/>
+              </a:rPr>
+              <a:t>One tier down:</a:t>
+            </a:r>
+            <a:pPr algn="l" indent="0" marL="0">
+              <a:lnSpc>
+                <a:spcPts val="1620"/>
+              </a:lnSpc>
+              <a:spcAft>
+                <a:spcPts val="300"/>
+              </a:spcAft>
+              <a:buNone/>
+            </a:pPr>
+            <a:r>
+              <a:rPr lang="en-US" sz="1200" dirty="0">
+                <a:solidFill>
+                  <a:srgbClr val="1C2833"/>
+                </a:solidFill>
+                <a:latin typeface="Arial" pitchFamily="34" charset="0"/>
+                <a:ea typeface="Arial" pitchFamily="34" charset="-122"/>
+                <a:cs typeface="Arial" pitchFamily="34" charset="-120"/>
+              </a:rPr>
+              <a:t> Just do the morning-glance — don't worry about sketching maps. Three mental notes are enough.</a:t>
+            </a:r>
+            <a:endParaRPr lang="en-US" sz="1200" dirty="0"/>
+          </a:p>
+        </p:txBody>
+      </p:sp>
+      <p:sp>
+        <p:nvSpPr>
+          <p:cNvPr id="5" name="Text 3"/>
+          <p:cNvSpPr/>
+          <p:nvPr/>
+        </p:nvSpPr>
+        <p:spPr>
+          <a:xfrm>
+            <a:off x="406301" y="4434929"/>
+            <a:ext cx="8498026" cy="213271"/>
+          </a:xfrm>
+          <a:prstGeom prst="rect">
+            <a:avLst/>
+          </a:prstGeom>
+          <a:noFill/>
+          <a:ln/>
+        </p:spPr>
+        <p:txBody>
+          <a:bodyPr wrap="square" lIns="0" tIns="0" rIns="0" bIns="0" rtlCol="0" anchor="t"/>
+          <a:lstStyle/>
+          <a:p>
+            <a:pPr algn="l" indent="0" marL="0">
+              <a:lnSpc>
+                <a:spcPts val="1680"/>
+              </a:lnSpc>
+              <a:spcBef>
+                <a:spcPts val="300"/>
+              </a:spcBef>
+              <a:spcAft>
+                <a:spcPts val="300"/>
+              </a:spcAft>
+              <a:buNone/>
+            </a:pPr>
+            <a:r>
+              <a:rPr lang="en-US" sz="1200" dirty="0">
+                <a:solidFill>
+                  <a:srgbClr val="1C2833"/>
+                </a:solidFill>
+                <a:latin typeface="Arial" pitchFamily="34" charset="0"/>
+                <a:ea typeface="Arial" pitchFamily="34" charset="-122"/>
+                <a:cs typeface="Arial" pitchFamily="34" charset="-120"/>
+              </a:rPr>
+              <a:t>Middle ·  · IKS Curriculum</a:t>
+            </a:r>
+            <a:endParaRPr lang="en-US" sz="1200" dirty="0"/>
+          </a:p>
+        </p:txBody>
+      </p:sp>
+    </p:spTree>
+  </p:cSld>
+  <p:clrMapOvr>
+    <a:masterClrMapping/>
+  </p:clrMapOvr>
+</p:sld>
+</file>
+
+<file path=ppt/slides/slide18.xml><?xml version="1.0" encoding="utf-8"?>
+<p:sld xmlns:a="http://schemas.openxmlformats.org/drawingml/2006/main" xmlns:r="http://schemas.openxmlformats.org/officeDocument/2006/relationships" xmlns:p="http://schemas.openxmlformats.org/presentationml/2006/main">
+  <p:cSld name="Slide 18">
+    <p:bg>
+      <p:bgPr>
+        <a:solidFill>
+          <a:srgbClr val="FFFFFF"/>
+        </a:solidFill>
+      </p:bgPr>
+    </p:bg>
+    <p:spTree>
+      <p:nvGrpSpPr>
+        <p:cNvPr id="1" name=""/>
+        <p:cNvGrpSpPr/>
+        <p:nvPr/>
+      </p:nvGrpSpPr>
+      <p:grpSpPr>
+        <a:xfrm>
+          <a:off x="0" y="0"/>
+          <a:ext cx="0" cy="0"/>
+          <a:chOff x="0" y="0"/>
+          <a:chExt cx="0" cy="0"/>
+        </a:xfrm>
+      </p:grpSpPr>
+      <p:sp>
+        <p:nvSpPr>
+          <p:cNvPr id="2" name="Text 0"/>
+          <p:cNvSpPr/>
+          <p:nvPr/>
+        </p:nvSpPr>
+        <p:spPr>
+          <a:xfrm>
+            <a:off x="0" y="0"/>
+            <a:ext cx="9144000" cy="101501"/>
+          </a:xfrm>
+          <a:prstGeom prst="rect">
+            <a:avLst/>
+          </a:prstGeom>
+          <a:solidFill>
+            <a:srgbClr val="277884"/>
+          </a:solidFill>
+          <a:ln/>
+        </p:spPr>
+        <p:txBody>
+          <a:bodyPr wrap="square" rtlCol="0" anchor="ctr"/>
+          <a:lstStyle/>
+          <a:p>
+            <a:pPr indent="0" marL="0">
+              <a:buNone/>
+            </a:pPr>
+            <a:endParaRPr lang="en-US" dirty="0"/>
+          </a:p>
+        </p:txBody>
+      </p:sp>
+      <p:sp>
+        <p:nvSpPr>
+          <p:cNvPr id="3" name="Text 1"/>
+          <p:cNvSpPr/>
+          <p:nvPr/>
+        </p:nvSpPr>
+        <p:spPr>
+          <a:xfrm>
+            <a:off x="406301" y="457051"/>
+            <a:ext cx="8498026" cy="274290"/>
+          </a:xfrm>
+          <a:prstGeom prst="rect">
+            <a:avLst/>
+          </a:prstGeom>
+          <a:noFill/>
+          <a:ln/>
+        </p:spPr>
+        <p:txBody>
+          <a:bodyPr wrap="square" lIns="0" tIns="0" rIns="0" bIns="0" rtlCol="0" anchor="t"/>
+          <a:lstStyle/>
+          <a:p>
+            <a:pPr algn="l" indent="0" marL="0">
+              <a:lnSpc>
+                <a:spcPts val="2160"/>
+              </a:lnSpc>
+              <a:spcBef>
+                <a:spcPts val="600"/>
+              </a:spcBef>
+              <a:spcAft>
+                <a:spcPts val="800"/>
+              </a:spcAft>
+              <a:buNone/>
+            </a:pPr>
+            <a:r>
+              <a:rPr lang="en-US" sz="1800" b="1" dirty="0">
+                <a:solidFill>
+                  <a:srgbClr val="FE4447"/>
+                </a:solidFill>
+                <a:latin typeface="Georgia" pitchFamily="34" charset="0"/>
+                <a:ea typeface="Georgia" pitchFamily="34" charset="-122"/>
+                <a:cs typeface="Georgia" pitchFamily="34" charset="-120"/>
+              </a:rPr>
               <a:t>Teacher notes</a:t>
             </a:r>
             <a:endParaRPr lang="en-US" sz="1800" dirty="0"/>
@@ -2199,8 +5520,8 @@
         </p:nvSpPr>
         <p:spPr>
           <a:xfrm>
-            <a:off x="406301" y="870942"/>
-            <a:ext cx="8498026" cy="853083"/>
+            <a:off x="634901" y="883593"/>
+            <a:ext cx="8102798" cy="1386483"/>
           </a:xfrm>
           <a:prstGeom prst="rect">
             <a:avLst/>
@@ -2212,17 +5533,15 @@
           <a:bodyPr wrap="square" lIns="0" tIns="0" rIns="0" bIns="0" rtlCol="0" anchor="t"/>
           <a:lstStyle/>
           <a:p>
-            <a:pPr algn="l" indent="0" marL="0">
-              <a:lnSpc>
-                <a:spcPts val="1680"/>
-              </a:lnSpc>
-              <a:spcBef>
-                <a:spcPts val="300"/>
-              </a:spcBef>
-              <a:spcAft>
-                <a:spcPts val="300"/>
-              </a:spcAft>
-              <a:buNone/>
+            <a:pPr algn="l" marL="342900" indent="-342900">
+              <a:lnSpc>
+                <a:spcPts val="1620"/>
+              </a:lnSpc>
+              <a:spcAft>
+                <a:spcPts val="300"/>
+              </a:spcAft>
+              <a:buSzPct val="100000"/>
+              <a:buChar char="•"/>
             </a:pPr>
             <a:r>
               <a:rPr lang="en-US" sz="1200" dirty="0">
@@ -2233,15 +5552,12 @@
                 <a:ea typeface="Arial" pitchFamily="34" charset="-122"/>
                 <a:cs typeface="Arial" pitchFamily="34" charset="-120"/>
               </a:rPr>
-              <a:t>– Some students will know the Sun-rises-in-the-east rule and stop there. Push: </a:t>
-            </a:r>
-            <a:pPr algn="l" indent="0" marL="0">
-              <a:lnSpc>
-                <a:spcPts val="1680"/>
-              </a:lnSpc>
-              <a:spcBef>
-                <a:spcPts val="300"/>
-              </a:spcBef>
+              <a:t>Some students will know the Sun-rises-in-the-east rule and stop there. Push: </a:t>
+            </a:r>
+            <a:pPr algn="l" indent="0" marL="0">
+              <a:lnSpc>
+                <a:spcPts val="1620"/>
+              </a:lnSpc>
               <a:spcAft>
                 <a:spcPts val="300"/>
               </a:spcAft>
@@ -2260,11 +5576,8 @@
             </a:r>
             <a:pPr algn="l" indent="0" marL="0">
               <a:lnSpc>
-                <a:spcPts val="1680"/>
-              </a:lnSpc>
-              <a:spcBef>
-                <a:spcPts val="300"/>
-              </a:spcBef>
+                <a:spcPts val="1620"/>
+              </a:lnSpc>
               <a:spcAft>
                 <a:spcPts val="300"/>
               </a:spcAft>
@@ -2279,15 +5592,36 @@
                 <a:ea typeface="Arial" pitchFamily="34" charset="-122"/>
                 <a:cs typeface="Arial" pitchFamily="34" charset="-120"/>
               </a:rPr>
-              <a:t> The "ish" is the entire module. – Don't introduce axial tilt yet. That's Day 2. Let students sit with the </a:t>
-            </a:r>
-            <a:pPr algn="l" indent="0" marL="0">
-              <a:lnSpc>
-                <a:spcPts val="1680"/>
-              </a:lnSpc>
-              <a:spcBef>
-                <a:spcPts val="300"/>
-              </a:spcBef>
+              <a:t> The "ish" is the entire module.</a:t>
+            </a:r>
+            <a:endParaRPr lang="en-US" sz="1200" dirty="0"/>
+          </a:p>
+          <a:p>
+            <a:pPr algn="l" marL="342900" indent="-342900">
+              <a:lnSpc>
+                <a:spcPts val="1620"/>
+              </a:lnSpc>
+              <a:spcAft>
+                <a:spcPts val="300"/>
+              </a:spcAft>
+              <a:buSzPct val="100000"/>
+              <a:buChar char="•"/>
+            </a:pPr>
+            <a:r>
+              <a:rPr lang="en-US" sz="1200" dirty="0">
+                <a:solidFill>
+                  <a:srgbClr val="1C2833"/>
+                </a:solidFill>
+                <a:latin typeface="Arial" pitchFamily="34" charset="0"/>
+                <a:ea typeface="Arial" pitchFamily="34" charset="-122"/>
+                <a:cs typeface="Arial" pitchFamily="34" charset="-120"/>
+              </a:rPr>
+              <a:t>Don't introduce axial tilt yet. That's Day 2. Let students sit with the </a:t>
+            </a:r>
+            <a:pPr algn="l" indent="0" marL="0">
+              <a:lnSpc>
+                <a:spcPts val="1620"/>
+              </a:lnSpc>
               <a:spcAft>
                 <a:spcPts val="300"/>
               </a:spcAft>
@@ -2306,11 +5640,8 @@
             </a:r>
             <a:pPr algn="l" indent="0" marL="0">
               <a:lnSpc>
-                <a:spcPts val="1680"/>
-              </a:lnSpc>
-              <a:spcBef>
-                <a:spcPts val="300"/>
-              </a:spcBef>
+                <a:spcPts val="1620"/>
+              </a:lnSpc>
               <a:spcAft>
                 <a:spcPts val="300"/>
               </a:spcAft>
@@ -2329,11 +5660,8 @@
             </a:r>
             <a:pPr algn="l" indent="0" marL="0">
               <a:lnSpc>
-                <a:spcPts val="1680"/>
-              </a:lnSpc>
-              <a:spcBef>
-                <a:spcPts val="300"/>
-              </a:spcBef>
+                <a:spcPts val="1620"/>
+              </a:lnSpc>
               <a:spcAft>
                 <a:spcPts val="300"/>
               </a:spcAft>
@@ -2352,11 +5680,8 @@
             </a:r>
             <a:pPr algn="l" indent="0" marL="0">
               <a:lnSpc>
-                <a:spcPts val="1680"/>
-              </a:lnSpc>
-              <a:spcBef>
-                <a:spcPts val="300"/>
-              </a:spcBef>
+                <a:spcPts val="1620"/>
+              </a:lnSpc>
               <a:spcAft>
                 <a:spcPts val="300"/>
               </a:spcAft>
@@ -2371,7 +5696,31 @@
                 <a:ea typeface="Arial" pitchFamily="34" charset="-122"/>
                 <a:cs typeface="Arial" pitchFamily="34" charset="-120"/>
               </a:rPr>
-              <a:t>. – The shadow activity is more valuable than the explanation. If you only have 30 minutes, run the activity and trim the Core.</a:t>
+              <a:t>.</a:t>
+            </a:r>
+            <a:endParaRPr lang="en-US" sz="1200" dirty="0"/>
+          </a:p>
+          <a:p>
+            <a:pPr algn="l" marL="342900" indent="-342900">
+              <a:lnSpc>
+                <a:spcPts val="1620"/>
+              </a:lnSpc>
+              <a:spcAft>
+                <a:spcPts val="300"/>
+              </a:spcAft>
+              <a:buSzPct val="100000"/>
+              <a:buChar char="•"/>
+            </a:pPr>
+            <a:r>
+              <a:rPr lang="en-US" sz="1200" dirty="0">
+                <a:solidFill>
+                  <a:srgbClr val="1C2833"/>
+                </a:solidFill>
+                <a:latin typeface="Arial" pitchFamily="34" charset="0"/>
+                <a:ea typeface="Arial" pitchFamily="34" charset="-122"/>
+                <a:cs typeface="Arial" pitchFamily="34" charset="-120"/>
+              </a:rPr>
+              <a:t>The shadow activity is more valuable than the explanation. If you only have 30 minutes, run the activity and trim the Core.</a:t>
             </a:r>
             <a:endParaRPr lang="en-US" sz="1200" dirty="0"/>
           </a:p>
@@ -2529,7 +5878,7 @@
                 <a:ea typeface="Georgia" pitchFamily="34" charset="-122"/>
                 <a:cs typeface="Georgia" pitchFamily="34" charset="-120"/>
               </a:rPr>
-              <a:t>Materials</a:t>
+              <a:t>Learning objective</a:t>
             </a:r>
             <a:endParaRPr lang="en-US" sz="1800" dirty="0"/>
           </a:p>
@@ -2544,7 +5893,7 @@
         <p:spPr>
           <a:xfrm>
             <a:off x="406301" y="870942"/>
-            <a:ext cx="8498026" cy="639812"/>
+            <a:ext cx="8498026" cy="426541"/>
           </a:xfrm>
           <a:prstGeom prst="rect">
             <a:avLst/>
@@ -2577,7 +5926,30 @@
                 <a:ea typeface="Arial" pitchFamily="34" charset="-122"/>
                 <a:cs typeface="Arial" pitchFamily="34" charset="-120"/>
               </a:rPr>
-              <a:t>– Whiteboard – A 30 cm wooden dowel or pencil + a piece of cardboard / paper to plant it on (the gnomon) – A compass (or a phone with a compass app) – A printout of a year-calendar (Jan to Dec, all dates visible) — one per pair – Optional: a photo of the room taken at the same time on different days (a teacher prep item)</a:t>
+              <a:t>By the end of this lesson, students will describe the Sun's daily and annual apparent motion and articulate the question: </a:t>
+            </a:r>
+            <a:pPr algn="l" indent="0" marL="0">
+              <a:lnSpc>
+                <a:spcPts val="1680"/>
+              </a:lnSpc>
+              <a:spcBef>
+                <a:spcPts val="300"/>
+              </a:spcBef>
+              <a:spcAft>
+                <a:spcPts val="300"/>
+              </a:spcAft>
+              <a:buNone/>
+            </a:pPr>
+            <a:r>
+              <a:rPr lang="en-US" sz="1200" i="1" dirty="0">
+                <a:solidFill>
+                  <a:srgbClr val="1C2833"/>
+                </a:solidFill>
+                <a:latin typeface="Arial" pitchFamily="34" charset="0"/>
+                <a:ea typeface="Arial" pitchFamily="34" charset="-122"/>
+                <a:cs typeface="Arial" pitchFamily="34" charset="-120"/>
+              </a:rPr>
+              <a:t>does the Sun rise from exactly the same spot every day?</a:t>
             </a:r>
             <a:endParaRPr lang="en-US" sz="1200" dirty="0"/>
           </a:p>
@@ -2735,7 +6107,7 @@
                 <a:ea typeface="Georgia" pitchFamily="34" charset="-122"/>
                 <a:cs typeface="Georgia" pitchFamily="34" charset="-120"/>
               </a:rPr>
-              <a:t>Vocabulary introduced today</a:t>
+              <a:t>Materials</a:t>
             </a:r>
             <a:endParaRPr lang="en-US" sz="1800" dirty="0"/>
           </a:p>
@@ -2750,7 +6122,7 @@
         <p:spPr>
           <a:xfrm>
             <a:off x="634901" y="883593"/>
-            <a:ext cx="8102798" cy="937022"/>
+            <a:ext cx="8102798" cy="1257002"/>
           </a:xfrm>
           <a:prstGeom prst="rect">
             <a:avLst/>
@@ -2773,26 +6145,6 @@
               <a:buChar char="•"/>
             </a:pPr>
             <a:r>
-              <a:rPr lang="en-US" sz="1200" i="1" dirty="0">
-                <a:solidFill>
-                  <a:srgbClr val="1C2833"/>
-                </a:solidFill>
-                <a:latin typeface="Arial" pitchFamily="34" charset="0"/>
-                <a:ea typeface="Arial" pitchFamily="34" charset="-122"/>
-                <a:cs typeface="Arial" pitchFamily="34" charset="-120"/>
-              </a:rPr>
-              <a:t>Sūrya</a:t>
-            </a:r>
-            <a:pPr algn="l" indent="0" marL="0">
-              <a:lnSpc>
-                <a:spcPts val="1620"/>
-              </a:lnSpc>
-              <a:spcAft>
-                <a:spcPts val="300"/>
-              </a:spcAft>
-              <a:buNone/>
-            </a:pPr>
-            <a:r>
               <a:rPr lang="en-US" sz="1200" dirty="0">
                 <a:solidFill>
                   <a:srgbClr val="1C2833"/>
@@ -2801,47 +6153,7 @@
                 <a:ea typeface="Arial" pitchFamily="34" charset="-122"/>
                 <a:cs typeface="Arial" pitchFamily="34" charset="-120"/>
               </a:rPr>
-              <a:t> (IAST: </a:t>
-            </a:r>
-            <a:pPr algn="l" indent="0" marL="0">
-              <a:lnSpc>
-                <a:spcPts val="1620"/>
-              </a:lnSpc>
-              <a:spcAft>
-                <a:spcPts val="300"/>
-              </a:spcAft>
-              <a:buNone/>
-            </a:pPr>
-            <a:r>
-              <a:rPr lang="en-US" sz="1200" i="1" dirty="0">
-                <a:solidFill>
-                  <a:srgbClr val="1C2833"/>
-                </a:solidFill>
-                <a:latin typeface="Arial" pitchFamily="34" charset="0"/>
-                <a:ea typeface="Arial" pitchFamily="34" charset="-122"/>
-                <a:cs typeface="Arial" pitchFamily="34" charset="-120"/>
-              </a:rPr>
-              <a:t>sūrya</a:t>
-            </a:r>
-            <a:pPr algn="l" indent="0" marL="0">
-              <a:lnSpc>
-                <a:spcPts val="1620"/>
-              </a:lnSpc>
-              <a:spcAft>
-                <a:spcPts val="300"/>
-              </a:spcAft>
-              <a:buNone/>
-            </a:pPr>
-            <a:r>
-              <a:rPr lang="en-US" sz="1200" dirty="0">
-                <a:solidFill>
-                  <a:srgbClr val="1C2833"/>
-                </a:solidFill>
-                <a:latin typeface="Arial" pitchFamily="34" charset="0"/>
-                <a:ea typeface="Arial" pitchFamily="34" charset="-122"/>
-                <a:cs typeface="Arial" pitchFamily="34" charset="-120"/>
-              </a:rPr>
-              <a:t>; lit. "the Sun") — the luminary at the centre of our solar system; the object we will track for the next 10 days.</a:t>
+              <a:t>Whiteboard</a:t>
             </a:r>
             <a:endParaRPr lang="en-US" sz="1200" dirty="0"/>
           </a:p>
@@ -2857,24 +6169,28 @@
               <a:buChar char="•"/>
             </a:pPr>
             <a:r>
-              <a:rPr lang="en-US" sz="1200" i="1" dirty="0">
-                <a:solidFill>
-                  <a:srgbClr val="1C2833"/>
-                </a:solidFill>
-                <a:latin typeface="Arial" pitchFamily="34" charset="0"/>
-                <a:ea typeface="Arial" pitchFamily="34" charset="-122"/>
-                <a:cs typeface="Arial" pitchFamily="34" charset="-120"/>
-              </a:rPr>
-              <a:t>krānti-vṛtta</a:t>
-            </a:r>
-            <a:pPr algn="l" indent="0" marL="0">
+              <a:rPr lang="en-US" sz="1200" dirty="0">
+                <a:solidFill>
+                  <a:srgbClr val="1C2833"/>
+                </a:solidFill>
+                <a:latin typeface="Arial" pitchFamily="34" charset="0"/>
+                <a:ea typeface="Arial" pitchFamily="34" charset="-122"/>
+                <a:cs typeface="Arial" pitchFamily="34" charset="-120"/>
+              </a:rPr>
+              <a:t>A 30 cm wooden dowel or pencil + a piece of cardboard / paper to plant it on (the gnomon)</a:t>
+            </a:r>
+            <a:endParaRPr lang="en-US" sz="1200" dirty="0"/>
+          </a:p>
+          <a:p>
+            <a:pPr algn="l" marL="342900" indent="-342900">
               <a:lnSpc>
                 <a:spcPts val="1620"/>
               </a:lnSpc>
               <a:spcAft>
                 <a:spcPts val="300"/>
               </a:spcAft>
-              <a:buNone/>
+              <a:buSzPct val="100000"/>
+              <a:buChar char="•"/>
             </a:pPr>
             <a:r>
               <a:rPr lang="en-US" sz="1200" dirty="0">
@@ -2885,36 +6201,44 @@
                 <a:ea typeface="Arial" pitchFamily="34" charset="-122"/>
                 <a:cs typeface="Arial" pitchFamily="34" charset="-120"/>
               </a:rPr>
-              <a:t> (IAST: </a:t>
-            </a:r>
-            <a:pPr algn="l" indent="0" marL="0">
+              <a:t>A compass (or a phone with a compass app)</a:t>
+            </a:r>
+            <a:endParaRPr lang="en-US" sz="1200" dirty="0"/>
+          </a:p>
+          <a:p>
+            <a:pPr algn="l" marL="342900" indent="-342900">
               <a:lnSpc>
                 <a:spcPts val="1620"/>
               </a:lnSpc>
               <a:spcAft>
                 <a:spcPts val="300"/>
               </a:spcAft>
-              <a:buNone/>
-            </a:pPr>
-            <a:r>
-              <a:rPr lang="en-US" sz="1200" i="1" dirty="0">
-                <a:solidFill>
-                  <a:srgbClr val="1C2833"/>
-                </a:solidFill>
-                <a:latin typeface="Arial" pitchFamily="34" charset="0"/>
-                <a:ea typeface="Arial" pitchFamily="34" charset="-122"/>
-                <a:cs typeface="Arial" pitchFamily="34" charset="-120"/>
-              </a:rPr>
-              <a:t>krānti-vṛtta</a:t>
-            </a:r>
-            <a:pPr algn="l" indent="0" marL="0">
+              <a:buSzPct val="100000"/>
+              <a:buChar char="•"/>
+            </a:pPr>
+            <a:r>
+              <a:rPr lang="en-US" sz="1200" dirty="0">
+                <a:solidFill>
+                  <a:srgbClr val="1C2833"/>
+                </a:solidFill>
+                <a:latin typeface="Arial" pitchFamily="34" charset="0"/>
+                <a:ea typeface="Arial" pitchFamily="34" charset="-122"/>
+                <a:cs typeface="Arial" pitchFamily="34" charset="-120"/>
+              </a:rPr>
+              <a:t>A printout of a year-calendar (Jan to Dec, all dates visible) — one per pair</a:t>
+            </a:r>
+            <a:endParaRPr lang="en-US" sz="1200" dirty="0"/>
+          </a:p>
+          <a:p>
+            <a:pPr algn="l" marL="342900" indent="-342900">
               <a:lnSpc>
                 <a:spcPts val="1620"/>
               </a:lnSpc>
               <a:spcAft>
                 <a:spcPts val="300"/>
               </a:spcAft>
-              <a:buNone/>
+              <a:buSzPct val="100000"/>
+              <a:buChar char="•"/>
             </a:pPr>
             <a:r>
               <a:rPr lang="en-US" sz="1200" dirty="0">
@@ -2925,47 +6249,7 @@
                 <a:ea typeface="Arial" pitchFamily="34" charset="-122"/>
                 <a:cs typeface="Arial" pitchFamily="34" charset="-120"/>
               </a:rPr>
-              <a:t>; lit. "deflection-circle") — the </a:t>
-            </a:r>
-            <a:pPr algn="l" indent="0" marL="0">
-              <a:lnSpc>
-                <a:spcPts val="1620"/>
-              </a:lnSpc>
-              <a:spcAft>
-                <a:spcPts val="300"/>
-              </a:spcAft>
-              <a:buNone/>
-            </a:pPr>
-            <a:r>
-              <a:rPr lang="en-US" sz="1200" b="1" dirty="0">
-                <a:solidFill>
-                  <a:srgbClr val="1C2833"/>
-                </a:solidFill>
-                <a:latin typeface="Arial" pitchFamily="34" charset="0"/>
-                <a:ea typeface="Arial" pitchFamily="34" charset="-122"/>
-                <a:cs typeface="Arial" pitchFamily="34" charset="-120"/>
-              </a:rPr>
-              <a:t>ecliptic</a:t>
-            </a:r>
-            <a:pPr algn="l" indent="0" marL="0">
-              <a:lnSpc>
-                <a:spcPts val="1620"/>
-              </a:lnSpc>
-              <a:spcAft>
-                <a:spcPts val="300"/>
-              </a:spcAft>
-              <a:buNone/>
-            </a:pPr>
-            <a:r>
-              <a:rPr lang="en-US" sz="1200" dirty="0">
-                <a:solidFill>
-                  <a:srgbClr val="1C2833"/>
-                </a:solidFill>
-                <a:latin typeface="Arial" pitchFamily="34" charset="0"/>
-                <a:ea typeface="Arial" pitchFamily="34" charset="-122"/>
-                <a:cs typeface="Arial" pitchFamily="34" charset="-120"/>
-              </a:rPr>
-              <a:t>, the apparent path the Sun traces across the sky over a year.</a:t>
+              <a:t>Optional: a photo of the room taken at the same time on different days (a teacher prep item)</a:t>
             </a:r>
             <a:endParaRPr lang="en-US" sz="1200" dirty="0"/>
           </a:p>
@@ -3123,7 +6407,7 @@
                 <a:ea typeface="Georgia" pitchFamily="34" charset="-122"/>
                 <a:cs typeface="Georgia" pitchFamily="34" charset="-120"/>
               </a:rPr>
-              <a:t>Lesson flow</a:t>
+              <a:t>Vocabulary introduced today</a:t>
             </a:r>
             <a:endParaRPr lang="en-US" sz="1800" dirty="0"/>
           </a:p>
@@ -3132,6 +6416,236 @@
       <p:sp>
         <p:nvSpPr>
           <p:cNvPr id="4" name="Text 2"/>
+          <p:cNvSpPr/>
+          <p:nvPr/>
+        </p:nvSpPr>
+        <p:spPr>
+          <a:xfrm>
+            <a:off x="634901" y="883593"/>
+            <a:ext cx="8102798" cy="937022"/>
+          </a:xfrm>
+          <a:prstGeom prst="rect">
+            <a:avLst/>
+          </a:prstGeom>
+          <a:noFill/>
+          <a:ln/>
+        </p:spPr>
+        <p:txBody>
+          <a:bodyPr wrap="square" lIns="0" tIns="0" rIns="0" bIns="0" rtlCol="0" anchor="t"/>
+          <a:lstStyle/>
+          <a:p>
+            <a:pPr algn="l" marL="342900" indent="-342900">
+              <a:lnSpc>
+                <a:spcPts val="1620"/>
+              </a:lnSpc>
+              <a:spcAft>
+                <a:spcPts val="300"/>
+              </a:spcAft>
+              <a:buSzPct val="100000"/>
+              <a:buChar char="•"/>
+            </a:pPr>
+            <a:r>
+              <a:rPr lang="en-US" sz="1200" i="1" dirty="0">
+                <a:solidFill>
+                  <a:srgbClr val="1C2833"/>
+                </a:solidFill>
+                <a:latin typeface="Arial" pitchFamily="34" charset="0"/>
+                <a:ea typeface="Arial" pitchFamily="34" charset="-122"/>
+                <a:cs typeface="Arial" pitchFamily="34" charset="-120"/>
+              </a:rPr>
+              <a:t>Sūrya</a:t>
+            </a:r>
+            <a:pPr algn="l" indent="0" marL="0">
+              <a:lnSpc>
+                <a:spcPts val="1620"/>
+              </a:lnSpc>
+              <a:spcAft>
+                <a:spcPts val="300"/>
+              </a:spcAft>
+              <a:buNone/>
+            </a:pPr>
+            <a:r>
+              <a:rPr lang="en-US" sz="1200" dirty="0">
+                <a:solidFill>
+                  <a:srgbClr val="1C2833"/>
+                </a:solidFill>
+                <a:latin typeface="Arial" pitchFamily="34" charset="0"/>
+                <a:ea typeface="Arial" pitchFamily="34" charset="-122"/>
+                <a:cs typeface="Arial" pitchFamily="34" charset="-120"/>
+              </a:rPr>
+              <a:t> (IAST: </a:t>
+            </a:r>
+            <a:pPr algn="l" indent="0" marL="0">
+              <a:lnSpc>
+                <a:spcPts val="1620"/>
+              </a:lnSpc>
+              <a:spcAft>
+                <a:spcPts val="300"/>
+              </a:spcAft>
+              <a:buNone/>
+            </a:pPr>
+            <a:r>
+              <a:rPr lang="en-US" sz="1200" i="1" dirty="0">
+                <a:solidFill>
+                  <a:srgbClr val="1C2833"/>
+                </a:solidFill>
+                <a:latin typeface="Arial" pitchFamily="34" charset="0"/>
+                <a:ea typeface="Arial" pitchFamily="34" charset="-122"/>
+                <a:cs typeface="Arial" pitchFamily="34" charset="-120"/>
+              </a:rPr>
+              <a:t>sūrya</a:t>
+            </a:r>
+            <a:pPr algn="l" indent="0" marL="0">
+              <a:lnSpc>
+                <a:spcPts val="1620"/>
+              </a:lnSpc>
+              <a:spcAft>
+                <a:spcPts val="300"/>
+              </a:spcAft>
+              <a:buNone/>
+            </a:pPr>
+            <a:r>
+              <a:rPr lang="en-US" sz="1200" dirty="0">
+                <a:solidFill>
+                  <a:srgbClr val="1C2833"/>
+                </a:solidFill>
+                <a:latin typeface="Arial" pitchFamily="34" charset="0"/>
+                <a:ea typeface="Arial" pitchFamily="34" charset="-122"/>
+                <a:cs typeface="Arial" pitchFamily="34" charset="-120"/>
+              </a:rPr>
+              <a:t>; lit. "the Sun") — the luminary at the centre of our solar system; the object we will track for the next 10 days.</a:t>
+            </a:r>
+            <a:endParaRPr lang="en-US" sz="1200" dirty="0"/>
+          </a:p>
+          <a:p>
+            <a:pPr algn="l" marL="342900" indent="-342900">
+              <a:lnSpc>
+                <a:spcPts val="1620"/>
+              </a:lnSpc>
+              <a:spcAft>
+                <a:spcPts val="300"/>
+              </a:spcAft>
+              <a:buSzPct val="100000"/>
+              <a:buChar char="•"/>
+            </a:pPr>
+            <a:r>
+              <a:rPr lang="en-US" sz="1200" i="1" dirty="0">
+                <a:solidFill>
+                  <a:srgbClr val="1C2833"/>
+                </a:solidFill>
+                <a:latin typeface="Arial" pitchFamily="34" charset="0"/>
+                <a:ea typeface="Arial" pitchFamily="34" charset="-122"/>
+                <a:cs typeface="Arial" pitchFamily="34" charset="-120"/>
+              </a:rPr>
+              <a:t>krānti-vṛtta</a:t>
+            </a:r>
+            <a:pPr algn="l" indent="0" marL="0">
+              <a:lnSpc>
+                <a:spcPts val="1620"/>
+              </a:lnSpc>
+              <a:spcAft>
+                <a:spcPts val="300"/>
+              </a:spcAft>
+              <a:buNone/>
+            </a:pPr>
+            <a:r>
+              <a:rPr lang="en-US" sz="1200" dirty="0">
+                <a:solidFill>
+                  <a:srgbClr val="1C2833"/>
+                </a:solidFill>
+                <a:latin typeface="Arial" pitchFamily="34" charset="0"/>
+                <a:ea typeface="Arial" pitchFamily="34" charset="-122"/>
+                <a:cs typeface="Arial" pitchFamily="34" charset="-120"/>
+              </a:rPr>
+              <a:t> (IAST: </a:t>
+            </a:r>
+            <a:pPr algn="l" indent="0" marL="0">
+              <a:lnSpc>
+                <a:spcPts val="1620"/>
+              </a:lnSpc>
+              <a:spcAft>
+                <a:spcPts val="300"/>
+              </a:spcAft>
+              <a:buNone/>
+            </a:pPr>
+            <a:r>
+              <a:rPr lang="en-US" sz="1200" i="1" dirty="0">
+                <a:solidFill>
+                  <a:srgbClr val="1C2833"/>
+                </a:solidFill>
+                <a:latin typeface="Arial" pitchFamily="34" charset="0"/>
+                <a:ea typeface="Arial" pitchFamily="34" charset="-122"/>
+                <a:cs typeface="Arial" pitchFamily="34" charset="-120"/>
+              </a:rPr>
+              <a:t>krānti-vṛtta</a:t>
+            </a:r>
+            <a:pPr algn="l" indent="0" marL="0">
+              <a:lnSpc>
+                <a:spcPts val="1620"/>
+              </a:lnSpc>
+              <a:spcAft>
+                <a:spcPts val="300"/>
+              </a:spcAft>
+              <a:buNone/>
+            </a:pPr>
+            <a:r>
+              <a:rPr lang="en-US" sz="1200" dirty="0">
+                <a:solidFill>
+                  <a:srgbClr val="1C2833"/>
+                </a:solidFill>
+                <a:latin typeface="Arial" pitchFamily="34" charset="0"/>
+                <a:ea typeface="Arial" pitchFamily="34" charset="-122"/>
+                <a:cs typeface="Arial" pitchFamily="34" charset="-120"/>
+              </a:rPr>
+              <a:t>; lit. "deflection-circle") — the </a:t>
+            </a:r>
+            <a:pPr algn="l" indent="0" marL="0">
+              <a:lnSpc>
+                <a:spcPts val="1620"/>
+              </a:lnSpc>
+              <a:spcAft>
+                <a:spcPts val="300"/>
+              </a:spcAft>
+              <a:buNone/>
+            </a:pPr>
+            <a:r>
+              <a:rPr lang="en-US" sz="1200" b="1" dirty="0">
+                <a:solidFill>
+                  <a:srgbClr val="1C2833"/>
+                </a:solidFill>
+                <a:latin typeface="Arial" pitchFamily="34" charset="0"/>
+                <a:ea typeface="Arial" pitchFamily="34" charset="-122"/>
+                <a:cs typeface="Arial" pitchFamily="34" charset="-120"/>
+              </a:rPr>
+              <a:t>ecliptic</a:t>
+            </a:r>
+            <a:pPr algn="l" indent="0" marL="0">
+              <a:lnSpc>
+                <a:spcPts val="1620"/>
+              </a:lnSpc>
+              <a:spcAft>
+                <a:spcPts val="300"/>
+              </a:spcAft>
+              <a:buNone/>
+            </a:pPr>
+            <a:r>
+              <a:rPr lang="en-US" sz="1200" dirty="0">
+                <a:solidFill>
+                  <a:srgbClr val="1C2833"/>
+                </a:solidFill>
+                <a:latin typeface="Arial" pitchFamily="34" charset="0"/>
+                <a:ea typeface="Arial" pitchFamily="34" charset="-122"/>
+                <a:cs typeface="Arial" pitchFamily="34" charset="-120"/>
+              </a:rPr>
+              <a:t>, the apparent path the Sun traces across the sky over a year.</a:t>
+            </a:r>
+            <a:endParaRPr lang="en-US" sz="1200" dirty="0"/>
+          </a:p>
+        </p:txBody>
+      </p:sp>
+      <p:sp>
+        <p:nvSpPr>
+          <p:cNvPr id="5" name="Text 3"/>
           <p:cNvSpPr/>
           <p:nvPr/>
         </p:nvSpPr>
@@ -3281,7 +6795,7 @@
                 <a:ea typeface="Georgia" pitchFamily="34" charset="-122"/>
                 <a:cs typeface="Georgia" pitchFamily="34" charset="-120"/>
               </a:rPr>
-              <a:t>Warm-up (5 min)</a:t>
+              <a:t>Lesson flow</a:t>
             </a:r>
             <a:endParaRPr lang="en-US" sz="1800" dirty="0"/>
           </a:p>
@@ -3290,123 +6804,6 @@
       <p:sp>
         <p:nvSpPr>
           <p:cNvPr id="4" name="Text 2"/>
-          <p:cNvSpPr/>
-          <p:nvPr/>
-        </p:nvSpPr>
-        <p:spPr>
-          <a:xfrm>
-            <a:off x="406301" y="870942"/>
-            <a:ext cx="8498026" cy="853083"/>
-          </a:xfrm>
-          <a:prstGeom prst="rect">
-            <a:avLst/>
-          </a:prstGeom>
-          <a:noFill/>
-          <a:ln/>
-        </p:spPr>
-        <p:txBody>
-          <a:bodyPr wrap="square" lIns="0" tIns="0" rIns="0" bIns="0" rtlCol="0" anchor="t"/>
-          <a:lstStyle/>
-          <a:p>
-            <a:pPr algn="l" indent="0" marL="0">
-              <a:lnSpc>
-                <a:spcPts val="1680"/>
-              </a:lnSpc>
-              <a:spcBef>
-                <a:spcPts val="300"/>
-              </a:spcBef>
-              <a:spcAft>
-                <a:spcPts val="300"/>
-              </a:spcAft>
-              <a:buNone/>
-            </a:pPr>
-            <a:r>
-              <a:rPr lang="en-US" sz="1200" dirty="0">
-                <a:solidFill>
-                  <a:srgbClr val="1C2833"/>
-                </a:solidFill>
-                <a:latin typeface="Arial" pitchFamily="34" charset="0"/>
-                <a:ea typeface="Arial" pitchFamily="34" charset="-122"/>
-                <a:cs typeface="Arial" pitchFamily="34" charset="-120"/>
-              </a:rPr>
-              <a:t>– Prompt on board: </a:t>
-            </a:r>
-            <a:pPr algn="l" indent="0" marL="0">
-              <a:lnSpc>
-                <a:spcPts val="1680"/>
-              </a:lnSpc>
-              <a:spcBef>
-                <a:spcPts val="300"/>
-              </a:spcBef>
-              <a:spcAft>
-                <a:spcPts val="300"/>
-              </a:spcAft>
-              <a:buNone/>
-            </a:pPr>
-            <a:r>
-              <a:rPr lang="en-US" sz="1200" i="1" dirty="0">
-                <a:solidFill>
-                  <a:srgbClr val="1C2833"/>
-                </a:solidFill>
-                <a:latin typeface="Arial" pitchFamily="34" charset="0"/>
-                <a:ea typeface="Arial" pitchFamily="34" charset="-122"/>
-                <a:cs typeface="Arial" pitchFamily="34" charset="-120"/>
-              </a:rPr>
-              <a:t>"Where was the Sun this morning when you left home?"</a:t>
-            </a:r>
-            <a:pPr algn="l" indent="0" marL="0">
-              <a:lnSpc>
-                <a:spcPts val="1680"/>
-              </a:lnSpc>
-              <a:spcBef>
-                <a:spcPts val="300"/>
-              </a:spcBef>
-              <a:spcAft>
-                <a:spcPts val="300"/>
-              </a:spcAft>
-              <a:buNone/>
-            </a:pPr>
-            <a:r>
-              <a:rPr lang="en-US" sz="1200" dirty="0">
-                <a:solidFill>
-                  <a:srgbClr val="1C2833"/>
-                </a:solidFill>
-                <a:latin typeface="Arial" pitchFamily="34" charset="0"/>
-                <a:ea typeface="Arial" pitchFamily="34" charset="-122"/>
-                <a:cs typeface="Arial" pitchFamily="34" charset="-120"/>
-              </a:rPr>
-              <a:t> – Take 3–4 responses. Most will say "east" or "in front of me / behind me." Some will say "I didn't notice." That's the honest answer — and the launching point. – Teacher: </a:t>
-            </a:r>
-            <a:pPr algn="l" indent="0" marL="0">
-              <a:lnSpc>
-                <a:spcPts val="1680"/>
-              </a:lnSpc>
-              <a:spcBef>
-                <a:spcPts val="300"/>
-              </a:spcBef>
-              <a:spcAft>
-                <a:spcPts val="300"/>
-              </a:spcAft>
-              <a:buNone/>
-            </a:pPr>
-            <a:r>
-              <a:rPr lang="en-US" sz="1200" i="1" dirty="0">
-                <a:solidFill>
-                  <a:srgbClr val="1C2833"/>
-                </a:solidFill>
-                <a:latin typeface="Arial" pitchFamily="34" charset="0"/>
-                <a:ea typeface="Arial" pitchFamily="34" charset="-122"/>
-                <a:cs typeface="Arial" pitchFamily="34" charset="-120"/>
-              </a:rPr>
-              <a:t>"Today we're going to start noticing. For two weeks we'll track the Sun. The Indian astronomical tradition has been doing exactly this for 2000+ years."</a:t>
-            </a:r>
-            <a:endParaRPr lang="en-US" sz="1200" dirty="0"/>
-          </a:p>
-        </p:txBody>
-      </p:sp>
-      <p:sp>
-        <p:nvSpPr>
-          <p:cNvPr id="5" name="Text 3"/>
           <p:cNvSpPr/>
           <p:nvPr/>
         </p:nvSpPr>
@@ -3556,7 +6953,7 @@
                 <a:ea typeface="Georgia" pitchFamily="34" charset="-122"/>
                 <a:cs typeface="Georgia" pitchFamily="34" charset="-120"/>
               </a:rPr>
-              <a:t>Activity (15 min) — Shadow-stick observation</a:t>
+              <a:t>Warm-up (5 min)</a:t>
             </a:r>
             <a:endParaRPr lang="en-US" sz="1800" dirty="0"/>
           </a:p>
@@ -3570,8 +6967,8 @@
         </p:nvSpPr>
         <p:spPr>
           <a:xfrm>
-            <a:off x="406301" y="870942"/>
-            <a:ext cx="8498026" cy="213271"/>
+            <a:off x="634901" y="883593"/>
+            <a:ext cx="8102798" cy="1180802"/>
           </a:xfrm>
           <a:prstGeom prst="rect">
             <a:avLst/>
@@ -3583,17 +6980,15 @@
           <a:bodyPr wrap="square" lIns="0" tIns="0" rIns="0" bIns="0" rtlCol="0" anchor="t"/>
           <a:lstStyle/>
           <a:p>
-            <a:pPr algn="l" indent="0" marL="0">
-              <a:lnSpc>
-                <a:spcPts val="1680"/>
-              </a:lnSpc>
-              <a:spcBef>
-                <a:spcPts val="300"/>
-              </a:spcBef>
-              <a:spcAft>
-                <a:spcPts val="300"/>
-              </a:spcAft>
-              <a:buNone/>
+            <a:pPr algn="l" marL="342900" indent="-342900">
+              <a:lnSpc>
+                <a:spcPts val="1620"/>
+              </a:lnSpc>
+              <a:spcAft>
+                <a:spcPts val="300"/>
+              </a:spcAft>
+              <a:buSzPct val="100000"/>
+              <a:buChar char="•"/>
             </a:pPr>
             <a:r>
               <a:rPr lang="en-US" sz="1200" dirty="0">
@@ -3604,251 +6999,103 @@
                 <a:ea typeface="Arial" pitchFamily="34" charset="-122"/>
                 <a:cs typeface="Arial" pitchFamily="34" charset="-120"/>
               </a:rPr>
-              <a:t>If the weather permits and the schoolyard has a sunny spot:</a:t>
+              <a:t>Prompt on board: </a:t>
+            </a:r>
+            <a:pPr algn="l" indent="0" marL="0">
+              <a:lnSpc>
+                <a:spcPts val="1620"/>
+              </a:lnSpc>
+              <a:spcAft>
+                <a:spcPts val="300"/>
+              </a:spcAft>
+              <a:buNone/>
+            </a:pPr>
+            <a:r>
+              <a:rPr lang="en-US" sz="1200" i="1" dirty="0">
+                <a:solidFill>
+                  <a:srgbClr val="1C2833"/>
+                </a:solidFill>
+                <a:latin typeface="Arial" pitchFamily="34" charset="0"/>
+                <a:ea typeface="Arial" pitchFamily="34" charset="-122"/>
+                <a:cs typeface="Arial" pitchFamily="34" charset="-120"/>
+              </a:rPr>
+              <a:t>"Where was the Sun this morning when you left home?"</a:t>
             </a:r>
             <a:endParaRPr lang="en-US" sz="1200" dirty="0"/>
           </a:p>
+          <a:p>
+            <a:pPr algn="l" marL="342900" indent="-342900">
+              <a:lnSpc>
+                <a:spcPts val="1620"/>
+              </a:lnSpc>
+              <a:spcAft>
+                <a:spcPts val="300"/>
+              </a:spcAft>
+              <a:buSzPct val="100000"/>
+              <a:buChar char="•"/>
+            </a:pPr>
+            <a:r>
+              <a:rPr lang="en-US" sz="1200" dirty="0">
+                <a:solidFill>
+                  <a:srgbClr val="1C2833"/>
+                </a:solidFill>
+                <a:latin typeface="Arial" pitchFamily="34" charset="0"/>
+                <a:ea typeface="Arial" pitchFamily="34" charset="-122"/>
+                <a:cs typeface="Arial" pitchFamily="34" charset="-120"/>
+              </a:rPr>
+              <a:t>Take 3–4 responses. Most will say "east" or "in front of me / behind me." Some will say "I didn't notice." That's the honest answer — and the launching point.</a:t>
+            </a:r>
+            <a:endParaRPr lang="en-US" sz="1200" dirty="0"/>
+          </a:p>
+          <a:p>
+            <a:pPr algn="l" marL="342900" indent="-342900">
+              <a:lnSpc>
+                <a:spcPts val="1620"/>
+              </a:lnSpc>
+              <a:spcAft>
+                <a:spcPts val="300"/>
+              </a:spcAft>
+              <a:buSzPct val="100000"/>
+              <a:buChar char="•"/>
+            </a:pPr>
+            <a:r>
+              <a:rPr lang="en-US" sz="1200" dirty="0">
+                <a:solidFill>
+                  <a:srgbClr val="1C2833"/>
+                </a:solidFill>
+                <a:latin typeface="Arial" pitchFamily="34" charset="0"/>
+                <a:ea typeface="Arial" pitchFamily="34" charset="-122"/>
+                <a:cs typeface="Arial" pitchFamily="34" charset="-120"/>
+              </a:rPr>
+              <a:t>Teacher: </a:t>
+            </a:r>
+            <a:pPr algn="l" indent="0" marL="0">
+              <a:lnSpc>
+                <a:spcPts val="1620"/>
+              </a:lnSpc>
+              <a:spcAft>
+                <a:spcPts val="300"/>
+              </a:spcAft>
+              <a:buNone/>
+            </a:pPr>
+            <a:r>
+              <a:rPr lang="en-US" sz="1200" i="1" dirty="0">
+                <a:solidFill>
+                  <a:srgbClr val="1C2833"/>
+                </a:solidFill>
+                <a:latin typeface="Arial" pitchFamily="34" charset="0"/>
+                <a:ea typeface="Arial" pitchFamily="34" charset="-122"/>
+                <a:cs typeface="Arial" pitchFamily="34" charset="-120"/>
+              </a:rPr>
+              <a:t>"Today we're going to start noticing. For two weeks we'll track the Sun. The Indian astronomical tradition has been doing exactly this for 2000+ years."</a:t>
+            </a:r>
+            <a:endParaRPr lang="en-US" sz="1200" dirty="0"/>
+          </a:p>
         </p:txBody>
       </p:sp>
       <p:sp>
         <p:nvSpPr>
           <p:cNvPr id="5" name="Text 3"/>
-          <p:cNvSpPr/>
-          <p:nvPr/>
-        </p:nvSpPr>
-        <p:spPr>
-          <a:xfrm>
-            <a:off x="406301" y="1160413"/>
-            <a:ext cx="8498026" cy="1066354"/>
-          </a:xfrm>
-          <a:prstGeom prst="rect">
-            <a:avLst/>
-          </a:prstGeom>
-          <a:noFill/>
-          <a:ln/>
-        </p:spPr>
-        <p:txBody>
-          <a:bodyPr wrap="square" lIns="0" tIns="0" rIns="0" bIns="0" rtlCol="0" anchor="t"/>
-          <a:lstStyle/>
-          <a:p>
-            <a:pPr algn="l" indent="0" marL="0">
-              <a:lnSpc>
-                <a:spcPts val="1680"/>
-              </a:lnSpc>
-              <a:spcBef>
-                <a:spcPts val="300"/>
-              </a:spcBef>
-              <a:spcAft>
-                <a:spcPts val="300"/>
-              </a:spcAft>
-              <a:buNone/>
-            </a:pPr>
-            <a:r>
-              <a:rPr lang="en-US" sz="1200" dirty="0">
-                <a:solidFill>
-                  <a:srgbClr val="1C2833"/>
-                </a:solidFill>
-                <a:latin typeface="Arial" pitchFamily="34" charset="0"/>
-                <a:ea typeface="Arial" pitchFamily="34" charset="-122"/>
-                <a:cs typeface="Arial" pitchFamily="34" charset="-120"/>
-              </a:rPr>
-              <a:t>– Plant the gnomon (the dowel) upright in a piece of cardboard. Mark north on the cardboard using the compass. – At a known time (say, the start of the lesson), trace the shadow of the gnomon onto the cardboard. Write the time and the date next to the line. – Return to the same gnomon in 10 minutes. The shadow has moved. Trace the new line. – Discuss: </a:t>
-            </a:r>
-            <a:pPr algn="l" indent="0" marL="0">
-              <a:lnSpc>
-                <a:spcPts val="1680"/>
-              </a:lnSpc>
-              <a:spcBef>
-                <a:spcPts val="300"/>
-              </a:spcBef>
-              <a:spcAft>
-                <a:spcPts val="300"/>
-              </a:spcAft>
-              <a:buNone/>
-            </a:pPr>
-            <a:r>
-              <a:rPr lang="en-US" sz="1200" i="1" dirty="0">
-                <a:solidFill>
-                  <a:srgbClr val="1C2833"/>
-                </a:solidFill>
-                <a:latin typeface="Arial" pitchFamily="34" charset="0"/>
-                <a:ea typeface="Arial" pitchFamily="34" charset="-122"/>
-                <a:cs typeface="Arial" pitchFamily="34" charset="-120"/>
-              </a:rPr>
-              <a:t>"The Sun seemed to stand still while you were in class — but the shadow moved. What does that tell you about how the Sun moved?"</a:t>
-            </a:r>
-            <a:endParaRPr lang="en-US" sz="1200" dirty="0"/>
-          </a:p>
-        </p:txBody>
-      </p:sp>
-      <p:sp>
-        <p:nvSpPr>
-          <p:cNvPr id="6" name="Text 4"/>
-          <p:cNvSpPr/>
-          <p:nvPr/>
-        </p:nvSpPr>
-        <p:spPr>
-          <a:xfrm>
-            <a:off x="406301" y="2302966"/>
-            <a:ext cx="8498026" cy="426541"/>
-          </a:xfrm>
-          <a:prstGeom prst="rect">
-            <a:avLst/>
-          </a:prstGeom>
-          <a:noFill/>
-          <a:ln/>
-        </p:spPr>
-        <p:txBody>
-          <a:bodyPr wrap="square" lIns="0" tIns="0" rIns="0" bIns="0" rtlCol="0" anchor="t"/>
-          <a:lstStyle/>
-          <a:p>
-            <a:pPr algn="l" indent="0" marL="0">
-              <a:lnSpc>
-                <a:spcPts val="1680"/>
-              </a:lnSpc>
-              <a:spcBef>
-                <a:spcPts val="300"/>
-              </a:spcBef>
-              <a:spcAft>
-                <a:spcPts val="300"/>
-              </a:spcAft>
-              <a:buNone/>
-            </a:pPr>
-            <a:r>
-              <a:rPr lang="en-US" sz="1200" dirty="0">
-                <a:solidFill>
-                  <a:srgbClr val="1C2833"/>
-                </a:solidFill>
-                <a:latin typeface="Arial" pitchFamily="34" charset="0"/>
-                <a:ea typeface="Arial" pitchFamily="34" charset="-122"/>
-                <a:cs typeface="Arial" pitchFamily="34" charset="-120"/>
-              </a:rPr>
-              <a:t>If weather doesn't permit: do the activity indoors with a strong torch (acting as the Sun) and a pencil-on-paper gnomon. Move the torch slowly along an arc to mimic the daily motion. Each "minute" of torch travel = ~4 minutes of real Sun travel.</a:t>
-            </a:r>
-            <a:endParaRPr lang="en-US" sz="1200" dirty="0"/>
-          </a:p>
-        </p:txBody>
-      </p:sp>
-      <p:sp>
-        <p:nvSpPr>
-          <p:cNvPr id="7" name="Text 5"/>
-          <p:cNvSpPr/>
-          <p:nvPr/>
-        </p:nvSpPr>
-        <p:spPr>
-          <a:xfrm>
-            <a:off x="406301" y="2805708"/>
-            <a:ext cx="8498026" cy="426541"/>
-          </a:xfrm>
-          <a:prstGeom prst="rect">
-            <a:avLst/>
-          </a:prstGeom>
-          <a:noFill/>
-          <a:ln/>
-        </p:spPr>
-        <p:txBody>
-          <a:bodyPr wrap="square" lIns="0" tIns="0" rIns="0" bIns="0" rtlCol="0" anchor="t"/>
-          <a:lstStyle/>
-          <a:p>
-            <a:pPr algn="l" indent="0" marL="0">
-              <a:lnSpc>
-                <a:spcPts val="1680"/>
-              </a:lnSpc>
-              <a:spcBef>
-                <a:spcPts val="300"/>
-              </a:spcBef>
-              <a:spcAft>
-                <a:spcPts val="300"/>
-              </a:spcAft>
-              <a:buNone/>
-            </a:pPr>
-            <a:r>
-              <a:rPr lang="en-US" sz="1200" b="1" dirty="0">
-                <a:solidFill>
-                  <a:srgbClr val="1C2833"/>
-                </a:solidFill>
-                <a:latin typeface="Arial" pitchFamily="34" charset="0"/>
-                <a:ea typeface="Arial" pitchFamily="34" charset="-122"/>
-                <a:cs typeface="Arial" pitchFamily="34" charset="-120"/>
-              </a:rPr>
-              <a:t>Safety reminder:</a:t>
-            </a:r>
-            <a:pPr algn="l" indent="0" marL="0">
-              <a:lnSpc>
-                <a:spcPts val="1680"/>
-              </a:lnSpc>
-              <a:spcBef>
-                <a:spcPts val="300"/>
-              </a:spcBef>
-              <a:spcAft>
-                <a:spcPts val="300"/>
-              </a:spcAft>
-              <a:buNone/>
-            </a:pPr>
-            <a:r>
-              <a:rPr lang="en-US" sz="1200" dirty="0">
-                <a:solidFill>
-                  <a:srgbClr val="1C2833"/>
-                </a:solidFill>
-                <a:latin typeface="Arial" pitchFamily="34" charset="0"/>
-                <a:ea typeface="Arial" pitchFamily="34" charset="-122"/>
-                <a:cs typeface="Arial" pitchFamily="34" charset="-120"/>
-              </a:rPr>
-              <a:t> the students look at the </a:t>
-            </a:r>
-            <a:pPr algn="l" indent="0" marL="0">
-              <a:lnSpc>
-                <a:spcPts val="1680"/>
-              </a:lnSpc>
-              <a:spcBef>
-                <a:spcPts val="300"/>
-              </a:spcBef>
-              <a:spcAft>
-                <a:spcPts val="300"/>
-              </a:spcAft>
-              <a:buNone/>
-            </a:pPr>
-            <a:r>
-              <a:rPr lang="en-US" sz="1200" b="1" dirty="0">
-                <a:solidFill>
-                  <a:srgbClr val="1C2833"/>
-                </a:solidFill>
-                <a:latin typeface="Arial" pitchFamily="34" charset="0"/>
-                <a:ea typeface="Arial" pitchFamily="34" charset="-122"/>
-                <a:cs typeface="Arial" pitchFamily="34" charset="-120"/>
-              </a:rPr>
-              <a:t>shadow</a:t>
-            </a:r>
-            <a:pPr algn="l" indent="0" marL="0">
-              <a:lnSpc>
-                <a:spcPts val="1680"/>
-              </a:lnSpc>
-              <a:spcBef>
-                <a:spcPts val="300"/>
-              </a:spcBef>
-              <a:spcAft>
-                <a:spcPts val="300"/>
-              </a:spcAft>
-              <a:buNone/>
-            </a:pPr>
-            <a:r>
-              <a:rPr lang="en-US" sz="1200" dirty="0">
-                <a:solidFill>
-                  <a:srgbClr val="1C2833"/>
-                </a:solidFill>
-                <a:latin typeface="Arial" pitchFamily="34" charset="0"/>
-                <a:ea typeface="Arial" pitchFamily="34" charset="-122"/>
-                <a:cs typeface="Arial" pitchFamily="34" charset="-120"/>
-              </a:rPr>
-              <a:t>, not the Sun. Anyone caught glancing up at the Sun pays a forfeit (a fun one — like doing the daily prompt next class).</a:t>
-            </a:r>
-            <a:endParaRPr lang="en-US" sz="1200" dirty="0"/>
-          </a:p>
-        </p:txBody>
-      </p:sp>
-      <p:sp>
-        <p:nvSpPr>
-          <p:cNvPr id="8" name="Text 6"/>
           <p:cNvSpPr/>
           <p:nvPr/>
         </p:nvSpPr>
@@ -3998,7 +7245,7 @@
                 <a:ea typeface="Georgia" pitchFamily="34" charset="-122"/>
                 <a:cs typeface="Georgia" pitchFamily="34" charset="-120"/>
               </a:rPr>
-              <a:t>Wrap-up (5 min)</a:t>
+              <a:t>Core (20 min)</a:t>
             </a:r>
             <a:endParaRPr lang="en-US" sz="1800" dirty="0"/>
           </a:p>
@@ -4012,8 +7259,8 @@
         </p:nvSpPr>
         <p:spPr>
           <a:xfrm>
-            <a:off x="406301" y="870942"/>
-            <a:ext cx="8498026" cy="853083"/>
+            <a:off x="634901" y="883593"/>
+            <a:ext cx="8102798" cy="281880"/>
           </a:xfrm>
           <a:prstGeom prst="rect">
             <a:avLst/>
@@ -4025,13 +7272,31 @@
           <a:bodyPr wrap="square" lIns="0" tIns="0" rIns="0" bIns="0" rtlCol="0" anchor="t"/>
           <a:lstStyle/>
           <a:p>
-            <a:pPr algn="l" indent="0" marL="0">
-              <a:lnSpc>
-                <a:spcPts val="1680"/>
-              </a:lnSpc>
-              <a:spcBef>
-                <a:spcPts val="300"/>
-              </a:spcBef>
+            <a:pPr algn="l" marL="342900" indent="-342900">
+              <a:lnSpc>
+                <a:spcPts val="1620"/>
+              </a:lnSpc>
+              <a:spcAft>
+                <a:spcPts val="300"/>
+              </a:spcAft>
+              <a:buSzPct val="100000"/>
+              <a:buChar char="•"/>
+            </a:pPr>
+            <a:r>
+              <a:rPr lang="en-US" sz="1200" b="1" dirty="0">
+                <a:solidFill>
+                  <a:srgbClr val="1C2833"/>
+                </a:solidFill>
+                <a:latin typeface="Arial" pitchFamily="34" charset="0"/>
+                <a:ea typeface="Arial" pitchFamily="34" charset="-122"/>
+                <a:cs typeface="Arial" pitchFamily="34" charset="-120"/>
+              </a:rPr>
+              <a:t>Two motions, one Sun.</a:t>
+            </a:r>
+            <a:pPr algn="l" indent="0" marL="0">
+              <a:lnSpc>
+                <a:spcPts val="1620"/>
+              </a:lnSpc>
               <a:spcAft>
                 <a:spcPts val="300"/>
               </a:spcAft>
@@ -4046,38 +7311,58 @@
                 <a:ea typeface="Arial" pitchFamily="34" charset="-122"/>
                 <a:cs typeface="Arial" pitchFamily="34" charset="-120"/>
               </a:rPr>
-              <a:t>– Exit prompt: </a:t>
-            </a:r>
-            <a:pPr algn="l" indent="0" marL="0">
-              <a:lnSpc>
-                <a:spcPts val="1680"/>
-              </a:lnSpc>
-              <a:spcBef>
-                <a:spcPts val="300"/>
-              </a:spcBef>
-              <a:spcAft>
-                <a:spcPts val="300"/>
-              </a:spcAft>
-              <a:buNone/>
-            </a:pPr>
-            <a:r>
-              <a:rPr lang="en-US" sz="1200" i="1" dirty="0">
-                <a:solidFill>
-                  <a:srgbClr val="1C2833"/>
-                </a:solidFill>
-                <a:latin typeface="Arial" pitchFamily="34" charset="0"/>
-                <a:ea typeface="Arial" pitchFamily="34" charset="-122"/>
-                <a:cs typeface="Arial" pitchFamily="34" charset="-120"/>
-              </a:rPr>
-              <a:t>"In one sentence — how can you tell tomorrow morning whether the Sun has 'moved north' or 'moved south' since today?"</a:t>
-            </a:r>
-            <a:pPr algn="l" indent="0" marL="0">
-              <a:lnSpc>
-                <a:spcPts val="1680"/>
-              </a:lnSpc>
-              <a:spcBef>
-                <a:spcPts val="300"/>
-              </a:spcBef>
+              <a:t> Sketch on the board:</a:t>
+            </a:r>
+            <a:endParaRPr lang="en-US" sz="1200" dirty="0"/>
+          </a:p>
+        </p:txBody>
+      </p:sp>
+      <p:sp>
+        <p:nvSpPr>
+          <p:cNvPr id="5" name="Text 3"/>
+          <p:cNvSpPr/>
+          <p:nvPr/>
+        </p:nvSpPr>
+        <p:spPr>
+          <a:xfrm>
+            <a:off x="634901" y="1266974"/>
+            <a:ext cx="8102798" cy="731341"/>
+          </a:xfrm>
+          <a:prstGeom prst="rect">
+            <a:avLst/>
+          </a:prstGeom>
+          <a:noFill/>
+          <a:ln/>
+        </p:spPr>
+        <p:txBody>
+          <a:bodyPr wrap="square" lIns="0" tIns="0" rIns="0" bIns="0" rtlCol="0" anchor="t"/>
+          <a:lstStyle/>
+          <a:p>
+            <a:pPr algn="l" marL="342900" indent="-342900">
+              <a:lnSpc>
+                <a:spcPts val="1620"/>
+              </a:lnSpc>
+              <a:spcAft>
+                <a:spcPts val="300"/>
+              </a:spcAft>
+              <a:buSzPct val="100000"/>
+              <a:buChar char="•"/>
+            </a:pPr>
+            <a:r>
+              <a:rPr lang="en-US" sz="1200" b="1" dirty="0">
+                <a:solidFill>
+                  <a:srgbClr val="1C2833"/>
+                </a:solidFill>
+                <a:latin typeface="Arial" pitchFamily="34" charset="0"/>
+                <a:ea typeface="Arial" pitchFamily="34" charset="-122"/>
+                <a:cs typeface="Arial" pitchFamily="34" charset="-120"/>
+              </a:rPr>
+              <a:t>Daily motion:</a:t>
+            </a:r>
+            <a:pPr algn="l" indent="0" marL="0">
+              <a:lnSpc>
+                <a:spcPts val="1620"/>
+              </a:lnSpc>
               <a:spcAft>
                 <a:spcPts val="300"/>
               </a:spcAft>
@@ -4092,38 +7377,36 @@
                 <a:ea typeface="Arial" pitchFamily="34" charset="-122"/>
                 <a:cs typeface="Arial" pitchFamily="34" charset="-120"/>
               </a:rPr>
-              <a:t> – Take 2 responses. Acceptable answer: </a:t>
-            </a:r>
-            <a:pPr algn="l" indent="0" marL="0">
-              <a:lnSpc>
-                <a:spcPts val="1680"/>
-              </a:lnSpc>
-              <a:spcBef>
-                <a:spcPts val="300"/>
-              </a:spcBef>
-              <a:spcAft>
-                <a:spcPts val="300"/>
-              </a:spcAft>
-              <a:buNone/>
-            </a:pPr>
-            <a:r>
-              <a:rPr lang="en-US" sz="1200" i="1" dirty="0">
-                <a:solidFill>
-                  <a:srgbClr val="1C2833"/>
-                </a:solidFill>
-                <a:latin typeface="Arial" pitchFamily="34" charset="0"/>
-                <a:ea typeface="Arial" pitchFamily="34" charset="-122"/>
-                <a:cs typeface="Arial" pitchFamily="34" charset="-120"/>
-              </a:rPr>
-              <a:t>"Compare the sunrise spot to a known landmark on the horizon — has the rising point moved closer to north or to south?"</a:t>
-            </a:r>
-            <a:pPr algn="l" indent="0" marL="0">
-              <a:lnSpc>
-                <a:spcPts val="1680"/>
-              </a:lnSpc>
-              <a:spcBef>
-                <a:spcPts val="300"/>
-              </a:spcBef>
+              <a:t> rises east-ish, climbs, sets west-ish. Takes ~24 hours.</a:t>
+            </a:r>
+            <a:endParaRPr lang="en-US" sz="1200" dirty="0"/>
+          </a:p>
+          <a:p>
+            <a:pPr algn="l" marL="342900" indent="-342900">
+              <a:lnSpc>
+                <a:spcPts val="1620"/>
+              </a:lnSpc>
+              <a:spcAft>
+                <a:spcPts val="300"/>
+              </a:spcAft>
+              <a:buSzPct val="100000"/>
+              <a:buChar char="•"/>
+            </a:pPr>
+            <a:r>
+              <a:rPr lang="en-US" sz="1200" b="1" dirty="0">
+                <a:solidFill>
+                  <a:srgbClr val="1C2833"/>
+                </a:solidFill>
+                <a:latin typeface="Arial" pitchFamily="34" charset="0"/>
+                <a:ea typeface="Arial" pitchFamily="34" charset="-122"/>
+                <a:cs typeface="Arial" pitchFamily="34" charset="-120"/>
+              </a:rPr>
+              <a:t>Annual motion:</a:t>
+            </a:r>
+            <a:pPr algn="l" indent="0" marL="0">
+              <a:lnSpc>
+                <a:spcPts val="1620"/>
+              </a:lnSpc>
               <a:spcAft>
                 <a:spcPts val="300"/>
               </a:spcAft>
@@ -4138,30 +7421,7 @@
                 <a:ea typeface="Arial" pitchFamily="34" charset="-122"/>
                 <a:cs typeface="Arial" pitchFamily="34" charset="-120"/>
               </a:rPr>
-              <a:t> – Preview Day 2: </a:t>
-            </a:r>
-            <a:pPr algn="l" indent="0" marL="0">
-              <a:lnSpc>
-                <a:spcPts val="1680"/>
-              </a:lnSpc>
-              <a:spcBef>
-                <a:spcPts val="300"/>
-              </a:spcBef>
-              <a:spcAft>
-                <a:spcPts val="300"/>
-              </a:spcAft>
-              <a:buNone/>
-            </a:pPr>
-            <a:r>
-              <a:rPr lang="en-US" sz="1200" i="1" dirty="0">
-                <a:solidFill>
-                  <a:srgbClr val="1C2833"/>
-                </a:solidFill>
-                <a:latin typeface="Arial" pitchFamily="34" charset="0"/>
-                <a:ea typeface="Arial" pitchFamily="34" charset="-122"/>
-                <a:cs typeface="Arial" pitchFamily="34" charset="-120"/>
-              </a:rPr>
-              <a:t>"Tomorrow — WHY does the Sun's spot shift? Bring a globe if you have a small one at home."</a:t>
+              <a:t> the rising spot shifts north (summer) and south (winter) along the horizon, completing a full cycle in ~365.25 days.</a:t>
             </a:r>
             <a:endParaRPr lang="en-US" sz="1200" dirty="0"/>
           </a:p>
@@ -4169,7 +7429,73 @@
       </p:sp>
       <p:sp>
         <p:nvSpPr>
-          <p:cNvPr id="5" name="Text 3"/>
+          <p:cNvPr id="6" name="Text 4"/>
+          <p:cNvSpPr/>
+          <p:nvPr/>
+        </p:nvSpPr>
+        <p:spPr>
+          <a:xfrm>
+            <a:off x="634901" y="2099816"/>
+            <a:ext cx="8102798" cy="281880"/>
+          </a:xfrm>
+          <a:prstGeom prst="rect">
+            <a:avLst/>
+          </a:prstGeom>
+          <a:noFill/>
+          <a:ln/>
+        </p:spPr>
+        <p:txBody>
+          <a:bodyPr wrap="square" lIns="0" tIns="0" rIns="0" bIns="0" rtlCol="0" anchor="t"/>
+          <a:lstStyle/>
+          <a:p>
+            <a:pPr algn="l" marL="342900" indent="-342900">
+              <a:lnSpc>
+                <a:spcPts val="1620"/>
+              </a:lnSpc>
+              <a:spcAft>
+                <a:spcPts val="300"/>
+              </a:spcAft>
+              <a:buSzPct val="100000"/>
+              <a:buChar char="•"/>
+            </a:pPr>
+            <a:r>
+              <a:rPr lang="en-US" sz="1200" b="1" dirty="0">
+                <a:solidFill>
+                  <a:srgbClr val="1C2833"/>
+                </a:solidFill>
+                <a:latin typeface="Arial" pitchFamily="34" charset="0"/>
+                <a:ea typeface="Arial" pitchFamily="34" charset="-122"/>
+                <a:cs typeface="Arial" pitchFamily="34" charset="-120"/>
+              </a:rPr>
+              <a:t>The Sun's apparent path on the sky.</a:t>
+            </a:r>
+            <a:pPr algn="l" indent="0" marL="0">
+              <a:lnSpc>
+                <a:spcPts val="1620"/>
+              </a:lnSpc>
+              <a:spcAft>
+                <a:spcPts val="300"/>
+              </a:spcAft>
+              <a:buNone/>
+            </a:pPr>
+            <a:r>
+              <a:rPr lang="en-US" sz="1200" dirty="0">
+                <a:solidFill>
+                  <a:srgbClr val="1C2833"/>
+                </a:solidFill>
+                <a:latin typeface="Arial" pitchFamily="34" charset="0"/>
+                <a:ea typeface="Arial" pitchFamily="34" charset="-122"/>
+                <a:cs typeface="Arial" pitchFamily="34" charset="-120"/>
+              </a:rPr>
+              <a:t> Show this:</a:t>
+            </a:r>
+            <a:endParaRPr lang="en-US" sz="1200" dirty="0"/>
+          </a:p>
+        </p:txBody>
+      </p:sp>
+      <p:sp>
+        <p:nvSpPr>
+          <p:cNvPr id="7" name="Text 5"/>
           <p:cNvSpPr/>
           <p:nvPr/>
         </p:nvSpPr>
@@ -4319,7 +7645,7 @@
                 <a:ea typeface="Georgia" pitchFamily="34" charset="-122"/>
                 <a:cs typeface="Georgia" pitchFamily="34" charset="-120"/>
               </a:rPr>
-              <a:t>Homework</a:t>
+              <a:t>Core (20 min) (cont.)</a:t>
             </a:r>
             <a:endParaRPr lang="en-US" sz="1800" dirty="0"/>
           </a:p>
@@ -4333,13 +7659,66 @@
         </p:nvSpPr>
         <p:spPr>
           <a:xfrm>
-            <a:off x="406301" y="870942"/>
-            <a:ext cx="8498026" cy="639812"/>
-          </a:xfrm>
-          <a:prstGeom prst="rect">
+            <a:off x="406301" y="883593"/>
+            <a:ext cx="8331398" cy="2174230"/>
+          </a:xfrm>
+          <a:prstGeom prst="rect">
+            <a:avLst/>
+          </a:prstGeom>
+          <a:solidFill>
+            <a:srgbClr val="F4F8F9"/>
+          </a:solidFill>
+          <a:ln/>
+        </p:spPr>
+        <p:txBody>
+          <a:bodyPr wrap="square" rtlCol="0" anchor="ctr"/>
+          <a:lstStyle/>
+          <a:p>
+            <a:pPr indent="0" marL="0">
+              <a:buNone/>
+            </a:pPr>
+            <a:endParaRPr lang="en-US" dirty="0"/>
+          </a:p>
+        </p:txBody>
+      </p:sp>
+      <p:sp>
+        <p:nvSpPr>
+          <p:cNvPr id="5" name="Shape 3"/>
+          <p:cNvSpPr/>
+          <p:nvPr/>
+        </p:nvSpPr>
+        <p:spPr>
+          <a:xfrm>
+            <a:off x="430113" y="883593"/>
+            <a:ext cx="0" cy="2174230"/>
+          </a:xfrm>
+          <a:prstGeom prst="line">
             <a:avLst/>
           </a:prstGeom>
           <a:noFill/>
+          <a:ln w="47625">
+            <a:solidFill>
+              <a:srgbClr val="277884"/>
+            </a:solidFill>
+            <a:prstDash val="solid"/>
+          </a:ln>
+        </p:spPr>
+      </p:sp>
+      <p:sp>
+        <p:nvSpPr>
+          <p:cNvPr id="6" name="Text 4"/>
+          <p:cNvSpPr/>
+          <p:nvPr/>
+        </p:nvSpPr>
+        <p:spPr>
+          <a:xfrm>
+            <a:off x="631627" y="1010543"/>
+            <a:ext cx="8086939" cy="174575"/>
+          </a:xfrm>
+          <a:prstGeom prst="rect">
+            <a:avLst/>
+          </a:prstGeom>
+          <a:noFill/>
           <a:ln/>
         </p:spPr>
         <p:txBody>
@@ -4348,34 +7727,364 @@
           <a:p>
             <a:pPr algn="l" indent="0" marL="0">
               <a:lnSpc>
-                <a:spcPts val="1680"/>
-              </a:lnSpc>
-              <a:spcBef>
-                <a:spcPts val="300"/>
-              </a:spcBef>
-              <a:spcAft>
-                <a:spcPts val="300"/>
-              </a:spcAft>
-              <a:buNone/>
-            </a:pPr>
-            <a:r>
-              <a:rPr lang="en-US" sz="1200" dirty="0">
-                <a:solidFill>
-                  <a:srgbClr val="1C2833"/>
-                </a:solidFill>
-                <a:latin typeface="Arial" pitchFamily="34" charset="0"/>
-                <a:ea typeface="Arial" pitchFamily="34" charset="-122"/>
-                <a:cs typeface="Arial" pitchFamily="34" charset="-120"/>
-              </a:rPr>
-              <a:t>– For three mornings this week, when you leave home, glance at the eastern horizon. Note where exactly the Sun rises relative to a landmark (a tree, a building, a flagpole). Sketch the spot on a small map — three sketches. – Bring the calendar printout to Day 2.</a:t>
-            </a:r>
-            <a:endParaRPr lang="en-US" sz="1200" dirty="0"/>
-          </a:p>
-        </p:txBody>
-      </p:sp>
-      <p:sp>
-        <p:nvSpPr>
-          <p:cNvPr id="5" name="Text 3"/>
+                <a:spcPts val="1375"/>
+              </a:lnSpc>
+              <a:buNone/>
+            </a:pPr>
+            <a:r>
+              <a:rPr lang="en-US" sz="1100" dirty="0">
+                <a:solidFill>
+                  <a:srgbClr val="1C2833"/>
+                </a:solidFill>
+                <a:latin typeface="Courier New" pitchFamily="34" charset="0"/>
+                <a:ea typeface="Courier New" pitchFamily="34" charset="-122"/>
+                <a:cs typeface="Courier New" pitchFamily="34" charset="-120"/>
+              </a:rPr>
+              <a:t>NORTH</a:t>
+            </a:r>
+            <a:endParaRPr lang="en-US" sz="1100" dirty="0"/>
+          </a:p>
+        </p:txBody>
+      </p:sp>
+      <p:sp>
+        <p:nvSpPr>
+          <p:cNvPr id="7" name="Text 5"/>
+          <p:cNvSpPr/>
+          <p:nvPr/>
+        </p:nvSpPr>
+        <p:spPr>
+          <a:xfrm>
+            <a:off x="631627" y="1185118"/>
+            <a:ext cx="8086939" cy="174575"/>
+          </a:xfrm>
+          <a:prstGeom prst="rect">
+            <a:avLst/>
+          </a:prstGeom>
+          <a:noFill/>
+          <a:ln/>
+        </p:spPr>
+        <p:txBody>
+          <a:bodyPr wrap="square" lIns="0" tIns="0" rIns="0" bIns="0" rtlCol="0" anchor="t"/>
+          <a:lstStyle/>
+          <a:p>
+            <a:pPr algn="l" indent="0" marL="0">
+              <a:lnSpc>
+                <a:spcPts val="1375"/>
+              </a:lnSpc>
+              <a:buNone/>
+            </a:pPr>
+            <a:r>
+              <a:rPr lang="en-US" sz="1100" dirty="0">
+                <a:solidFill>
+                  <a:srgbClr val="1C2833"/>
+                </a:solidFill>
+                <a:latin typeface="Courier New" pitchFamily="34" charset="0"/>
+                <a:ea typeface="Courier New" pitchFamily="34" charset="-122"/>
+                <a:cs typeface="Courier New" pitchFamily="34" charset="-120"/>
+              </a:rPr>
+              <a:t>|</a:t>
+            </a:r>
+            <a:endParaRPr lang="en-US" sz="1100" dirty="0"/>
+          </a:p>
+        </p:txBody>
+      </p:sp>
+      <p:sp>
+        <p:nvSpPr>
+          <p:cNvPr id="8" name="Text 6"/>
+          <p:cNvSpPr/>
+          <p:nvPr/>
+        </p:nvSpPr>
+        <p:spPr>
+          <a:xfrm>
+            <a:off x="631627" y="1359694"/>
+            <a:ext cx="8086939" cy="174575"/>
+          </a:xfrm>
+          <a:prstGeom prst="rect">
+            <a:avLst/>
+          </a:prstGeom>
+          <a:noFill/>
+          <a:ln/>
+        </p:spPr>
+        <p:txBody>
+          <a:bodyPr wrap="square" lIns="0" tIns="0" rIns="0" bIns="0" rtlCol="0" anchor="t"/>
+          <a:lstStyle/>
+          <a:p>
+            <a:pPr algn="l" indent="0" marL="0">
+              <a:lnSpc>
+                <a:spcPts val="1375"/>
+              </a:lnSpc>
+              <a:buNone/>
+            </a:pPr>
+            <a:r>
+              <a:rPr lang="en-US" sz="1100" dirty="0">
+                <a:solidFill>
+                  <a:srgbClr val="1C2833"/>
+                </a:solidFill>
+                <a:latin typeface="Courier New" pitchFamily="34" charset="0"/>
+                <a:ea typeface="Courier New" pitchFamily="34" charset="-122"/>
+                <a:cs typeface="Courier New" pitchFamily="34" charset="-120"/>
+              </a:rPr>
+              <a:t>W---+---E   ← in March/September the Sun rises due east</a:t>
+            </a:r>
+            <a:endParaRPr lang="en-US" sz="1100" dirty="0"/>
+          </a:p>
+        </p:txBody>
+      </p:sp>
+      <p:sp>
+        <p:nvSpPr>
+          <p:cNvPr id="9" name="Text 7"/>
+          <p:cNvSpPr/>
+          <p:nvPr/>
+        </p:nvSpPr>
+        <p:spPr>
+          <a:xfrm>
+            <a:off x="631627" y="1534269"/>
+            <a:ext cx="8086939" cy="174575"/>
+          </a:xfrm>
+          <a:prstGeom prst="rect">
+            <a:avLst/>
+          </a:prstGeom>
+          <a:noFill/>
+          <a:ln/>
+        </p:spPr>
+        <p:txBody>
+          <a:bodyPr wrap="square" lIns="0" tIns="0" rIns="0" bIns="0" rtlCol="0" anchor="t"/>
+          <a:lstStyle/>
+          <a:p>
+            <a:pPr algn="l" indent="0" marL="0">
+              <a:lnSpc>
+                <a:spcPts val="1375"/>
+              </a:lnSpc>
+              <a:buNone/>
+            </a:pPr>
+            <a:r>
+              <a:rPr lang="en-US" sz="1100" dirty="0">
+                <a:solidFill>
+                  <a:srgbClr val="1C2833"/>
+                </a:solidFill>
+                <a:latin typeface="Courier New" pitchFamily="34" charset="0"/>
+                <a:ea typeface="Courier New" pitchFamily="34" charset="-122"/>
+                <a:cs typeface="Courier New" pitchFamily="34" charset="-120"/>
+              </a:rPr>
+              <a:t>|          and sets due west</a:t>
+            </a:r>
+            <a:endParaRPr lang="en-US" sz="1100" dirty="0"/>
+          </a:p>
+        </p:txBody>
+      </p:sp>
+      <p:sp>
+        <p:nvSpPr>
+          <p:cNvPr id="10" name="Text 8"/>
+          <p:cNvSpPr/>
+          <p:nvPr/>
+        </p:nvSpPr>
+        <p:spPr>
+          <a:xfrm>
+            <a:off x="631627" y="1708845"/>
+            <a:ext cx="8086939" cy="174575"/>
+          </a:xfrm>
+          <a:prstGeom prst="rect">
+            <a:avLst/>
+          </a:prstGeom>
+          <a:noFill/>
+          <a:ln/>
+        </p:spPr>
+        <p:txBody>
+          <a:bodyPr wrap="square" lIns="0" tIns="0" rIns="0" bIns="0" rtlCol="0" anchor="t"/>
+          <a:lstStyle/>
+          <a:p>
+            <a:pPr algn="l" indent="0" marL="0">
+              <a:lnSpc>
+                <a:spcPts val="1375"/>
+              </a:lnSpc>
+              <a:buNone/>
+            </a:pPr>
+            <a:r>
+              <a:rPr lang="en-US" sz="1100" dirty="0">
+                <a:solidFill>
+                  <a:srgbClr val="1C2833"/>
+                </a:solidFill>
+                <a:latin typeface="Courier New" pitchFamily="34" charset="0"/>
+                <a:ea typeface="Courier New" pitchFamily="34" charset="-122"/>
+                <a:cs typeface="Courier New" pitchFamily="34" charset="-120"/>
+              </a:rPr>
+              <a:t>SOUTH</a:t>
+            </a:r>
+            <a:endParaRPr lang="en-US" sz="1100" dirty="0"/>
+          </a:p>
+        </p:txBody>
+      </p:sp>
+      <p:sp>
+        <p:nvSpPr>
+          <p:cNvPr id="11" name="Text 9"/>
+          <p:cNvSpPr/>
+          <p:nvPr/>
+        </p:nvSpPr>
+        <p:spPr>
+          <a:xfrm>
+            <a:off x="631627" y="2057995"/>
+            <a:ext cx="8086939" cy="174575"/>
+          </a:xfrm>
+          <a:prstGeom prst="rect">
+            <a:avLst/>
+          </a:prstGeom>
+          <a:noFill/>
+          <a:ln/>
+        </p:spPr>
+        <p:txBody>
+          <a:bodyPr wrap="square" lIns="0" tIns="0" rIns="0" bIns="0" rtlCol="0" anchor="t"/>
+          <a:lstStyle/>
+          <a:p>
+            <a:pPr algn="l" indent="0" marL="0">
+              <a:lnSpc>
+                <a:spcPts val="1375"/>
+              </a:lnSpc>
+              <a:buNone/>
+            </a:pPr>
+            <a:r>
+              <a:rPr lang="en-US" sz="1100" dirty="0">
+                <a:solidFill>
+                  <a:srgbClr val="1C2833"/>
+                </a:solidFill>
+                <a:latin typeface="Courier New" pitchFamily="34" charset="0"/>
+                <a:ea typeface="Courier New" pitchFamily="34" charset="-122"/>
+                <a:cs typeface="Courier New" pitchFamily="34" charset="-120"/>
+              </a:rPr>
+              <a:t>W---+---E   ← in June the rising point shifts NORTH of east</a:t>
+            </a:r>
+            <a:endParaRPr lang="en-US" sz="1100" dirty="0"/>
+          </a:p>
+        </p:txBody>
+      </p:sp>
+      <p:sp>
+        <p:nvSpPr>
+          <p:cNvPr id="12" name="Text 10"/>
+          <p:cNvSpPr/>
+          <p:nvPr/>
+        </p:nvSpPr>
+        <p:spPr>
+          <a:xfrm>
+            <a:off x="631627" y="2232571"/>
+            <a:ext cx="8086939" cy="174575"/>
+          </a:xfrm>
+          <a:prstGeom prst="rect">
+            <a:avLst/>
+          </a:prstGeom>
+          <a:noFill/>
+          <a:ln/>
+        </p:spPr>
+        <p:txBody>
+          <a:bodyPr wrap="square" lIns="0" tIns="0" rIns="0" bIns="0" rtlCol="0" anchor="t"/>
+          <a:lstStyle/>
+          <a:p>
+            <a:pPr algn="l" indent="0" marL="0">
+              <a:lnSpc>
+                <a:spcPts val="1375"/>
+              </a:lnSpc>
+              <a:buNone/>
+            </a:pPr>
+            <a:r>
+              <a:rPr lang="en-US" sz="1100" dirty="0">
+                <a:solidFill>
+                  <a:srgbClr val="1C2833"/>
+                </a:solidFill>
+                <a:latin typeface="Courier New" pitchFamily="34" charset="0"/>
+                <a:ea typeface="Courier New" pitchFamily="34" charset="-122"/>
+                <a:cs typeface="Courier New" pitchFamily="34" charset="-120"/>
+              </a:rPr>
+              <a:t>(high arc in the sky, long days)</a:t>
+            </a:r>
+            <a:endParaRPr lang="en-US" sz="1100" dirty="0"/>
+          </a:p>
+        </p:txBody>
+      </p:sp>
+      <p:sp>
+        <p:nvSpPr>
+          <p:cNvPr id="13" name="Text 11"/>
+          <p:cNvSpPr/>
+          <p:nvPr/>
+        </p:nvSpPr>
+        <p:spPr>
+          <a:xfrm>
+            <a:off x="631627" y="2581721"/>
+            <a:ext cx="8086939" cy="174575"/>
+          </a:xfrm>
+          <a:prstGeom prst="rect">
+            <a:avLst/>
+          </a:prstGeom>
+          <a:noFill/>
+          <a:ln/>
+        </p:spPr>
+        <p:txBody>
+          <a:bodyPr wrap="square" lIns="0" tIns="0" rIns="0" bIns="0" rtlCol="0" anchor="t"/>
+          <a:lstStyle/>
+          <a:p>
+            <a:pPr algn="l" indent="0" marL="0">
+              <a:lnSpc>
+                <a:spcPts val="1375"/>
+              </a:lnSpc>
+              <a:buNone/>
+            </a:pPr>
+            <a:r>
+              <a:rPr lang="en-US" sz="1100" dirty="0">
+                <a:solidFill>
+                  <a:srgbClr val="1C2833"/>
+                </a:solidFill>
+                <a:latin typeface="Courier New" pitchFamily="34" charset="0"/>
+                <a:ea typeface="Courier New" pitchFamily="34" charset="-122"/>
+                <a:cs typeface="Courier New" pitchFamily="34" charset="-120"/>
+              </a:rPr>
+              <a:t>W---+---E   ← in December it shifts SOUTH of east</a:t>
+            </a:r>
+            <a:endParaRPr lang="en-US" sz="1100" dirty="0"/>
+          </a:p>
+        </p:txBody>
+      </p:sp>
+      <p:sp>
+        <p:nvSpPr>
+          <p:cNvPr id="14" name="Text 12"/>
+          <p:cNvSpPr/>
+          <p:nvPr/>
+        </p:nvSpPr>
+        <p:spPr>
+          <a:xfrm>
+            <a:off x="631627" y="2756297"/>
+            <a:ext cx="8086939" cy="174575"/>
+          </a:xfrm>
+          <a:prstGeom prst="rect">
+            <a:avLst/>
+          </a:prstGeom>
+          <a:noFill/>
+          <a:ln/>
+        </p:spPr>
+        <p:txBody>
+          <a:bodyPr wrap="square" lIns="0" tIns="0" rIns="0" bIns="0" rtlCol="0" anchor="t"/>
+          <a:lstStyle/>
+          <a:p>
+            <a:pPr algn="l" indent="0" marL="0">
+              <a:lnSpc>
+                <a:spcPts val="1375"/>
+              </a:lnSpc>
+              <a:buNone/>
+            </a:pPr>
+            <a:r>
+              <a:rPr lang="en-US" sz="1100" dirty="0">
+                <a:solidFill>
+                  <a:srgbClr val="1C2833"/>
+                </a:solidFill>
+                <a:latin typeface="Courier New" pitchFamily="34" charset="0"/>
+                <a:ea typeface="Courier New" pitchFamily="34" charset="-122"/>
+                <a:cs typeface="Courier New" pitchFamily="34" charset="-120"/>
+              </a:rPr>
+              <a:t>(low arc, short days)</a:t>
+            </a:r>
+            <a:endParaRPr lang="en-US" sz="1100" dirty="0"/>
+          </a:p>
+        </p:txBody>
+      </p:sp>
+      <p:sp>
+        <p:nvSpPr>
+          <p:cNvPr id="15" name="Text 13"/>
           <p:cNvSpPr/>
           <p:nvPr/>
         </p:nvSpPr>
@@ -4525,7 +8234,7 @@
                 <a:ea typeface="Georgia" pitchFamily="34" charset="-122"/>
                 <a:cs typeface="Georgia" pitchFamily="34" charset="-120"/>
               </a:rPr>
-              <a:t>Differentiation</a:t>
+              <a:t>Core (20 min) (cont.)</a:t>
             </a:r>
             <a:endParaRPr lang="en-US" sz="1800" dirty="0"/>
           </a:p>
@@ -4563,6 +8272,66 @@
               <a:buChar char="•"/>
             </a:pPr>
             <a:r>
+              <a:rPr lang="en-US" sz="1200" dirty="0">
+                <a:solidFill>
+                  <a:srgbClr val="1C2833"/>
+                </a:solidFill>
+                <a:latin typeface="Arial" pitchFamily="34" charset="0"/>
+                <a:ea typeface="Arial" pitchFamily="34" charset="-122"/>
+                <a:cs typeface="Arial" pitchFamily="34" charset="-120"/>
+              </a:rPr>
+              <a:t>The path the Sun traces against the </a:t>
+            </a:r>
+            <a:pPr algn="l" indent="0" marL="0">
+              <a:lnSpc>
+                <a:spcPts val="1620"/>
+              </a:lnSpc>
+              <a:spcAft>
+                <a:spcPts val="300"/>
+              </a:spcAft>
+              <a:buNone/>
+            </a:pPr>
+            <a:r>
+              <a:rPr lang="en-US" sz="1200" i="1" dirty="0">
+                <a:solidFill>
+                  <a:srgbClr val="1C2833"/>
+                </a:solidFill>
+                <a:latin typeface="Arial" pitchFamily="34" charset="0"/>
+                <a:ea typeface="Arial" pitchFamily="34" charset="-122"/>
+                <a:cs typeface="Arial" pitchFamily="34" charset="-120"/>
+              </a:rPr>
+              <a:t>stars</a:t>
+            </a:r>
+            <a:pPr algn="l" indent="0" marL="0">
+              <a:lnSpc>
+                <a:spcPts val="1620"/>
+              </a:lnSpc>
+              <a:spcAft>
+                <a:spcPts val="300"/>
+              </a:spcAft>
+              <a:buNone/>
+            </a:pPr>
+            <a:r>
+              <a:rPr lang="en-US" sz="1200" dirty="0">
+                <a:solidFill>
+                  <a:srgbClr val="1C2833"/>
+                </a:solidFill>
+                <a:latin typeface="Arial" pitchFamily="34" charset="0"/>
+                <a:ea typeface="Arial" pitchFamily="34" charset="-122"/>
+                <a:cs typeface="Arial" pitchFamily="34" charset="-120"/>
+              </a:rPr>
+              <a:t> over a year is called the </a:t>
+            </a:r>
+            <a:pPr algn="l" indent="0" marL="0">
+              <a:lnSpc>
+                <a:spcPts val="1620"/>
+              </a:lnSpc>
+              <a:spcAft>
+                <a:spcPts val="300"/>
+              </a:spcAft>
+              <a:buNone/>
+            </a:pPr>
+            <a:r>
               <a:rPr lang="en-US" sz="1200" b="1" dirty="0">
                 <a:solidFill>
                   <a:srgbClr val="1C2833"/>
@@ -4571,7 +8340,7 @@
                 <a:ea typeface="Arial" pitchFamily="34" charset="-122"/>
                 <a:cs typeface="Arial" pitchFamily="34" charset="-120"/>
               </a:rPr>
-              <a:t>One tier up:</a:t>
+              <a:t>ecliptic</a:t>
             </a:r>
             <a:pPr algn="l" indent="0" marL="0">
               <a:lnSpc>
@@ -4591,7 +8360,7 @@
                 <a:ea typeface="Arial" pitchFamily="34" charset="-122"/>
                 <a:cs typeface="Arial" pitchFamily="34" charset="-120"/>
               </a:rPr>
-              <a:t> Find out (online or in the school library) the </a:t>
+              <a:t> (</a:t>
             </a:r>
             <a:pPr algn="l" indent="0" marL="0">
               <a:lnSpc>
@@ -4603,15 +8372,15 @@
               <a:buNone/>
             </a:pPr>
             <a:r>
-              <a:rPr lang="en-US" sz="1200" b="1" dirty="0">
-                <a:solidFill>
-                  <a:srgbClr val="1C2833"/>
-                </a:solidFill>
-                <a:latin typeface="Arial" pitchFamily="34" charset="0"/>
-                <a:ea typeface="Arial" pitchFamily="34" charset="-122"/>
-                <a:cs typeface="Arial" pitchFamily="34" charset="-120"/>
-              </a:rPr>
-              <a:t>time</a:t>
+              <a:rPr lang="en-US" sz="1200" i="1" dirty="0">
+                <a:solidFill>
+                  <a:srgbClr val="1C2833"/>
+                </a:solidFill>
+                <a:latin typeface="Arial" pitchFamily="34" charset="0"/>
+                <a:ea typeface="Arial" pitchFamily="34" charset="-122"/>
+                <a:cs typeface="Arial" pitchFamily="34" charset="-120"/>
+              </a:rPr>
+              <a:t>krānti-vṛtta</a:t>
             </a:r>
             <a:pPr algn="l" indent="0" marL="0">
               <a:lnSpc>
@@ -4631,7 +8400,7 @@
                 <a:ea typeface="Arial" pitchFamily="34" charset="-122"/>
                 <a:cs typeface="Arial" pitchFamily="34" charset="-120"/>
               </a:rPr>
-              <a:t> of sunrise and sunset for today AND for one day exactly six months from now. By how many minutes does the day length differ?</a:t>
+              <a:t>).</a:t>
             </a:r>
             <a:endParaRPr lang="en-US" sz="1200" dirty="0"/>
           </a:p>
@@ -4647,26 +8416,6 @@
               <a:buChar char="•"/>
             </a:pPr>
             <a:r>
-              <a:rPr lang="en-US" sz="1200" b="1" dirty="0">
-                <a:solidFill>
-                  <a:srgbClr val="1C2833"/>
-                </a:solidFill>
-                <a:latin typeface="Arial" pitchFamily="34" charset="0"/>
-                <a:ea typeface="Arial" pitchFamily="34" charset="-122"/>
-                <a:cs typeface="Arial" pitchFamily="34" charset="-120"/>
-              </a:rPr>
-              <a:t>One tier down:</a:t>
-            </a:r>
-            <a:pPr algn="l" indent="0" marL="0">
-              <a:lnSpc>
-                <a:spcPts val="1620"/>
-              </a:lnSpc>
-              <a:spcAft>
-                <a:spcPts val="300"/>
-              </a:spcAft>
-              <a:buNone/>
-            </a:pPr>
-            <a:r>
               <a:rPr lang="en-US" sz="1200" dirty="0">
                 <a:solidFill>
                   <a:srgbClr val="1C2833"/>
@@ -4675,7 +8424,7 @@
                 <a:ea typeface="Arial" pitchFamily="34" charset="-122"/>
                 <a:cs typeface="Arial" pitchFamily="34" charset="-120"/>
               </a:rPr>
-              <a:t> Just do the morning-glance — don't worry about sketching maps. Three mental notes are enough.</a:t>
+              <a:t>From Earth, we don't see the stars in daytime — but Indian astronomers worked out the ecliptic by noting which stars came up just before sunrise and just after sunset.</a:t>
             </a:r>
             <a:endParaRPr lang="en-US" sz="1200" dirty="0"/>
           </a:p>
